--- a/proposal-generator/template/proposal_template.pptx
+++ b/proposal-generator/template/proposal_template.pptx
@@ -3747,7 +3747,7 @@
     <p:bg>
       <p:bgPr>
         <a:solidFill>
-          <a:srgbClr val="232A55"/>
+          <a:srgbClr val="FFFFFF"/>
         </a:solidFill>
       </p:bgPr>
     </p:bg>
@@ -4153,7 +4153,7 @@
                 <a:cs typeface="Arial"/>
                 <a:sym typeface="Arial"/>
               </a:rPr>
-              <a:t>検索・比較されたときに「この会社に相談したい」と思われる状態をつくる、Googleビジネスプロフィール改善・運用サービスのご提案。</a:t>
+              <a:t>検索・比較されたときに「ここにお願いしたい」と思われる状態をつくる、Googleビジネスプロフィール改善・運用サービスのご提案。</a:t>
             </a:r>
             <a:endParaRPr b="0" i="0" sz="1400" u="none" cap="none" strike="noStrike">
               <a:solidFill>
@@ -4708,7 +4708,3232 @@
     <p:bg>
       <p:bgPr>
         <a:solidFill>
-          <a:srgbClr val="232A55"/>
+          <a:srgbClr val="FFFFFF"/>
+        </a:solidFill>
+      </p:bgPr>
+    </p:bg>
+    <p:spTree>
+      <p:nvGrpSpPr>
+        <p:cNvPr id="248" name="Shape 248"/>
+        <p:cNvGrpSpPr/>
+        <p:nvPr/>
+      </p:nvGrpSpPr>
+      <p:grpSpPr>
+        <a:xfrm>
+          <a:off x="0" y="0"/>
+          <a:ext cx="0" cy="0"/>
+          <a:chOff x="0" y="0"/>
+          <a:chExt cx="0" cy="0"/>
+        </a:xfrm>
+      </p:grpSpPr>
+      <p:sp>
+        <p:nvSpPr>
+          <p:cNvPr id="249" name="Google Shape;249;p11"/>
+          <p:cNvSpPr/>
+          <p:nvPr/>
+        </p:nvSpPr>
+        <p:spPr>
+          <a:xfrm>
+            <a:off x="10149840" y="-1188720"/>
+            <a:ext cx="2926080" cy="2926080"/>
+          </a:xfrm>
+          <a:prstGeom prst="ellipse">
+            <a:avLst/>
+          </a:prstGeom>
+          <a:solidFill>
+            <a:srgbClr val="3E4BA0">
+              <a:alpha val="7843"/>
+            </a:srgbClr>
+          </a:solidFill>
+          <a:ln>
+            <a:noFill/>
+          </a:ln>
+        </p:spPr>
+        <p:txBody>
+          <a:bodyPr anchorCtr="0" anchor="ctr" bIns="91425" lIns="91425" spcFirstLastPara="1" rIns="91425" wrap="square" tIns="91425">
+            <a:noAutofit/>
+          </a:bodyPr>
+          <a:lstStyle/>
+          <a:p>
+            <a:pPr indent="0" lvl="0" marL="0" rtl="0" algn="l">
+              <a:spcBef>
+                <a:spcPts val="0"/>
+              </a:spcBef>
+              <a:spcAft>
+                <a:spcPts val="0"/>
+              </a:spcAft>
+              <a:buNone/>
+            </a:pPr>
+            <a:r>
+              <a:t/>
+            </a:r>
+            <a:endParaRPr/>
+          </a:p>
+        </p:txBody>
+      </p:sp>
+      <p:sp>
+        <p:nvSpPr>
+          <p:cNvPr id="250" name="Google Shape;250;p11"/>
+          <p:cNvSpPr/>
+          <p:nvPr/>
+        </p:nvSpPr>
+        <p:spPr>
+          <a:xfrm>
+            <a:off x="548640" y="411480"/>
+            <a:ext cx="182880" cy="182880"/>
+          </a:xfrm>
+          <a:prstGeom prst="roundRect">
+            <a:avLst>
+              <a:gd fmla="val 25000" name="adj"/>
+            </a:avLst>
+          </a:prstGeom>
+          <a:solidFill>
+            <a:srgbClr val="F4748A"/>
+          </a:solidFill>
+          <a:ln>
+            <a:noFill/>
+          </a:ln>
+        </p:spPr>
+        <p:txBody>
+          <a:bodyPr anchorCtr="0" anchor="ctr" bIns="91425" lIns="91425" spcFirstLastPara="1" rIns="91425" wrap="square" tIns="91425">
+            <a:noAutofit/>
+          </a:bodyPr>
+          <a:lstStyle/>
+          <a:p>
+            <a:pPr indent="0" lvl="0" marL="0" rtl="0" algn="l">
+              <a:spcBef>
+                <a:spcPts val="0"/>
+              </a:spcBef>
+              <a:spcAft>
+                <a:spcPts val="0"/>
+              </a:spcAft>
+              <a:buNone/>
+            </a:pPr>
+            <a:r>
+              <a:t/>
+            </a:r>
+            <a:endParaRPr/>
+          </a:p>
+        </p:txBody>
+      </p:sp>
+      <p:sp>
+        <p:nvSpPr>
+          <p:cNvPr id="251" name="Google Shape;251;p11"/>
+          <p:cNvSpPr/>
+          <p:nvPr/>
+        </p:nvSpPr>
+        <p:spPr>
+          <a:xfrm>
+            <a:off x="841248" y="329184"/>
+            <a:ext cx="10771632" cy="292608"/>
+          </a:xfrm>
+          <a:prstGeom prst="rect">
+            <a:avLst/>
+          </a:prstGeom>
+          <a:noFill/>
+          <a:ln>
+            <a:noFill/>
+          </a:ln>
+        </p:spPr>
+        <p:txBody>
+          <a:bodyPr anchorCtr="0" anchor="ctr" bIns="0" lIns="0" spcFirstLastPara="1" rIns="0" wrap="square" tIns="0">
+            <a:noAutofit/>
+          </a:bodyPr>
+          <a:lstStyle/>
+          <a:p>
+            <a:pPr indent="0" lvl="0" marL="0" marR="0" rtl="0" algn="l">
+              <a:spcBef>
+                <a:spcPts val="0"/>
+              </a:spcBef>
+              <a:spcAft>
+                <a:spcPts val="0"/>
+              </a:spcAft>
+              <a:buClr>
+                <a:srgbClr val="F4748A"/>
+              </a:buClr>
+              <a:buSzPts val="1200"/>
+              <a:buFont typeface="Arial"/>
+              <a:buNone/>
+            </a:pPr>
+            <a:r>
+              <a:rPr b="1" i="0" lang="en-US" sz="1200" u="none" cap="none" strike="noStrike">
+                <a:solidFill>
+                  <a:srgbClr val="F4748A"/>
+                </a:solidFill>
+                <a:latin typeface="Arial"/>
+                <a:ea typeface="Arial"/>
+                <a:cs typeface="Arial"/>
+                <a:sym typeface="Arial"/>
+              </a:rPr>
+              <a:t>EXPECTED OUTCOMES</a:t>
+            </a:r>
+            <a:endParaRPr b="0" i="0" sz="1200" u="none" cap="none" strike="noStrike">
+              <a:solidFill>
+                <a:schemeClr val="dk1"/>
+              </a:solidFill>
+              <a:latin typeface="Calibri"/>
+              <a:ea typeface="Calibri"/>
+              <a:cs typeface="Calibri"/>
+              <a:sym typeface="Calibri"/>
+            </a:endParaRPr>
+          </a:p>
+        </p:txBody>
+      </p:sp>
+      <p:sp>
+        <p:nvSpPr>
+          <p:cNvPr id="252" name="Google Shape;252;p11"/>
+          <p:cNvSpPr/>
+          <p:nvPr/>
+        </p:nvSpPr>
+        <p:spPr>
+          <a:xfrm>
+            <a:off x="548640" y="603504"/>
+            <a:ext cx="11064240" cy="603504"/>
+          </a:xfrm>
+          <a:prstGeom prst="rect">
+            <a:avLst/>
+          </a:prstGeom>
+          <a:noFill/>
+          <a:ln>
+            <a:noFill/>
+          </a:ln>
+        </p:spPr>
+        <p:txBody>
+          <a:bodyPr anchorCtr="0" anchor="ctr" bIns="0" lIns="0" spcFirstLastPara="1" rIns="0" wrap="square" tIns="0">
+            <a:noAutofit/>
+          </a:bodyPr>
+          <a:lstStyle/>
+          <a:p>
+            <a:pPr indent="0" lvl="0" marL="0" marR="0" rtl="0" algn="l">
+              <a:spcBef>
+                <a:spcPts val="0"/>
+              </a:spcBef>
+              <a:spcAft>
+                <a:spcPts val="0"/>
+              </a:spcAft>
+              <a:buClr>
+                <a:srgbClr val="20223F"/>
+              </a:buClr>
+              <a:buSzPts val="2700"/>
+              <a:buFont typeface="Arial"/>
+              <a:buNone/>
+            </a:pPr>
+            <a:r>
+              <a:rPr b="1" i="0" lang="en-US" sz="2700" u="none" cap="none" strike="noStrike">
+                <a:solidFill>
+                  <a:srgbClr val="20223F"/>
+                </a:solidFill>
+                <a:latin typeface="Arial"/>
+                <a:ea typeface="Arial"/>
+                <a:cs typeface="Arial"/>
+                <a:sym typeface="Arial"/>
+              </a:rPr>
+              <a:t>本サービスで期待できる効果</a:t>
+            </a:r>
+            <a:endParaRPr b="0" i="0" sz="2700" u="none" cap="none" strike="noStrike">
+              <a:solidFill>
+                <a:schemeClr val="dk1"/>
+              </a:solidFill>
+              <a:latin typeface="Calibri"/>
+              <a:ea typeface="Calibri"/>
+              <a:cs typeface="Calibri"/>
+              <a:sym typeface="Calibri"/>
+            </a:endParaRPr>
+          </a:p>
+        </p:txBody>
+      </p:sp>
+      <p:sp>
+        <p:nvSpPr>
+          <p:cNvPr id="253" name="Google Shape;253;p11"/>
+          <p:cNvSpPr/>
+          <p:nvPr/>
+        </p:nvSpPr>
+        <p:spPr>
+          <a:xfrm>
+            <a:off x="548640" y="1463040"/>
+            <a:ext cx="3535680" cy="1783080"/>
+          </a:xfrm>
+          <a:prstGeom prst="roundRect">
+            <a:avLst>
+              <a:gd fmla="val 5128" name="adj"/>
+            </a:avLst>
+          </a:prstGeom>
+          <a:solidFill>
+            <a:srgbClr val="FFFFFF"/>
+          </a:solidFill>
+          <a:ln cap="flat" cmpd="sng" w="12700">
+            <a:solidFill>
+              <a:srgbClr val="E2E4F0"/>
+            </a:solidFill>
+            <a:prstDash val="solid"/>
+            <a:round/>
+            <a:headEnd len="sm" w="sm" type="none"/>
+            <a:tailEnd len="sm" w="sm" type="none"/>
+          </a:ln>
+          <a:effectLst>
+            <a:outerShdw blurRad="114300" rotWithShape="0" algn="bl" dir="5400000" dist="38100">
+              <a:srgbClr val="232A55">
+                <a:alpha val="12156"/>
+              </a:srgbClr>
+            </a:outerShdw>
+          </a:effectLst>
+        </p:spPr>
+        <p:txBody>
+          <a:bodyPr anchorCtr="0" anchor="ctr" bIns="91425" lIns="91425" spcFirstLastPara="1" rIns="91425" wrap="square" tIns="91425">
+            <a:noAutofit/>
+          </a:bodyPr>
+          <a:lstStyle/>
+          <a:p>
+            <a:pPr indent="0" lvl="0" marL="0" rtl="0" algn="l">
+              <a:spcBef>
+                <a:spcPts val="0"/>
+              </a:spcBef>
+              <a:spcAft>
+                <a:spcPts val="0"/>
+              </a:spcAft>
+              <a:buNone/>
+            </a:pPr>
+            <a:r>
+              <a:t/>
+            </a:r>
+            <a:endParaRPr/>
+          </a:p>
+        </p:txBody>
+      </p:sp>
+      <p:sp>
+        <p:nvSpPr>
+          <p:cNvPr id="254" name="Google Shape;254;p11"/>
+          <p:cNvSpPr/>
+          <p:nvPr/>
+        </p:nvSpPr>
+        <p:spPr>
+          <a:xfrm>
+            <a:off x="804672" y="1700784"/>
+            <a:ext cx="512064" cy="512064"/>
+          </a:xfrm>
+          <a:prstGeom prst="roundRect">
+            <a:avLst>
+              <a:gd fmla="val 28000" name="adj"/>
+            </a:avLst>
+          </a:prstGeom>
+          <a:solidFill>
+            <a:srgbClr val="3E4BA0"/>
+          </a:solidFill>
+          <a:ln>
+            <a:noFill/>
+          </a:ln>
+        </p:spPr>
+        <p:txBody>
+          <a:bodyPr anchorCtr="0" anchor="ctr" bIns="91425" lIns="91425" spcFirstLastPara="1" rIns="91425" wrap="square" tIns="91425">
+            <a:noAutofit/>
+          </a:bodyPr>
+          <a:lstStyle/>
+          <a:p>
+            <a:pPr indent="0" lvl="0" marL="0" rtl="0" algn="l">
+              <a:spcBef>
+                <a:spcPts val="0"/>
+              </a:spcBef>
+              <a:spcAft>
+                <a:spcPts val="0"/>
+              </a:spcAft>
+              <a:buNone/>
+            </a:pPr>
+            <a:r>
+              <a:t/>
+            </a:r>
+            <a:endParaRPr/>
+          </a:p>
+        </p:txBody>
+      </p:sp>
+      <p:pic>
+        <p:nvPicPr>
+          <p:cNvPr descr="preencoded.png" id="255" name="Google Shape;255;p11"/>
+          <p:cNvPicPr preferRelativeResize="0"/>
+          <p:nvPr/>
+        </p:nvPicPr>
+        <p:blipFill rotWithShape="1">
+          <a:blip r:embed="rId3">
+            <a:alphaModFix/>
+          </a:blip>
+          <a:srcRect b="0" l="0" r="0" t="0"/>
+          <a:stretch/>
+        </p:blipFill>
+        <p:spPr>
+          <a:xfrm>
+            <a:off x="919886" y="1815998"/>
+            <a:ext cx="281635" cy="281635"/>
+          </a:xfrm>
+          <a:prstGeom prst="rect">
+            <a:avLst/>
+          </a:prstGeom>
+          <a:noFill/>
+          <a:ln>
+            <a:noFill/>
+          </a:ln>
+        </p:spPr>
+      </p:pic>
+      <p:sp>
+        <p:nvSpPr>
+          <p:cNvPr id="256" name="Google Shape;256;p11"/>
+          <p:cNvSpPr/>
+          <p:nvPr/>
+        </p:nvSpPr>
+        <p:spPr>
+          <a:xfrm>
+            <a:off x="804672" y="2304288"/>
+            <a:ext cx="3078480" cy="457200"/>
+          </a:xfrm>
+          <a:prstGeom prst="rect">
+            <a:avLst/>
+          </a:prstGeom>
+          <a:noFill/>
+          <a:ln>
+            <a:noFill/>
+          </a:ln>
+        </p:spPr>
+        <p:txBody>
+          <a:bodyPr anchorCtr="0" anchor="ctr" bIns="0" lIns="0" spcFirstLastPara="1" rIns="0" wrap="square" tIns="0">
+            <a:noAutofit/>
+          </a:bodyPr>
+          <a:lstStyle/>
+          <a:p>
+            <a:pPr indent="0" lvl="0" marL="0" marR="0" rtl="0" algn="l">
+              <a:lnSpc>
+                <a:spcPct val="105000"/>
+              </a:lnSpc>
+              <a:spcBef>
+                <a:spcPts val="0"/>
+              </a:spcBef>
+              <a:spcAft>
+                <a:spcPts val="0"/>
+              </a:spcAft>
+              <a:buClr>
+                <a:srgbClr val="20223F"/>
+              </a:buClr>
+              <a:buSzPts val="1350"/>
+              <a:buFont typeface="Arial"/>
+              <a:buNone/>
+            </a:pPr>
+            <a:r>
+              <a:rPr b="1" i="0" lang="en-US" sz="1350" u="none" cap="none" strike="noStrike">
+                <a:solidFill>
+                  <a:srgbClr val="20223F"/>
+                </a:solidFill>
+                <a:latin typeface="Arial"/>
+                <a:ea typeface="Arial"/>
+                <a:cs typeface="Arial"/>
+                <a:sym typeface="Arial"/>
+              </a:rPr>
+              <a:t>Googleに正しく認識される</a:t>
+            </a:r>
+            <a:endParaRPr b="0" i="0" sz="1350" u="none" cap="none" strike="noStrike">
+              <a:solidFill>
+                <a:schemeClr val="dk1"/>
+              </a:solidFill>
+              <a:latin typeface="Calibri"/>
+              <a:ea typeface="Calibri"/>
+              <a:cs typeface="Calibri"/>
+              <a:sym typeface="Calibri"/>
+            </a:endParaRPr>
+          </a:p>
+        </p:txBody>
+      </p:sp>
+      <p:sp>
+        <p:nvSpPr>
+          <p:cNvPr id="257" name="Google Shape;257;p11"/>
+          <p:cNvSpPr/>
+          <p:nvPr/>
+        </p:nvSpPr>
+        <p:spPr>
+          <a:xfrm>
+            <a:off x="804672" y="2670048"/>
+            <a:ext cx="3078480" cy="548640"/>
+          </a:xfrm>
+          <a:prstGeom prst="rect">
+            <a:avLst/>
+          </a:prstGeom>
+          <a:noFill/>
+          <a:ln>
+            <a:noFill/>
+          </a:ln>
+        </p:spPr>
+        <p:txBody>
+          <a:bodyPr anchorCtr="0" anchor="ctr" bIns="0" lIns="0" spcFirstLastPara="1" rIns="0" wrap="square" tIns="0">
+            <a:noAutofit/>
+          </a:bodyPr>
+          <a:lstStyle/>
+          <a:p>
+            <a:pPr indent="0" lvl="0" marL="0" marR="0" rtl="0" algn="l">
+              <a:lnSpc>
+                <a:spcPct val="112000"/>
+              </a:lnSpc>
+              <a:spcBef>
+                <a:spcPts val="0"/>
+              </a:spcBef>
+              <a:spcAft>
+                <a:spcPts val="0"/>
+              </a:spcAft>
+              <a:buClr>
+                <a:srgbClr val="6B7280"/>
+              </a:buClr>
+              <a:buSzPts val="1050"/>
+              <a:buFont typeface="Arial"/>
+              <a:buNone/>
+            </a:pPr>
+            <a:r>
+              <a:rPr b="0" i="0" lang="en-US" sz="1050" u="none" cap="none" strike="noStrike">
+                <a:solidFill>
+                  <a:srgbClr val="6B7280"/>
+                </a:solidFill>
+                <a:latin typeface="Arial"/>
+                <a:ea typeface="Arial"/>
+                <a:cs typeface="Arial"/>
+                <a:sym typeface="Arial"/>
+              </a:rPr>
+              <a:t>地域名・サービス内容・強みが正しく伝わり、関連キーワードで表示されやすい状態へ</a:t>
+            </a:r>
+            <a:endParaRPr b="0" i="0" sz="1050" u="none" cap="none" strike="noStrike">
+              <a:solidFill>
+                <a:schemeClr val="dk1"/>
+              </a:solidFill>
+              <a:latin typeface="Calibri"/>
+              <a:ea typeface="Calibri"/>
+              <a:cs typeface="Calibri"/>
+              <a:sym typeface="Calibri"/>
+            </a:endParaRPr>
+          </a:p>
+        </p:txBody>
+      </p:sp>
+      <p:sp>
+        <p:nvSpPr>
+          <p:cNvPr id="258" name="Google Shape;258;p11"/>
+          <p:cNvSpPr/>
+          <p:nvPr/>
+        </p:nvSpPr>
+        <p:spPr>
+          <a:xfrm>
+            <a:off x="4312920" y="1463040"/>
+            <a:ext cx="3535680" cy="1783080"/>
+          </a:xfrm>
+          <a:prstGeom prst="roundRect">
+            <a:avLst>
+              <a:gd fmla="val 5128" name="adj"/>
+            </a:avLst>
+          </a:prstGeom>
+          <a:solidFill>
+            <a:srgbClr val="FFFFFF"/>
+          </a:solidFill>
+          <a:ln cap="flat" cmpd="sng" w="12700">
+            <a:solidFill>
+              <a:srgbClr val="E2E4F0"/>
+            </a:solidFill>
+            <a:prstDash val="solid"/>
+            <a:round/>
+            <a:headEnd len="sm" w="sm" type="none"/>
+            <a:tailEnd len="sm" w="sm" type="none"/>
+          </a:ln>
+          <a:effectLst>
+            <a:outerShdw blurRad="114300" rotWithShape="0" algn="bl" dir="5400000" dist="38100">
+              <a:srgbClr val="232A55">
+                <a:alpha val="12156"/>
+              </a:srgbClr>
+            </a:outerShdw>
+          </a:effectLst>
+        </p:spPr>
+        <p:txBody>
+          <a:bodyPr anchorCtr="0" anchor="ctr" bIns="91425" lIns="91425" spcFirstLastPara="1" rIns="91425" wrap="square" tIns="91425">
+            <a:noAutofit/>
+          </a:bodyPr>
+          <a:lstStyle/>
+          <a:p>
+            <a:pPr indent="0" lvl="0" marL="0" rtl="0" algn="l">
+              <a:spcBef>
+                <a:spcPts val="0"/>
+              </a:spcBef>
+              <a:spcAft>
+                <a:spcPts val="0"/>
+              </a:spcAft>
+              <a:buNone/>
+            </a:pPr>
+            <a:r>
+              <a:t/>
+            </a:r>
+            <a:endParaRPr/>
+          </a:p>
+        </p:txBody>
+      </p:sp>
+      <p:sp>
+        <p:nvSpPr>
+          <p:cNvPr id="259" name="Google Shape;259;p11"/>
+          <p:cNvSpPr/>
+          <p:nvPr/>
+        </p:nvSpPr>
+        <p:spPr>
+          <a:xfrm>
+            <a:off x="4568952" y="1700784"/>
+            <a:ext cx="512064" cy="512064"/>
+          </a:xfrm>
+          <a:prstGeom prst="roundRect">
+            <a:avLst>
+              <a:gd fmla="val 28000" name="adj"/>
+            </a:avLst>
+          </a:prstGeom>
+          <a:solidFill>
+            <a:srgbClr val="F4748A"/>
+          </a:solidFill>
+          <a:ln>
+            <a:noFill/>
+          </a:ln>
+        </p:spPr>
+        <p:txBody>
+          <a:bodyPr anchorCtr="0" anchor="ctr" bIns="91425" lIns="91425" spcFirstLastPara="1" rIns="91425" wrap="square" tIns="91425">
+            <a:noAutofit/>
+          </a:bodyPr>
+          <a:lstStyle/>
+          <a:p>
+            <a:pPr indent="0" lvl="0" marL="0" rtl="0" algn="l">
+              <a:spcBef>
+                <a:spcPts val="0"/>
+              </a:spcBef>
+              <a:spcAft>
+                <a:spcPts val="0"/>
+              </a:spcAft>
+              <a:buNone/>
+            </a:pPr>
+            <a:r>
+              <a:t/>
+            </a:r>
+            <a:endParaRPr/>
+          </a:p>
+        </p:txBody>
+      </p:sp>
+      <p:pic>
+        <p:nvPicPr>
+          <p:cNvPr descr="preencoded.png" id="260" name="Google Shape;260;p11"/>
+          <p:cNvPicPr preferRelativeResize="0"/>
+          <p:nvPr/>
+        </p:nvPicPr>
+        <p:blipFill rotWithShape="1">
+          <a:blip r:embed="rId4">
+            <a:alphaModFix/>
+          </a:blip>
+          <a:srcRect b="0" l="0" r="0" t="0"/>
+          <a:stretch/>
+        </p:blipFill>
+        <p:spPr>
+          <a:xfrm>
+            <a:off x="4684166" y="1815998"/>
+            <a:ext cx="281635" cy="281635"/>
+          </a:xfrm>
+          <a:prstGeom prst="rect">
+            <a:avLst/>
+          </a:prstGeom>
+          <a:noFill/>
+          <a:ln>
+            <a:noFill/>
+          </a:ln>
+        </p:spPr>
+      </p:pic>
+      <p:sp>
+        <p:nvSpPr>
+          <p:cNvPr id="261" name="Google Shape;261;p11"/>
+          <p:cNvSpPr/>
+          <p:nvPr/>
+        </p:nvSpPr>
+        <p:spPr>
+          <a:xfrm>
+            <a:off x="4568952" y="2304288"/>
+            <a:ext cx="3078480" cy="457200"/>
+          </a:xfrm>
+          <a:prstGeom prst="rect">
+            <a:avLst/>
+          </a:prstGeom>
+          <a:noFill/>
+          <a:ln>
+            <a:noFill/>
+          </a:ln>
+        </p:spPr>
+        <p:txBody>
+          <a:bodyPr anchorCtr="0" anchor="ctr" bIns="0" lIns="0" spcFirstLastPara="1" rIns="0" wrap="square" tIns="0">
+            <a:noAutofit/>
+          </a:bodyPr>
+          <a:lstStyle/>
+          <a:p>
+            <a:pPr indent="0" lvl="0" marL="0" marR="0" rtl="0" algn="l">
+              <a:lnSpc>
+                <a:spcPct val="105000"/>
+              </a:lnSpc>
+              <a:spcBef>
+                <a:spcPts val="0"/>
+              </a:spcBef>
+              <a:spcAft>
+                <a:spcPts val="0"/>
+              </a:spcAft>
+              <a:buClr>
+                <a:srgbClr val="20223F"/>
+              </a:buClr>
+              <a:buSzPts val="1350"/>
+              <a:buFont typeface="Arial"/>
+              <a:buNone/>
+            </a:pPr>
+            <a:r>
+              <a:rPr b="1" i="0" lang="en-US" sz="1350" u="none" cap="none" strike="noStrike">
+                <a:solidFill>
+                  <a:srgbClr val="20223F"/>
+                </a:solidFill>
+                <a:latin typeface="Arial"/>
+                <a:ea typeface="Arial"/>
+                <a:cs typeface="Arial"/>
+                <a:sym typeface="Arial"/>
+              </a:rPr>
+              <a:t>比較されたときに強みが伝わる</a:t>
+            </a:r>
+            <a:endParaRPr b="0" i="0" sz="1350" u="none" cap="none" strike="noStrike">
+              <a:solidFill>
+                <a:schemeClr val="dk1"/>
+              </a:solidFill>
+              <a:latin typeface="Calibri"/>
+              <a:ea typeface="Calibri"/>
+              <a:cs typeface="Calibri"/>
+              <a:sym typeface="Calibri"/>
+            </a:endParaRPr>
+          </a:p>
+        </p:txBody>
+      </p:sp>
+      <p:sp>
+        <p:nvSpPr>
+          <p:cNvPr id="262" name="Google Shape;262;p11"/>
+          <p:cNvSpPr/>
+          <p:nvPr/>
+        </p:nvSpPr>
+        <p:spPr>
+          <a:xfrm>
+            <a:off x="4568952" y="2670048"/>
+            <a:ext cx="3078480" cy="548640"/>
+          </a:xfrm>
+          <a:prstGeom prst="rect">
+            <a:avLst/>
+          </a:prstGeom>
+          <a:noFill/>
+          <a:ln>
+            <a:noFill/>
+          </a:ln>
+        </p:spPr>
+        <p:txBody>
+          <a:bodyPr anchorCtr="0" anchor="ctr" bIns="0" lIns="0" spcFirstLastPara="1" rIns="0" wrap="square" tIns="0">
+            <a:noAutofit/>
+          </a:bodyPr>
+          <a:lstStyle/>
+          <a:p>
+            <a:pPr indent="0" lvl="0" marL="0" marR="0" rtl="0" algn="l">
+              <a:lnSpc>
+                <a:spcPct val="112000"/>
+              </a:lnSpc>
+              <a:spcBef>
+                <a:spcPts val="0"/>
+              </a:spcBef>
+              <a:spcAft>
+                <a:spcPts val="0"/>
+              </a:spcAft>
+              <a:buClr>
+                <a:srgbClr val="6B7280"/>
+              </a:buClr>
+              <a:buSzPts val="1050"/>
+              <a:buFont typeface="Arial"/>
+              <a:buNone/>
+            </a:pPr>
+            <a:r>
+              <a:rPr b="0" i="0" lang="en-US" sz="1050" u="none" cap="none" strike="noStrike">
+                <a:solidFill>
+                  <a:srgbClr val="6B7280"/>
+                </a:solidFill>
+                <a:latin typeface="Arial"/>
+                <a:ea typeface="Arial"/>
+                <a:cs typeface="Arial"/>
+                <a:sym typeface="Arial"/>
+              </a:rPr>
+              <a:t>売却・買取・相続・リノベ・借地権など、専門性が比較時に一目で伝わる状態に</a:t>
+            </a:r>
+            <a:endParaRPr b="0" i="0" sz="1050" u="none" cap="none" strike="noStrike">
+              <a:solidFill>
+                <a:schemeClr val="dk1"/>
+              </a:solidFill>
+              <a:latin typeface="Calibri"/>
+              <a:ea typeface="Calibri"/>
+              <a:cs typeface="Calibri"/>
+              <a:sym typeface="Calibri"/>
+            </a:endParaRPr>
+          </a:p>
+        </p:txBody>
+      </p:sp>
+      <p:sp>
+        <p:nvSpPr>
+          <p:cNvPr id="263" name="Google Shape;263;p11"/>
+          <p:cNvSpPr/>
+          <p:nvPr/>
+        </p:nvSpPr>
+        <p:spPr>
+          <a:xfrm>
+            <a:off x="8077200" y="1463040"/>
+            <a:ext cx="3535680" cy="1783080"/>
+          </a:xfrm>
+          <a:prstGeom prst="roundRect">
+            <a:avLst>
+              <a:gd fmla="val 5128" name="adj"/>
+            </a:avLst>
+          </a:prstGeom>
+          <a:solidFill>
+            <a:srgbClr val="FFFFFF"/>
+          </a:solidFill>
+          <a:ln cap="flat" cmpd="sng" w="12700">
+            <a:solidFill>
+              <a:srgbClr val="E2E4F0"/>
+            </a:solidFill>
+            <a:prstDash val="solid"/>
+            <a:round/>
+            <a:headEnd len="sm" w="sm" type="none"/>
+            <a:tailEnd len="sm" w="sm" type="none"/>
+          </a:ln>
+          <a:effectLst>
+            <a:outerShdw blurRad="114300" rotWithShape="0" algn="bl" dir="5400000" dist="38100">
+              <a:srgbClr val="232A55">
+                <a:alpha val="12156"/>
+              </a:srgbClr>
+            </a:outerShdw>
+          </a:effectLst>
+        </p:spPr>
+        <p:txBody>
+          <a:bodyPr anchorCtr="0" anchor="ctr" bIns="91425" lIns="91425" spcFirstLastPara="1" rIns="91425" wrap="square" tIns="91425">
+            <a:noAutofit/>
+          </a:bodyPr>
+          <a:lstStyle/>
+          <a:p>
+            <a:pPr indent="0" lvl="0" marL="0" rtl="0" algn="l">
+              <a:spcBef>
+                <a:spcPts val="0"/>
+              </a:spcBef>
+              <a:spcAft>
+                <a:spcPts val="0"/>
+              </a:spcAft>
+              <a:buNone/>
+            </a:pPr>
+            <a:r>
+              <a:t/>
+            </a:r>
+            <a:endParaRPr/>
+          </a:p>
+        </p:txBody>
+      </p:sp>
+      <p:sp>
+        <p:nvSpPr>
+          <p:cNvPr id="264" name="Google Shape;264;p11"/>
+          <p:cNvSpPr/>
+          <p:nvPr/>
+        </p:nvSpPr>
+        <p:spPr>
+          <a:xfrm>
+            <a:off x="8333232" y="1700784"/>
+            <a:ext cx="512064" cy="512064"/>
+          </a:xfrm>
+          <a:prstGeom prst="roundRect">
+            <a:avLst>
+              <a:gd fmla="val 28000" name="adj"/>
+            </a:avLst>
+          </a:prstGeom>
+          <a:solidFill>
+            <a:srgbClr val="10987A"/>
+          </a:solidFill>
+          <a:ln>
+            <a:noFill/>
+          </a:ln>
+        </p:spPr>
+        <p:txBody>
+          <a:bodyPr anchorCtr="0" anchor="ctr" bIns="91425" lIns="91425" spcFirstLastPara="1" rIns="91425" wrap="square" tIns="91425">
+            <a:noAutofit/>
+          </a:bodyPr>
+          <a:lstStyle/>
+          <a:p>
+            <a:pPr indent="0" lvl="0" marL="0" rtl="0" algn="l">
+              <a:spcBef>
+                <a:spcPts val="0"/>
+              </a:spcBef>
+              <a:spcAft>
+                <a:spcPts val="0"/>
+              </a:spcAft>
+              <a:buNone/>
+            </a:pPr>
+            <a:r>
+              <a:t/>
+            </a:r>
+            <a:endParaRPr/>
+          </a:p>
+        </p:txBody>
+      </p:sp>
+      <p:pic>
+        <p:nvPicPr>
+          <p:cNvPr descr="preencoded.png" id="265" name="Google Shape;265;p11"/>
+          <p:cNvPicPr preferRelativeResize="0"/>
+          <p:nvPr/>
+        </p:nvPicPr>
+        <p:blipFill rotWithShape="1">
+          <a:blip r:embed="rId5">
+            <a:alphaModFix/>
+          </a:blip>
+          <a:srcRect b="0" l="0" r="0" t="0"/>
+          <a:stretch/>
+        </p:blipFill>
+        <p:spPr>
+          <a:xfrm>
+            <a:off x="8448446" y="1815998"/>
+            <a:ext cx="281635" cy="281635"/>
+          </a:xfrm>
+          <a:prstGeom prst="rect">
+            <a:avLst/>
+          </a:prstGeom>
+          <a:noFill/>
+          <a:ln>
+            <a:noFill/>
+          </a:ln>
+        </p:spPr>
+      </p:pic>
+      <p:sp>
+        <p:nvSpPr>
+          <p:cNvPr id="266" name="Google Shape;266;p11"/>
+          <p:cNvSpPr/>
+          <p:nvPr/>
+        </p:nvSpPr>
+        <p:spPr>
+          <a:xfrm>
+            <a:off x="8333232" y="2304288"/>
+            <a:ext cx="3078480" cy="457200"/>
+          </a:xfrm>
+          <a:prstGeom prst="rect">
+            <a:avLst/>
+          </a:prstGeom>
+          <a:noFill/>
+          <a:ln>
+            <a:noFill/>
+          </a:ln>
+        </p:spPr>
+        <p:txBody>
+          <a:bodyPr anchorCtr="0" anchor="ctr" bIns="0" lIns="0" spcFirstLastPara="1" rIns="0" wrap="square" tIns="0">
+            <a:noAutofit/>
+          </a:bodyPr>
+          <a:lstStyle/>
+          <a:p>
+            <a:pPr indent="0" lvl="0" marL="0" marR="0" rtl="0" algn="l">
+              <a:lnSpc>
+                <a:spcPct val="105000"/>
+              </a:lnSpc>
+              <a:spcBef>
+                <a:spcPts val="0"/>
+              </a:spcBef>
+              <a:spcAft>
+                <a:spcPts val="0"/>
+              </a:spcAft>
+              <a:buClr>
+                <a:srgbClr val="20223F"/>
+              </a:buClr>
+              <a:buSzPts val="1350"/>
+              <a:buFont typeface="Arial"/>
+              <a:buNone/>
+            </a:pPr>
+            <a:r>
+              <a:rPr b="1" i="0" lang="en-US" sz="1350" u="none" cap="none" strike="noStrike">
+                <a:solidFill>
+                  <a:srgbClr val="20223F"/>
+                </a:solidFill>
+                <a:latin typeface="Arial"/>
+                <a:ea typeface="Arial"/>
+                <a:cs typeface="Arial"/>
+                <a:sym typeface="Arial"/>
+              </a:rPr>
+              <a:t>問い合わせ前の不安を減らす</a:t>
+            </a:r>
+            <a:endParaRPr b="0" i="0" sz="1350" u="none" cap="none" strike="noStrike">
+              <a:solidFill>
+                <a:schemeClr val="dk1"/>
+              </a:solidFill>
+              <a:latin typeface="Calibri"/>
+              <a:ea typeface="Calibri"/>
+              <a:cs typeface="Calibri"/>
+              <a:sym typeface="Calibri"/>
+            </a:endParaRPr>
+          </a:p>
+        </p:txBody>
+      </p:sp>
+      <p:sp>
+        <p:nvSpPr>
+          <p:cNvPr id="267" name="Google Shape;267;p11"/>
+          <p:cNvSpPr/>
+          <p:nvPr/>
+        </p:nvSpPr>
+        <p:spPr>
+          <a:xfrm>
+            <a:off x="8333232" y="2670048"/>
+            <a:ext cx="3078480" cy="548640"/>
+          </a:xfrm>
+          <a:prstGeom prst="rect">
+            <a:avLst/>
+          </a:prstGeom>
+          <a:noFill/>
+          <a:ln>
+            <a:noFill/>
+          </a:ln>
+        </p:spPr>
+        <p:txBody>
+          <a:bodyPr anchorCtr="0" anchor="ctr" bIns="0" lIns="0" spcFirstLastPara="1" rIns="0" wrap="square" tIns="0">
+            <a:noAutofit/>
+          </a:bodyPr>
+          <a:lstStyle/>
+          <a:p>
+            <a:pPr indent="0" lvl="0" marL="0" marR="0" rtl="0" algn="l">
+              <a:lnSpc>
+                <a:spcPct val="112000"/>
+              </a:lnSpc>
+              <a:spcBef>
+                <a:spcPts val="0"/>
+              </a:spcBef>
+              <a:spcAft>
+                <a:spcPts val="0"/>
+              </a:spcAft>
+              <a:buClr>
+                <a:srgbClr val="6B7280"/>
+              </a:buClr>
+              <a:buSzPts val="1050"/>
+              <a:buFont typeface="Arial"/>
+              <a:buNone/>
+            </a:pPr>
+            <a:r>
+              <a:rPr b="0" i="0" lang="en-US" sz="1050" u="none" cap="none" strike="noStrike">
+                <a:solidFill>
+                  <a:srgbClr val="6B7280"/>
+                </a:solidFill>
+                <a:latin typeface="Arial"/>
+                <a:ea typeface="Arial"/>
+                <a:cs typeface="Arial"/>
+                <a:sym typeface="Arial"/>
+              </a:rPr>
+              <a:t>写真・口コミ・返信・投稿で「安心して選べそう」と思ってもらえる状態を継続</a:t>
+            </a:r>
+            <a:endParaRPr b="0" i="0" sz="1050" u="none" cap="none" strike="noStrike">
+              <a:solidFill>
+                <a:schemeClr val="dk1"/>
+              </a:solidFill>
+              <a:latin typeface="Calibri"/>
+              <a:ea typeface="Calibri"/>
+              <a:cs typeface="Calibri"/>
+              <a:sym typeface="Calibri"/>
+            </a:endParaRPr>
+          </a:p>
+        </p:txBody>
+      </p:sp>
+      <p:sp>
+        <p:nvSpPr>
+          <p:cNvPr id="268" name="Google Shape;268;p11"/>
+          <p:cNvSpPr/>
+          <p:nvPr/>
+        </p:nvSpPr>
+        <p:spPr>
+          <a:xfrm>
+            <a:off x="548640" y="3447288"/>
+            <a:ext cx="3535680" cy="1783080"/>
+          </a:xfrm>
+          <a:prstGeom prst="roundRect">
+            <a:avLst>
+              <a:gd fmla="val 5128" name="adj"/>
+            </a:avLst>
+          </a:prstGeom>
+          <a:solidFill>
+            <a:srgbClr val="FFFFFF"/>
+          </a:solidFill>
+          <a:ln cap="flat" cmpd="sng" w="12700">
+            <a:solidFill>
+              <a:srgbClr val="E2E4F0"/>
+            </a:solidFill>
+            <a:prstDash val="solid"/>
+            <a:round/>
+            <a:headEnd len="sm" w="sm" type="none"/>
+            <a:tailEnd len="sm" w="sm" type="none"/>
+          </a:ln>
+          <a:effectLst>
+            <a:outerShdw blurRad="114300" rotWithShape="0" algn="bl" dir="5400000" dist="38100">
+              <a:srgbClr val="232A55">
+                <a:alpha val="12156"/>
+              </a:srgbClr>
+            </a:outerShdw>
+          </a:effectLst>
+        </p:spPr>
+        <p:txBody>
+          <a:bodyPr anchorCtr="0" anchor="ctr" bIns="91425" lIns="91425" spcFirstLastPara="1" rIns="91425" wrap="square" tIns="91425">
+            <a:noAutofit/>
+          </a:bodyPr>
+          <a:lstStyle/>
+          <a:p>
+            <a:pPr indent="0" lvl="0" marL="0" rtl="0" algn="l">
+              <a:spcBef>
+                <a:spcPts val="0"/>
+              </a:spcBef>
+              <a:spcAft>
+                <a:spcPts val="0"/>
+              </a:spcAft>
+              <a:buNone/>
+            </a:pPr>
+            <a:r>
+              <a:t/>
+            </a:r>
+            <a:endParaRPr/>
+          </a:p>
+        </p:txBody>
+      </p:sp>
+      <p:sp>
+        <p:nvSpPr>
+          <p:cNvPr id="269" name="Google Shape;269;p11"/>
+          <p:cNvSpPr/>
+          <p:nvPr/>
+        </p:nvSpPr>
+        <p:spPr>
+          <a:xfrm>
+            <a:off x="804672" y="3685032"/>
+            <a:ext cx="512064" cy="512064"/>
+          </a:xfrm>
+          <a:prstGeom prst="roundRect">
+            <a:avLst>
+              <a:gd fmla="val 28000" name="adj"/>
+            </a:avLst>
+          </a:prstGeom>
+          <a:solidFill>
+            <a:srgbClr val="F4748A"/>
+          </a:solidFill>
+          <a:ln>
+            <a:noFill/>
+          </a:ln>
+        </p:spPr>
+        <p:txBody>
+          <a:bodyPr anchorCtr="0" anchor="ctr" bIns="91425" lIns="91425" spcFirstLastPara="1" rIns="91425" wrap="square" tIns="91425">
+            <a:noAutofit/>
+          </a:bodyPr>
+          <a:lstStyle/>
+          <a:p>
+            <a:pPr indent="0" lvl="0" marL="0" rtl="0" algn="l">
+              <a:spcBef>
+                <a:spcPts val="0"/>
+              </a:spcBef>
+              <a:spcAft>
+                <a:spcPts val="0"/>
+              </a:spcAft>
+              <a:buNone/>
+            </a:pPr>
+            <a:r>
+              <a:t/>
+            </a:r>
+            <a:endParaRPr/>
+          </a:p>
+        </p:txBody>
+      </p:sp>
+      <p:pic>
+        <p:nvPicPr>
+          <p:cNvPr descr="preencoded.png" id="270" name="Google Shape;270;p11"/>
+          <p:cNvPicPr preferRelativeResize="0"/>
+          <p:nvPr/>
+        </p:nvPicPr>
+        <p:blipFill rotWithShape="1">
+          <a:blip r:embed="rId6">
+            <a:alphaModFix/>
+          </a:blip>
+          <a:srcRect b="0" l="0" r="0" t="0"/>
+          <a:stretch/>
+        </p:blipFill>
+        <p:spPr>
+          <a:xfrm>
+            <a:off x="919886" y="3800246"/>
+            <a:ext cx="281635" cy="281635"/>
+          </a:xfrm>
+          <a:prstGeom prst="rect">
+            <a:avLst/>
+          </a:prstGeom>
+          <a:noFill/>
+          <a:ln>
+            <a:noFill/>
+          </a:ln>
+        </p:spPr>
+      </p:pic>
+      <p:sp>
+        <p:nvSpPr>
+          <p:cNvPr id="271" name="Google Shape;271;p11"/>
+          <p:cNvSpPr/>
+          <p:nvPr/>
+        </p:nvSpPr>
+        <p:spPr>
+          <a:xfrm>
+            <a:off x="804672" y="4288536"/>
+            <a:ext cx="3078480" cy="457200"/>
+          </a:xfrm>
+          <a:prstGeom prst="rect">
+            <a:avLst/>
+          </a:prstGeom>
+          <a:noFill/>
+          <a:ln>
+            <a:noFill/>
+          </a:ln>
+        </p:spPr>
+        <p:txBody>
+          <a:bodyPr anchorCtr="0" anchor="ctr" bIns="0" lIns="0" spcFirstLastPara="1" rIns="0" wrap="square" tIns="0">
+            <a:noAutofit/>
+          </a:bodyPr>
+          <a:lstStyle/>
+          <a:p>
+            <a:pPr indent="0" lvl="0" marL="0" marR="0" rtl="0" algn="l">
+              <a:lnSpc>
+                <a:spcPct val="105000"/>
+              </a:lnSpc>
+              <a:spcBef>
+                <a:spcPts val="0"/>
+              </a:spcBef>
+              <a:spcAft>
+                <a:spcPts val="0"/>
+              </a:spcAft>
+              <a:buClr>
+                <a:srgbClr val="20223F"/>
+              </a:buClr>
+              <a:buSzPts val="1350"/>
+              <a:buFont typeface="Arial"/>
+              <a:buNone/>
+            </a:pPr>
+            <a:r>
+              <a:rPr b="1" i="0" lang="en-US" sz="1350" u="none" cap="none" strike="noStrike">
+                <a:solidFill>
+                  <a:srgbClr val="20223F"/>
+                </a:solidFill>
+                <a:latin typeface="Arial"/>
+                <a:ea typeface="Arial"/>
+                <a:cs typeface="Arial"/>
+                <a:sym typeface="Arial"/>
+              </a:rPr>
+              <a:t>信頼されやすい状態をつくる</a:t>
+            </a:r>
+            <a:endParaRPr b="0" i="0" sz="1350" u="none" cap="none" strike="noStrike">
+              <a:solidFill>
+                <a:schemeClr val="dk1"/>
+              </a:solidFill>
+              <a:latin typeface="Calibri"/>
+              <a:ea typeface="Calibri"/>
+              <a:cs typeface="Calibri"/>
+              <a:sym typeface="Calibri"/>
+            </a:endParaRPr>
+          </a:p>
+        </p:txBody>
+      </p:sp>
+      <p:sp>
+        <p:nvSpPr>
+          <p:cNvPr id="272" name="Google Shape;272;p11"/>
+          <p:cNvSpPr/>
+          <p:nvPr/>
+        </p:nvSpPr>
+        <p:spPr>
+          <a:xfrm>
+            <a:off x="804672" y="4654296"/>
+            <a:ext cx="3078480" cy="548640"/>
+          </a:xfrm>
+          <a:prstGeom prst="rect">
+            <a:avLst/>
+          </a:prstGeom>
+          <a:noFill/>
+          <a:ln>
+            <a:noFill/>
+          </a:ln>
+        </p:spPr>
+        <p:txBody>
+          <a:bodyPr anchorCtr="0" anchor="ctr" bIns="0" lIns="0" spcFirstLastPara="1" rIns="0" wrap="square" tIns="0">
+            <a:noAutofit/>
+          </a:bodyPr>
+          <a:lstStyle/>
+          <a:p>
+            <a:pPr indent="0" lvl="0" marL="0" marR="0" rtl="0" algn="l">
+              <a:lnSpc>
+                <a:spcPct val="112000"/>
+              </a:lnSpc>
+              <a:spcBef>
+                <a:spcPts val="0"/>
+              </a:spcBef>
+              <a:spcAft>
+                <a:spcPts val="0"/>
+              </a:spcAft>
+              <a:buClr>
+                <a:srgbClr val="6B7280"/>
+              </a:buClr>
+              <a:buSzPts val="1050"/>
+              <a:buFont typeface="Arial"/>
+              <a:buNone/>
+            </a:pPr>
+            <a:r>
+              <a:rPr b="0" i="0" lang="en-US" sz="1050" u="none" cap="none" strike="noStrike">
+                <a:solidFill>
+                  <a:srgbClr val="6B7280"/>
+                </a:solidFill>
+                <a:latin typeface="Arial"/>
+                <a:ea typeface="Arial"/>
+                <a:cs typeface="Arial"/>
+                <a:sym typeface="Arial"/>
+              </a:rPr>
+              <a:t>第三者の口コミが積み重なり、新規顧客の問い合わせ前の安心材料になる</a:t>
+            </a:r>
+            <a:endParaRPr b="0" i="0" sz="1050" u="none" cap="none" strike="noStrike">
+              <a:solidFill>
+                <a:schemeClr val="dk1"/>
+              </a:solidFill>
+              <a:latin typeface="Calibri"/>
+              <a:ea typeface="Calibri"/>
+              <a:cs typeface="Calibri"/>
+              <a:sym typeface="Calibri"/>
+            </a:endParaRPr>
+          </a:p>
+        </p:txBody>
+      </p:sp>
+      <p:sp>
+        <p:nvSpPr>
+          <p:cNvPr id="273" name="Google Shape;273;p11"/>
+          <p:cNvSpPr/>
+          <p:nvPr/>
+        </p:nvSpPr>
+        <p:spPr>
+          <a:xfrm>
+            <a:off x="4312920" y="3447288"/>
+            <a:ext cx="3535680" cy="1783080"/>
+          </a:xfrm>
+          <a:prstGeom prst="roundRect">
+            <a:avLst>
+              <a:gd fmla="val 5128" name="adj"/>
+            </a:avLst>
+          </a:prstGeom>
+          <a:solidFill>
+            <a:srgbClr val="FFFFFF"/>
+          </a:solidFill>
+          <a:ln cap="flat" cmpd="sng" w="12700">
+            <a:solidFill>
+              <a:srgbClr val="E2E4F0"/>
+            </a:solidFill>
+            <a:prstDash val="solid"/>
+            <a:round/>
+            <a:headEnd len="sm" w="sm" type="none"/>
+            <a:tailEnd len="sm" w="sm" type="none"/>
+          </a:ln>
+          <a:effectLst>
+            <a:outerShdw blurRad="114300" rotWithShape="0" algn="bl" dir="5400000" dist="38100">
+              <a:srgbClr val="232A55">
+                <a:alpha val="12156"/>
+              </a:srgbClr>
+            </a:outerShdw>
+          </a:effectLst>
+        </p:spPr>
+        <p:txBody>
+          <a:bodyPr anchorCtr="0" anchor="ctr" bIns="91425" lIns="91425" spcFirstLastPara="1" rIns="91425" wrap="square" tIns="91425">
+            <a:noAutofit/>
+          </a:bodyPr>
+          <a:lstStyle/>
+          <a:p>
+            <a:pPr indent="0" lvl="0" marL="0" rtl="0" algn="l">
+              <a:spcBef>
+                <a:spcPts val="0"/>
+              </a:spcBef>
+              <a:spcAft>
+                <a:spcPts val="0"/>
+              </a:spcAft>
+              <a:buNone/>
+            </a:pPr>
+            <a:r>
+              <a:t/>
+            </a:r>
+            <a:endParaRPr/>
+          </a:p>
+        </p:txBody>
+      </p:sp>
+      <p:sp>
+        <p:nvSpPr>
+          <p:cNvPr id="274" name="Google Shape;274;p11"/>
+          <p:cNvSpPr/>
+          <p:nvPr/>
+        </p:nvSpPr>
+        <p:spPr>
+          <a:xfrm>
+            <a:off x="4568952" y="3685032"/>
+            <a:ext cx="512064" cy="512064"/>
+          </a:xfrm>
+          <a:prstGeom prst="roundRect">
+            <a:avLst>
+              <a:gd fmla="val 28000" name="adj"/>
+            </a:avLst>
+          </a:prstGeom>
+          <a:solidFill>
+            <a:srgbClr val="10987A"/>
+          </a:solidFill>
+          <a:ln>
+            <a:noFill/>
+          </a:ln>
+        </p:spPr>
+        <p:txBody>
+          <a:bodyPr anchorCtr="0" anchor="ctr" bIns="91425" lIns="91425" spcFirstLastPara="1" rIns="91425" wrap="square" tIns="91425">
+            <a:noAutofit/>
+          </a:bodyPr>
+          <a:lstStyle/>
+          <a:p>
+            <a:pPr indent="0" lvl="0" marL="0" rtl="0" algn="l">
+              <a:spcBef>
+                <a:spcPts val="0"/>
+              </a:spcBef>
+              <a:spcAft>
+                <a:spcPts val="0"/>
+              </a:spcAft>
+              <a:buNone/>
+            </a:pPr>
+            <a:r>
+              <a:t/>
+            </a:r>
+            <a:endParaRPr/>
+          </a:p>
+        </p:txBody>
+      </p:sp>
+      <p:pic>
+        <p:nvPicPr>
+          <p:cNvPr descr="preencoded.png" id="275" name="Google Shape;275;p11"/>
+          <p:cNvPicPr preferRelativeResize="0"/>
+          <p:nvPr/>
+        </p:nvPicPr>
+        <p:blipFill rotWithShape="1">
+          <a:blip r:embed="rId7">
+            <a:alphaModFix/>
+          </a:blip>
+          <a:srcRect b="0" l="0" r="0" t="0"/>
+          <a:stretch/>
+        </p:blipFill>
+        <p:spPr>
+          <a:xfrm>
+            <a:off x="4684166" y="3800246"/>
+            <a:ext cx="281635" cy="281635"/>
+          </a:xfrm>
+          <a:prstGeom prst="rect">
+            <a:avLst/>
+          </a:prstGeom>
+          <a:noFill/>
+          <a:ln>
+            <a:noFill/>
+          </a:ln>
+        </p:spPr>
+      </p:pic>
+      <p:sp>
+        <p:nvSpPr>
+          <p:cNvPr id="276" name="Google Shape;276;p11"/>
+          <p:cNvSpPr/>
+          <p:nvPr/>
+        </p:nvSpPr>
+        <p:spPr>
+          <a:xfrm>
+            <a:off x="4568952" y="4288536"/>
+            <a:ext cx="3078480" cy="457200"/>
+          </a:xfrm>
+          <a:prstGeom prst="rect">
+            <a:avLst/>
+          </a:prstGeom>
+          <a:noFill/>
+          <a:ln>
+            <a:noFill/>
+          </a:ln>
+        </p:spPr>
+        <p:txBody>
+          <a:bodyPr anchorCtr="0" anchor="ctr" bIns="0" lIns="0" spcFirstLastPara="1" rIns="0" wrap="square" tIns="0">
+            <a:noAutofit/>
+          </a:bodyPr>
+          <a:lstStyle/>
+          <a:p>
+            <a:pPr indent="0" lvl="0" marL="0" marR="0" rtl="0" algn="l">
+              <a:lnSpc>
+                <a:spcPct val="105000"/>
+              </a:lnSpc>
+              <a:spcBef>
+                <a:spcPts val="0"/>
+              </a:spcBef>
+              <a:spcAft>
+                <a:spcPts val="0"/>
+              </a:spcAft>
+              <a:buClr>
+                <a:srgbClr val="20223F"/>
+              </a:buClr>
+              <a:buSzPts val="1350"/>
+              <a:buFont typeface="Arial"/>
+              <a:buNone/>
+            </a:pPr>
+            <a:r>
+              <a:rPr b="1" i="0" lang="en-US" sz="1350" u="none" cap="none" strike="noStrike">
+                <a:solidFill>
+                  <a:srgbClr val="20223F"/>
+                </a:solidFill>
+                <a:latin typeface="Arial"/>
+                <a:ea typeface="Arial"/>
+                <a:cs typeface="Arial"/>
+                <a:sym typeface="Arial"/>
+              </a:rPr>
+              <a:t>問い合わせにつながりやすく</a:t>
+            </a:r>
+            <a:endParaRPr b="0" i="0" sz="1350" u="none" cap="none" strike="noStrike">
+              <a:solidFill>
+                <a:schemeClr val="dk1"/>
+              </a:solidFill>
+              <a:latin typeface="Calibri"/>
+              <a:ea typeface="Calibri"/>
+              <a:cs typeface="Calibri"/>
+              <a:sym typeface="Calibri"/>
+            </a:endParaRPr>
+          </a:p>
+        </p:txBody>
+      </p:sp>
+      <p:sp>
+        <p:nvSpPr>
+          <p:cNvPr id="277" name="Google Shape;277;p11"/>
+          <p:cNvSpPr/>
+          <p:nvPr/>
+        </p:nvSpPr>
+        <p:spPr>
+          <a:xfrm>
+            <a:off x="4568952" y="4654296"/>
+            <a:ext cx="3078480" cy="548640"/>
+          </a:xfrm>
+          <a:prstGeom prst="rect">
+            <a:avLst/>
+          </a:prstGeom>
+          <a:noFill/>
+          <a:ln>
+            <a:noFill/>
+          </a:ln>
+        </p:spPr>
+        <p:txBody>
+          <a:bodyPr anchorCtr="0" anchor="ctr" bIns="0" lIns="0" spcFirstLastPara="1" rIns="0" wrap="square" tIns="0">
+            <a:noAutofit/>
+          </a:bodyPr>
+          <a:lstStyle/>
+          <a:p>
+            <a:pPr indent="0" lvl="0" marL="0" marR="0" rtl="0" algn="l">
+              <a:lnSpc>
+                <a:spcPct val="112000"/>
+              </a:lnSpc>
+              <a:spcBef>
+                <a:spcPts val="0"/>
+              </a:spcBef>
+              <a:spcAft>
+                <a:spcPts val="0"/>
+              </a:spcAft>
+              <a:buClr>
+                <a:srgbClr val="6B7280"/>
+              </a:buClr>
+              <a:buSzPts val="1050"/>
+              <a:buFont typeface="Arial"/>
+              <a:buNone/>
+            </a:pPr>
+            <a:r>
+              <a:rPr b="0" i="0" lang="en-US" sz="1050" u="none" cap="none" strike="noStrike">
+                <a:solidFill>
+                  <a:srgbClr val="6B7280"/>
+                </a:solidFill>
+                <a:latin typeface="Arial"/>
+                <a:ea typeface="Arial"/>
+                <a:cs typeface="Arial"/>
+                <a:sym typeface="Arial"/>
+              </a:rPr>
+              <a:t>電話・ルート検索・問い合わせへのアクションが起きやすい受け皿を整える</a:t>
+            </a:r>
+            <a:endParaRPr b="0" i="0" sz="1050" u="none" cap="none" strike="noStrike">
+              <a:solidFill>
+                <a:schemeClr val="dk1"/>
+              </a:solidFill>
+              <a:latin typeface="Calibri"/>
+              <a:ea typeface="Calibri"/>
+              <a:cs typeface="Calibri"/>
+              <a:sym typeface="Calibri"/>
+            </a:endParaRPr>
+          </a:p>
+        </p:txBody>
+      </p:sp>
+      <p:sp>
+        <p:nvSpPr>
+          <p:cNvPr id="278" name="Google Shape;278;p11"/>
+          <p:cNvSpPr/>
+          <p:nvPr/>
+        </p:nvSpPr>
+        <p:spPr>
+          <a:xfrm>
+            <a:off x="8077200" y="3447288"/>
+            <a:ext cx="3535680" cy="1783080"/>
+          </a:xfrm>
+          <a:prstGeom prst="roundRect">
+            <a:avLst>
+              <a:gd fmla="val 5128" name="adj"/>
+            </a:avLst>
+          </a:prstGeom>
+          <a:solidFill>
+            <a:srgbClr val="FFFFFF"/>
+          </a:solidFill>
+          <a:ln cap="flat" cmpd="sng" w="12700">
+            <a:solidFill>
+              <a:srgbClr val="E2E4F0"/>
+            </a:solidFill>
+            <a:prstDash val="solid"/>
+            <a:round/>
+            <a:headEnd len="sm" w="sm" type="none"/>
+            <a:tailEnd len="sm" w="sm" type="none"/>
+          </a:ln>
+          <a:effectLst>
+            <a:outerShdw blurRad="114300" rotWithShape="0" algn="bl" dir="5400000" dist="38100">
+              <a:srgbClr val="232A55">
+                <a:alpha val="12156"/>
+              </a:srgbClr>
+            </a:outerShdw>
+          </a:effectLst>
+        </p:spPr>
+        <p:txBody>
+          <a:bodyPr anchorCtr="0" anchor="ctr" bIns="91425" lIns="91425" spcFirstLastPara="1" rIns="91425" wrap="square" tIns="91425">
+            <a:noAutofit/>
+          </a:bodyPr>
+          <a:lstStyle/>
+          <a:p>
+            <a:pPr indent="0" lvl="0" marL="0" rtl="0" algn="l">
+              <a:spcBef>
+                <a:spcPts val="0"/>
+              </a:spcBef>
+              <a:spcAft>
+                <a:spcPts val="0"/>
+              </a:spcAft>
+              <a:buNone/>
+            </a:pPr>
+            <a:r>
+              <a:t/>
+            </a:r>
+            <a:endParaRPr/>
+          </a:p>
+        </p:txBody>
+      </p:sp>
+      <p:sp>
+        <p:nvSpPr>
+          <p:cNvPr id="279" name="Google Shape;279;p11"/>
+          <p:cNvSpPr/>
+          <p:nvPr/>
+        </p:nvSpPr>
+        <p:spPr>
+          <a:xfrm>
+            <a:off x="8333232" y="3685032"/>
+            <a:ext cx="512064" cy="512064"/>
+          </a:xfrm>
+          <a:prstGeom prst="roundRect">
+            <a:avLst>
+              <a:gd fmla="val 28000" name="adj"/>
+            </a:avLst>
+          </a:prstGeom>
+          <a:solidFill>
+            <a:srgbClr val="3E4BA0"/>
+          </a:solidFill>
+          <a:ln>
+            <a:noFill/>
+          </a:ln>
+        </p:spPr>
+        <p:txBody>
+          <a:bodyPr anchorCtr="0" anchor="ctr" bIns="91425" lIns="91425" spcFirstLastPara="1" rIns="91425" wrap="square" tIns="91425">
+            <a:noAutofit/>
+          </a:bodyPr>
+          <a:lstStyle/>
+          <a:p>
+            <a:pPr indent="0" lvl="0" marL="0" rtl="0" algn="l">
+              <a:spcBef>
+                <a:spcPts val="0"/>
+              </a:spcBef>
+              <a:spcAft>
+                <a:spcPts val="0"/>
+              </a:spcAft>
+              <a:buNone/>
+            </a:pPr>
+            <a:r>
+              <a:t/>
+            </a:r>
+            <a:endParaRPr/>
+          </a:p>
+        </p:txBody>
+      </p:sp>
+      <p:pic>
+        <p:nvPicPr>
+          <p:cNvPr descr="preencoded.png" id="280" name="Google Shape;280;p11"/>
+          <p:cNvPicPr preferRelativeResize="0"/>
+          <p:nvPr/>
+        </p:nvPicPr>
+        <p:blipFill rotWithShape="1">
+          <a:blip r:embed="rId8">
+            <a:alphaModFix/>
+          </a:blip>
+          <a:srcRect b="0" l="0" r="0" t="0"/>
+          <a:stretch/>
+        </p:blipFill>
+        <p:spPr>
+          <a:xfrm>
+            <a:off x="8448446" y="3800246"/>
+            <a:ext cx="281635" cy="281635"/>
+          </a:xfrm>
+          <a:prstGeom prst="rect">
+            <a:avLst/>
+          </a:prstGeom>
+          <a:noFill/>
+          <a:ln>
+            <a:noFill/>
+          </a:ln>
+        </p:spPr>
+      </p:pic>
+      <p:sp>
+        <p:nvSpPr>
+          <p:cNvPr id="281" name="Google Shape;281;p11"/>
+          <p:cNvSpPr/>
+          <p:nvPr/>
+        </p:nvSpPr>
+        <p:spPr>
+          <a:xfrm>
+            <a:off x="8333232" y="4288536"/>
+            <a:ext cx="3078480" cy="457200"/>
+          </a:xfrm>
+          <a:prstGeom prst="rect">
+            <a:avLst/>
+          </a:prstGeom>
+          <a:noFill/>
+          <a:ln>
+            <a:noFill/>
+          </a:ln>
+        </p:spPr>
+        <p:txBody>
+          <a:bodyPr anchorCtr="0" anchor="ctr" bIns="0" lIns="0" spcFirstLastPara="1" rIns="0" wrap="square" tIns="0">
+            <a:noAutofit/>
+          </a:bodyPr>
+          <a:lstStyle/>
+          <a:p>
+            <a:pPr indent="0" lvl="0" marL="0" marR="0" rtl="0" algn="l">
+              <a:lnSpc>
+                <a:spcPct val="105000"/>
+              </a:lnSpc>
+              <a:spcBef>
+                <a:spcPts val="0"/>
+              </a:spcBef>
+              <a:spcAft>
+                <a:spcPts val="0"/>
+              </a:spcAft>
+              <a:buClr>
+                <a:srgbClr val="20223F"/>
+              </a:buClr>
+              <a:buSzPts val="1350"/>
+              <a:buFont typeface="Arial"/>
+              <a:buNone/>
+            </a:pPr>
+            <a:r>
+              <a:rPr b="1" i="0" lang="en-US" sz="1350" u="none" cap="none" strike="noStrike">
+                <a:solidFill>
+                  <a:srgbClr val="20223F"/>
+                </a:solidFill>
+                <a:latin typeface="Arial"/>
+                <a:ea typeface="Arial"/>
+                <a:cs typeface="Arial"/>
+                <a:sym typeface="Arial"/>
+              </a:rPr>
+              <a:t>地域で選ばれる受け皿に</a:t>
+            </a:r>
+            <a:endParaRPr b="0" i="0" sz="1350" u="none" cap="none" strike="noStrike">
+              <a:solidFill>
+                <a:schemeClr val="dk1"/>
+              </a:solidFill>
+              <a:latin typeface="Calibri"/>
+              <a:ea typeface="Calibri"/>
+              <a:cs typeface="Calibri"/>
+              <a:sym typeface="Calibri"/>
+            </a:endParaRPr>
+          </a:p>
+        </p:txBody>
+      </p:sp>
+      <p:sp>
+        <p:nvSpPr>
+          <p:cNvPr id="282" name="Google Shape;282;p11"/>
+          <p:cNvSpPr/>
+          <p:nvPr/>
+        </p:nvSpPr>
+        <p:spPr>
+          <a:xfrm>
+            <a:off x="8333232" y="4654296"/>
+            <a:ext cx="3078480" cy="548640"/>
+          </a:xfrm>
+          <a:prstGeom prst="rect">
+            <a:avLst/>
+          </a:prstGeom>
+          <a:noFill/>
+          <a:ln>
+            <a:noFill/>
+          </a:ln>
+        </p:spPr>
+        <p:txBody>
+          <a:bodyPr anchorCtr="0" anchor="ctr" bIns="0" lIns="0" spcFirstLastPara="1" rIns="0" wrap="square" tIns="0">
+            <a:noAutofit/>
+          </a:bodyPr>
+          <a:lstStyle/>
+          <a:p>
+            <a:pPr indent="0" lvl="0" marL="0" marR="0" rtl="0" algn="l">
+              <a:lnSpc>
+                <a:spcPct val="112000"/>
+              </a:lnSpc>
+              <a:spcBef>
+                <a:spcPts val="0"/>
+              </a:spcBef>
+              <a:spcAft>
+                <a:spcPts val="0"/>
+              </a:spcAft>
+              <a:buClr>
+                <a:srgbClr val="6B7280"/>
+              </a:buClr>
+              <a:buSzPts val="1050"/>
+              <a:buFont typeface="Arial"/>
+              <a:buNone/>
+            </a:pPr>
+            <a:r>
+              <a:rPr b="0" i="0" lang="en-US" sz="1050" u="none" cap="none" strike="noStrike">
+                <a:solidFill>
+                  <a:srgbClr val="6B7280"/>
+                </a:solidFill>
+                <a:latin typeface="Arial"/>
+                <a:ea typeface="Arial"/>
+                <a:cs typeface="Arial"/>
+                <a:sym typeface="Arial"/>
+              </a:rPr>
+              <a:t>鶴見・横浜・川崎エリアで複数社と比較されたとき、選ばれる状態を目指す</a:t>
+            </a:r>
+            <a:endParaRPr b="0" i="0" sz="1050" u="none" cap="none" strike="noStrike">
+              <a:solidFill>
+                <a:schemeClr val="dk1"/>
+              </a:solidFill>
+              <a:latin typeface="Calibri"/>
+              <a:ea typeface="Calibri"/>
+              <a:cs typeface="Calibri"/>
+              <a:sym typeface="Calibri"/>
+            </a:endParaRPr>
+          </a:p>
+        </p:txBody>
+      </p:sp>
+      <p:sp>
+        <p:nvSpPr>
+          <p:cNvPr id="283" name="Google Shape;283;p11"/>
+          <p:cNvSpPr/>
+          <p:nvPr/>
+        </p:nvSpPr>
+        <p:spPr>
+          <a:xfrm>
+            <a:off x="548640" y="5440680"/>
+            <a:ext cx="11064240" cy="365760"/>
+          </a:xfrm>
+          <a:prstGeom prst="rect">
+            <a:avLst/>
+          </a:prstGeom>
+          <a:noFill/>
+          <a:ln>
+            <a:noFill/>
+          </a:ln>
+        </p:spPr>
+        <p:txBody>
+          <a:bodyPr anchorCtr="0" anchor="ctr" bIns="0" lIns="0" spcFirstLastPara="1" rIns="0" wrap="square" tIns="0">
+            <a:noAutofit/>
+          </a:bodyPr>
+          <a:lstStyle/>
+          <a:p>
+            <a:pPr indent="0" lvl="0" marL="0" marR="0" rtl="0" algn="l">
+              <a:spcBef>
+                <a:spcPts val="0"/>
+              </a:spcBef>
+              <a:spcAft>
+                <a:spcPts val="0"/>
+              </a:spcAft>
+              <a:buClr>
+                <a:srgbClr val="6B7280"/>
+              </a:buClr>
+              <a:buSzPts val="1000"/>
+              <a:buFont typeface="Arial"/>
+              <a:buNone/>
+            </a:pPr>
+            <a:r>
+              <a:rPr b="0" i="1" lang="en-US" sz="1000" u="none" cap="none" strike="noStrike">
+                <a:solidFill>
+                  <a:srgbClr val="6B7280"/>
+                </a:solidFill>
+                <a:latin typeface="Arial"/>
+                <a:ea typeface="Arial"/>
+                <a:cs typeface="Arial"/>
+                <a:sym typeface="Arial"/>
+              </a:rPr>
+              <a:t>※ 順位・問い合わせ数・売上等の成果を保証するものではありません。数値レポートで透明性を担保し、改善を継続します。Googleポリシー・薬機法を守る運用で、口コミ資産を守りながら育てます。</a:t>
+            </a:r>
+            <a:endParaRPr b="0" i="0" sz="1000" u="none" cap="none" strike="noStrike">
+              <a:solidFill>
+                <a:schemeClr val="dk1"/>
+              </a:solidFill>
+              <a:latin typeface="Calibri"/>
+              <a:ea typeface="Calibri"/>
+              <a:cs typeface="Calibri"/>
+              <a:sym typeface="Calibri"/>
+            </a:endParaRPr>
+          </a:p>
+        </p:txBody>
+      </p:sp>
+      <p:sp>
+        <p:nvSpPr>
+          <p:cNvPr id="284" name="Google Shape;284;p11"/>
+          <p:cNvSpPr/>
+          <p:nvPr/>
+        </p:nvSpPr>
+        <p:spPr>
+          <a:xfrm>
+            <a:off x="548640" y="6492240"/>
+            <a:ext cx="11064240" cy="274320"/>
+          </a:xfrm>
+          <a:prstGeom prst="rect">
+            <a:avLst/>
+          </a:prstGeom>
+          <a:noFill/>
+          <a:ln>
+            <a:noFill/>
+          </a:ln>
+        </p:spPr>
+        <p:txBody>
+          <a:bodyPr anchorCtr="0" anchor="ctr" bIns="0" lIns="0" spcFirstLastPara="1" rIns="0" wrap="square" tIns="0">
+            <a:noAutofit/>
+          </a:bodyPr>
+          <a:lstStyle/>
+          <a:p>
+            <a:pPr indent="0" lvl="0" marL="0" marR="0" rtl="0" algn="l">
+              <a:spcBef>
+                <a:spcPts val="0"/>
+              </a:spcBef>
+              <a:spcAft>
+                <a:spcPts val="0"/>
+              </a:spcAft>
+              <a:buClr>
+                <a:srgbClr val="3E4BA0"/>
+              </a:buClr>
+              <a:buSzPts val="900"/>
+              <a:buFont typeface="Arial"/>
+              <a:buNone/>
+            </a:pPr>
+            <a:r>
+              <a:rPr b="1" i="0" lang="en-US" sz="900" u="none" cap="none" strike="noStrike">
+                <a:solidFill>
+                  <a:srgbClr val="3E4BA0"/>
+                </a:solidFill>
+                <a:latin typeface="Arial"/>
+                <a:ea typeface="Arial"/>
+                <a:cs typeface="Arial"/>
+                <a:sym typeface="Arial"/>
+              </a:rPr>
+              <a:t>株式会社みらい編集</a:t>
+            </a:r>
+            <a:r>
+              <a:rPr b="0" i="0" lang="en-US" sz="900" u="none" cap="none" strike="noStrike">
+                <a:solidFill>
+                  <a:srgbClr val="6B7280"/>
+                </a:solidFill>
+                <a:latin typeface="Arial"/>
+                <a:ea typeface="Arial"/>
+                <a:cs typeface="Arial"/>
+                <a:sym typeface="Arial"/>
+              </a:rPr>
+              <a:t>  |  MEO運用支援サービス ご提案</a:t>
+            </a:r>
+            <a:endParaRPr b="0" i="0" sz="900" u="none" cap="none" strike="noStrike">
+              <a:solidFill>
+                <a:schemeClr val="dk1"/>
+              </a:solidFill>
+              <a:latin typeface="Calibri"/>
+              <a:ea typeface="Calibri"/>
+              <a:cs typeface="Calibri"/>
+              <a:sym typeface="Calibri"/>
+            </a:endParaRPr>
+          </a:p>
+        </p:txBody>
+      </p:sp>
+    </p:spTree>
+  </p:cSld>
+  <p:clrMapOvr>
+    <a:masterClrMapping/>
+  </p:clrMapOvr>
+</p:sld>
+</file>
+
+<file path=ppt/slides/slide11.xml><?xml version="1.0" encoding="utf-8"?>
+<p:sld xmlns:a="http://schemas.openxmlformats.org/drawingml/2006/main" xmlns:p="http://schemas.openxmlformats.org/presentationml/2006/main" xmlns:r="http://schemas.openxmlformats.org/officeDocument/2006/relationships">
+  <p:cSld>
+    <p:bg>
+      <p:bgPr>
+        <a:solidFill>
+          <a:srgbClr val="FFFFFF"/>
+        </a:solidFill>
+      </p:bgPr>
+    </p:bg>
+    <p:spTree>
+      <p:nvGrpSpPr>
+        <p:cNvPr id="1" name=""/>
+        <p:cNvGrpSpPr/>
+        <p:nvPr/>
+      </p:nvGrpSpPr>
+      <p:grpSpPr/>
+      <p:sp>
+        <p:nvSpPr>
+          <p:cNvPr id="37" name="Google Shape;37;p4"/>
+          <p:cNvSpPr/>
+          <p:nvPr/>
+        </p:nvSpPr>
+        <p:spPr>
+          <a:xfrm>
+            <a:off x="10149840" y="-1188720"/>
+            <a:ext cx="2926080" cy="2926080"/>
+          </a:xfrm>
+          <a:prstGeom prst="ellipse">
+            <a:avLst/>
+          </a:prstGeom>
+          <a:solidFill>
+            <a:srgbClr val="3E4BA0">
+              <a:alpha val="7843"/>
+            </a:srgbClr>
+          </a:solidFill>
+          <a:ln>
+            <a:noFill/>
+          </a:ln>
+        </p:spPr>
+        <p:txBody>
+          <a:bodyPr anchorCtr="0" anchor="ctr" bIns="91425" lIns="91425" spcFirstLastPara="1" rIns="91425" wrap="square" tIns="91425">
+            <a:noAutofit/>
+          </a:bodyPr>
+          <a:lstStyle/>
+          <a:p>
+            <a:pPr indent="0" lvl="0" marL="0" rtl="0" algn="l">
+              <a:spcBef>
+                <a:spcPts val="0"/>
+              </a:spcBef>
+              <a:spcAft>
+                <a:spcPts val="0"/>
+              </a:spcAft>
+              <a:buNone/>
+            </a:pPr>
+            <a:r>
+              <a:t/>
+            </a:r>
+            <a:endParaRPr/>
+          </a:p>
+        </p:txBody>
+      </p:sp>
+      <p:sp>
+        <p:nvSpPr>
+          <p:cNvPr id="38" name="Google Shape;38;p4"/>
+          <p:cNvSpPr/>
+          <p:nvPr/>
+        </p:nvSpPr>
+        <p:spPr>
+          <a:xfrm>
+            <a:off x="548640" y="411480"/>
+            <a:ext cx="182880" cy="182880"/>
+          </a:xfrm>
+          <a:prstGeom prst="roundRect">
+            <a:avLst>
+              <a:gd fmla="val 25000" name="adj"/>
+            </a:avLst>
+          </a:prstGeom>
+          <a:solidFill>
+            <a:srgbClr val="F4748A"/>
+          </a:solidFill>
+          <a:ln>
+            <a:noFill/>
+          </a:ln>
+        </p:spPr>
+        <p:txBody>
+          <a:bodyPr anchorCtr="0" anchor="ctr" bIns="91425" lIns="91425" spcFirstLastPara="1" rIns="91425" wrap="square" tIns="91425">
+            <a:noAutofit/>
+          </a:bodyPr>
+          <a:lstStyle/>
+          <a:p>
+            <a:pPr indent="0" lvl="0" marL="0" rtl="0" algn="l">
+              <a:spcBef>
+                <a:spcPts val="0"/>
+              </a:spcBef>
+              <a:spcAft>
+                <a:spcPts val="0"/>
+              </a:spcAft>
+              <a:buNone/>
+            </a:pPr>
+            <a:r>
+              <a:t/>
+            </a:r>
+            <a:endParaRPr/>
+          </a:p>
+        </p:txBody>
+      </p:sp>
+      <p:sp>
+        <p:nvSpPr>
+          <p:cNvPr id="39" name="Google Shape;39;p4"/>
+          <p:cNvSpPr/>
+          <p:nvPr/>
+        </p:nvSpPr>
+        <p:spPr>
+          <a:xfrm>
+            <a:off x="841248" y="329184"/>
+            <a:ext cx="10771632" cy="292608"/>
+          </a:xfrm>
+          <a:prstGeom prst="rect">
+            <a:avLst/>
+          </a:prstGeom>
+          <a:noFill/>
+          <a:ln>
+            <a:noFill/>
+          </a:ln>
+        </p:spPr>
+        <p:txBody>
+          <a:bodyPr anchorCtr="0" anchor="ctr" bIns="0" lIns="0" spcFirstLastPara="1" rIns="0" wrap="square" tIns="0">
+            <a:noAutofit/>
+          </a:bodyPr>
+          <a:lstStyle/>
+          <a:p>
+            <a:pPr indent="0" lvl="0" marL="0" marR="0" rtl="0" algn="l">
+              <a:spcBef>
+                <a:spcPts val="0"/>
+              </a:spcBef>
+              <a:spcAft>
+                <a:spcPts val="0"/>
+              </a:spcAft>
+              <a:buClr>
+                <a:srgbClr val="F4748A"/>
+              </a:buClr>
+              <a:buSzPts val="1200"/>
+              <a:buFont typeface="Arial"/>
+              <a:buNone/>
+            </a:pPr>
+            <a:r>
+              <a:rPr b="1" i="0" lang="en-US" sz="1200" u="none" cap="none" strike="noStrike">
+                <a:solidFill>
+                  <a:srgbClr val="F4748A"/>
+                </a:solidFill>
+                <a:latin typeface="Arial"/>
+                <a:ea typeface="Arial"/>
+                <a:cs typeface="Arial"/>
+                <a:sym typeface="Arial"/>
+              </a:rPr>
+              <a:t>OUR HONESTY</a:t>
+            </a:r>
+            <a:endParaRPr b="0" i="0" sz="1200" u="none" cap="none" strike="noStrike">
+              <a:solidFill>
+                <a:schemeClr val="dk1"/>
+              </a:solidFill>
+              <a:latin typeface="Calibri"/>
+              <a:ea typeface="Calibri"/>
+              <a:cs typeface="Calibri"/>
+              <a:sym typeface="Calibri"/>
+            </a:endParaRPr>
+          </a:p>
+        </p:txBody>
+      </p:sp>
+      <p:sp>
+        <p:nvSpPr>
+          <p:cNvPr id="40" name="Google Shape;40;p4"/>
+          <p:cNvSpPr/>
+          <p:nvPr/>
+        </p:nvSpPr>
+        <p:spPr>
+          <a:xfrm>
+            <a:off x="548640" y="603504"/>
+            <a:ext cx="11064240" cy="603504"/>
+          </a:xfrm>
+          <a:prstGeom prst="rect">
+            <a:avLst/>
+          </a:prstGeom>
+          <a:noFill/>
+          <a:ln>
+            <a:noFill/>
+          </a:ln>
+        </p:spPr>
+        <p:txBody>
+          <a:bodyPr anchorCtr="0" anchor="ctr" bIns="0" lIns="0" spcFirstLastPara="1" rIns="0" wrap="square" tIns="0">
+            <a:noAutofit/>
+          </a:bodyPr>
+          <a:lstStyle/>
+          <a:p>
+            <a:pPr indent="0" lvl="0" marL="0" marR="0" rtl="0" algn="l">
+              <a:spcBef>
+                <a:spcPts val="0"/>
+              </a:spcBef>
+              <a:spcAft>
+                <a:spcPts val="0"/>
+              </a:spcAft>
+              <a:buClr>
+                <a:srgbClr val="20223F"/>
+              </a:buClr>
+              <a:buSzPts val="2700"/>
+              <a:buFont typeface="Arial"/>
+              <a:buNone/>
+            </a:pPr>
+            <a:r>
+              <a:rPr b="1" i="0" lang="en-US" sz="2700" u="none" cap="none" strike="noStrike">
+                <a:solidFill>
+                  <a:srgbClr val="20223F"/>
+                </a:solidFill>
+                <a:latin typeface="Arial"/>
+                <a:ea typeface="Arial"/>
+                <a:cs typeface="Arial"/>
+                <a:sym typeface="Arial"/>
+              </a:rPr>
+              <a:t>私たちが「しないこと」を、正直にお伝えします</a:t>
+            </a:r>
+            <a:endParaRPr b="0" i="0" sz="2700" u="none" cap="none" strike="noStrike">
+              <a:solidFill>
+                <a:schemeClr val="dk1"/>
+              </a:solidFill>
+              <a:latin typeface="Calibri"/>
+              <a:ea typeface="Calibri"/>
+              <a:cs typeface="Calibri"/>
+              <a:sym typeface="Calibri"/>
+            </a:endParaRPr>
+          </a:p>
+        </p:txBody>
+      </p:sp>
+      <p:sp>
+        <p:nvSpPr>
+          <p:cNvPr id="41" name="Google Shape;41;p4"/>
+          <p:cNvSpPr/>
+          <p:nvPr/>
+        </p:nvSpPr>
+        <p:spPr>
+          <a:xfrm>
+            <a:off x="548640" y="1325880"/>
+            <a:ext cx="11064240" cy="457200"/>
+          </a:xfrm>
+          <a:prstGeom prst="rect">
+            <a:avLst/>
+          </a:prstGeom>
+          <a:noFill/>
+          <a:ln>
+            <a:noFill/>
+          </a:ln>
+        </p:spPr>
+        <p:txBody>
+          <a:bodyPr anchorCtr="0" anchor="ctr" bIns="0" lIns="0" spcFirstLastPara="1" rIns="0" wrap="square" tIns="0">
+            <a:noAutofit/>
+          </a:bodyPr>
+          <a:lstStyle/>
+          <a:p>
+            <a:pPr indent="0" lvl="0" marL="0" marR="0" rtl="0" algn="l">
+              <a:spcBef>
+                <a:spcPts val="0"/>
+              </a:spcBef>
+              <a:spcAft>
+                <a:spcPts val="0"/>
+              </a:spcAft>
+              <a:buClr>
+                <a:srgbClr val="20223F"/>
+              </a:buClr>
+              <a:buSzPts val="1400"/>
+              <a:buFont typeface="Arial"/>
+              <a:buNone/>
+            </a:pPr>
+            <a:r>
+              <a:rPr b="0" i="0" lang="en-US" sz="1400" u="none" cap="none" strike="noStrike">
+                <a:solidFill>
+                  <a:srgbClr val="20223F"/>
+                </a:solidFill>
+                <a:latin typeface="Arial"/>
+                <a:ea typeface="Arial"/>
+                <a:cs typeface="Arial"/>
+                <a:sym typeface="Arial"/>
+              </a:rPr>
+              <a:t>できることだけでなく、できない・やらないことも先にお伝えします。それが、あなたの口コミ資産を守ります。</a:t>
+            </a:r>
+            <a:endParaRPr b="0" i="0" sz="1400" u="none" cap="none" strike="noStrike">
+              <a:solidFill>
+                <a:schemeClr val="dk1"/>
+              </a:solidFill>
+              <a:latin typeface="Calibri"/>
+              <a:ea typeface="Calibri"/>
+              <a:cs typeface="Calibri"/>
+              <a:sym typeface="Calibri"/>
+            </a:endParaRPr>
+          </a:p>
+        </p:txBody>
+      </p:sp>
+      <p:sp>
+        <p:nvSpPr>
+          <p:cNvPr id="42" name="Google Shape;42;p4"/>
+          <p:cNvSpPr/>
+          <p:nvPr/>
+        </p:nvSpPr>
+        <p:spPr>
+          <a:xfrm>
+            <a:off x="548640" y="2011680"/>
+            <a:ext cx="3505200" cy="2240280"/>
+          </a:xfrm>
+          <a:prstGeom prst="roundRect">
+            <a:avLst>
+              <a:gd fmla="val 4898" name="adj"/>
+            </a:avLst>
+          </a:prstGeom>
+          <a:solidFill>
+            <a:srgbClr val="FFFFFF"/>
+          </a:solidFill>
+          <a:ln cap="flat" cmpd="sng" w="12700">
+            <a:solidFill>
+              <a:srgbClr val="E2E4F0"/>
+            </a:solidFill>
+            <a:prstDash val="solid"/>
+            <a:round/>
+            <a:headEnd len="sm" w="sm" type="none"/>
+            <a:tailEnd len="sm" w="sm" type="none"/>
+          </a:ln>
+          <a:effectLst>
+            <a:outerShdw blurRad="114300" rotWithShape="0" algn="bl" dir="5400000" dist="38100">
+              <a:srgbClr val="232A55">
+                <a:alpha val="12156"/>
+              </a:srgbClr>
+            </a:outerShdw>
+          </a:effectLst>
+        </p:spPr>
+        <p:txBody>
+          <a:bodyPr anchorCtr="0" anchor="ctr" bIns="91425" lIns="91425" spcFirstLastPara="1" rIns="91425" wrap="square" tIns="91425">
+            <a:noAutofit/>
+          </a:bodyPr>
+          <a:lstStyle/>
+          <a:p>
+            <a:pPr indent="0" lvl="0" marL="0" rtl="0" algn="l">
+              <a:spcBef>
+                <a:spcPts val="0"/>
+              </a:spcBef>
+              <a:spcAft>
+                <a:spcPts val="0"/>
+              </a:spcAft>
+              <a:buNone/>
+            </a:pPr>
+            <a:r>
+              <a:t/>
+            </a:r>
+            <a:endParaRPr/>
+          </a:p>
+        </p:txBody>
+      </p:sp>
+      <p:sp>
+        <p:nvSpPr>
+          <p:cNvPr id="43" name="Google Shape;43;p4"/>
+          <p:cNvSpPr/>
+          <p:nvPr/>
+        </p:nvSpPr>
+        <p:spPr>
+          <a:xfrm>
+            <a:off x="841248" y="2304288"/>
+            <a:ext cx="640080" cy="640080"/>
+          </a:xfrm>
+          <a:prstGeom prst="roundRect">
+            <a:avLst>
+              <a:gd fmla="val 28000" name="adj"/>
+            </a:avLst>
+          </a:prstGeom>
+          <a:solidFill>
+            <a:srgbClr val="3E4BA0"/>
+          </a:solidFill>
+          <a:ln>
+            <a:noFill/>
+          </a:ln>
+        </p:spPr>
+        <p:txBody>
+          <a:bodyPr anchorCtr="0" anchor="ctr" bIns="91425" lIns="91425" spcFirstLastPara="1" rIns="91425" wrap="square" tIns="91425">
+            <a:noAutofit/>
+          </a:bodyPr>
+          <a:lstStyle/>
+          <a:p>
+            <a:pPr indent="0" lvl="0" marL="0" rtl="0" algn="l">
+              <a:spcBef>
+                <a:spcPts val="0"/>
+              </a:spcBef>
+              <a:spcAft>
+                <a:spcPts val="0"/>
+              </a:spcAft>
+              <a:buNone/>
+            </a:pPr>
+            <a:r>
+              <a:t/>
+            </a:r>
+            <a:endParaRPr/>
+          </a:p>
+        </p:txBody>
+      </p:sp>
+      <p:pic>
+        <p:nvPicPr>
+          <p:cNvPr descr="preencoded.png" id="44" name="Google Shape;44;p4"/>
+          <p:cNvPicPr preferRelativeResize="0"/>
+          <p:nvPr/>
+        </p:nvPicPr>
+        <p:blipFill rotWithShape="1">
+          <a:blip r:embed="rId2">
+            <a:alphaModFix/>
+          </a:blip>
+          <a:srcRect b="0" l="0" r="0" t="0"/>
+          <a:stretch/>
+        </p:blipFill>
+        <p:spPr>
+          <a:xfrm>
+            <a:off x="985266" y="2448306"/>
+            <a:ext cx="352044" cy="352044"/>
+          </a:xfrm>
+          <a:prstGeom prst="rect">
+            <a:avLst/>
+          </a:prstGeom>
+          <a:noFill/>
+          <a:ln>
+            <a:noFill/>
+          </a:ln>
+        </p:spPr>
+      </p:pic>
+      <p:sp>
+        <p:nvSpPr>
+          <p:cNvPr id="45" name="Google Shape;45;p4"/>
+          <p:cNvSpPr/>
+          <p:nvPr/>
+        </p:nvSpPr>
+        <p:spPr>
+          <a:xfrm>
+            <a:off x="841248" y="3090672"/>
+            <a:ext cx="2956560" cy="457200"/>
+          </a:xfrm>
+          <a:prstGeom prst="rect">
+            <a:avLst/>
+          </a:prstGeom>
+          <a:noFill/>
+          <a:ln>
+            <a:noFill/>
+          </a:ln>
+        </p:spPr>
+        <p:txBody>
+          <a:bodyPr anchorCtr="0" anchor="ctr" bIns="0" lIns="0" spcFirstLastPara="1" rIns="0" wrap="square" tIns="0">
+            <a:noAutofit/>
+          </a:bodyPr>
+          <a:lstStyle/>
+          <a:p>
+            <a:pPr indent="0" lvl="0" marL="0" marR="0" rtl="0" algn="l">
+              <a:spcBef>
+                <a:spcPts val="0"/>
+              </a:spcBef>
+              <a:spcAft>
+                <a:spcPts val="0"/>
+              </a:spcAft>
+              <a:buClr>
+                <a:srgbClr val="20223F"/>
+              </a:buClr>
+              <a:buSzPts val="1600"/>
+              <a:buFont typeface="Arial"/>
+              <a:buNone/>
+            </a:pPr>
+            <a:r>
+              <a:rPr b="1" i="0" lang="en-US" sz="1600" u="none" cap="none" strike="noStrike">
+                <a:solidFill>
+                  <a:srgbClr val="20223F"/>
+                </a:solidFill>
+                <a:latin typeface="Arial"/>
+                <a:ea typeface="Arial"/>
+                <a:cs typeface="Arial"/>
+                <a:sym typeface="Arial"/>
+              </a:rPr>
+              <a:t>成果は保証しません</a:t>
+            </a:r>
+            <a:endParaRPr b="0" i="0" sz="1600" u="none" cap="none" strike="noStrike">
+              <a:solidFill>
+                <a:schemeClr val="dk1"/>
+              </a:solidFill>
+              <a:latin typeface="Calibri"/>
+              <a:ea typeface="Calibri"/>
+              <a:cs typeface="Calibri"/>
+              <a:sym typeface="Calibri"/>
+            </a:endParaRPr>
+          </a:p>
+        </p:txBody>
+      </p:sp>
+      <p:sp>
+        <p:nvSpPr>
+          <p:cNvPr id="46" name="Google Shape;46;p4"/>
+          <p:cNvSpPr/>
+          <p:nvPr/>
+        </p:nvSpPr>
+        <p:spPr>
+          <a:xfrm>
+            <a:off x="841248" y="3584448"/>
+            <a:ext cx="2956560" cy="594360"/>
+          </a:xfrm>
+          <a:prstGeom prst="rect">
+            <a:avLst/>
+          </a:prstGeom>
+          <a:noFill/>
+          <a:ln>
+            <a:noFill/>
+          </a:ln>
+        </p:spPr>
+        <p:txBody>
+          <a:bodyPr anchorCtr="0" anchor="ctr" bIns="0" lIns="0" spcFirstLastPara="1" rIns="0" wrap="square" tIns="0">
+            <a:noAutofit/>
+          </a:bodyPr>
+          <a:lstStyle/>
+          <a:p>
+            <a:pPr indent="0" lvl="0" marL="0" marR="0" rtl="0" algn="l">
+              <a:lnSpc>
+                <a:spcPct val="115000"/>
+              </a:lnSpc>
+              <a:spcBef>
+                <a:spcPts val="0"/>
+              </a:spcBef>
+              <a:spcAft>
+                <a:spcPts val="0"/>
+              </a:spcAft>
+              <a:buClr>
+                <a:srgbClr val="6B7280"/>
+              </a:buClr>
+              <a:buSzPts val="1200"/>
+              <a:buFont typeface="Arial"/>
+              <a:buNone/>
+            </a:pPr>
+            <a:r>
+              <a:rPr b="0" i="0" lang="en-US" sz="1200" u="none" cap="none" strike="noStrike">
+                <a:solidFill>
+                  <a:srgbClr val="6B7280"/>
+                </a:solidFill>
+                <a:latin typeface="Arial"/>
+                <a:ea typeface="Arial"/>
+                <a:cs typeface="Arial"/>
+                <a:sym typeface="Arial"/>
+              </a:rPr>
+              <a:t>順位・問い合わせ数・売上の“保証”はしません（Googleの仕組み上、誰にもできません）。数値は毎月正直に開示します。</a:t>
+            </a:r>
+            <a:endParaRPr b="0" i="0" sz="1200" u="none" cap="none" strike="noStrike">
+              <a:solidFill>
+                <a:schemeClr val="dk1"/>
+              </a:solidFill>
+              <a:latin typeface="Calibri"/>
+              <a:ea typeface="Calibri"/>
+              <a:cs typeface="Calibri"/>
+              <a:sym typeface="Calibri"/>
+            </a:endParaRPr>
+          </a:p>
+        </p:txBody>
+      </p:sp>
+      <p:sp>
+        <p:nvSpPr>
+          <p:cNvPr id="47" name="Google Shape;47;p4"/>
+          <p:cNvSpPr/>
+          <p:nvPr/>
+        </p:nvSpPr>
+        <p:spPr>
+          <a:xfrm>
+            <a:off x="4373880" y="2011680"/>
+            <a:ext cx="3505200" cy="2240280"/>
+          </a:xfrm>
+          <a:prstGeom prst="roundRect">
+            <a:avLst>
+              <a:gd fmla="val 4898" name="adj"/>
+            </a:avLst>
+          </a:prstGeom>
+          <a:solidFill>
+            <a:srgbClr val="FFFFFF"/>
+          </a:solidFill>
+          <a:ln cap="flat" cmpd="sng" w="12700">
+            <a:solidFill>
+              <a:srgbClr val="E2E4F0"/>
+            </a:solidFill>
+            <a:prstDash val="solid"/>
+            <a:round/>
+            <a:headEnd len="sm" w="sm" type="none"/>
+            <a:tailEnd len="sm" w="sm" type="none"/>
+          </a:ln>
+          <a:effectLst>
+            <a:outerShdw blurRad="114300" rotWithShape="0" algn="bl" dir="5400000" dist="38100">
+              <a:srgbClr val="232A55">
+                <a:alpha val="12156"/>
+              </a:srgbClr>
+            </a:outerShdw>
+          </a:effectLst>
+        </p:spPr>
+        <p:txBody>
+          <a:bodyPr anchorCtr="0" anchor="ctr" bIns="91425" lIns="91425" spcFirstLastPara="1" rIns="91425" wrap="square" tIns="91425">
+            <a:noAutofit/>
+          </a:bodyPr>
+          <a:lstStyle/>
+          <a:p>
+            <a:pPr indent="0" lvl="0" marL="0" rtl="0" algn="l">
+              <a:spcBef>
+                <a:spcPts val="0"/>
+              </a:spcBef>
+              <a:spcAft>
+                <a:spcPts val="0"/>
+              </a:spcAft>
+              <a:buNone/>
+            </a:pPr>
+            <a:r>
+              <a:t/>
+            </a:r>
+            <a:endParaRPr/>
+          </a:p>
+        </p:txBody>
+      </p:sp>
+      <p:sp>
+        <p:nvSpPr>
+          <p:cNvPr id="48" name="Google Shape;48;p4"/>
+          <p:cNvSpPr/>
+          <p:nvPr/>
+        </p:nvSpPr>
+        <p:spPr>
+          <a:xfrm>
+            <a:off x="4666488" y="2304288"/>
+            <a:ext cx="640080" cy="640080"/>
+          </a:xfrm>
+          <a:prstGeom prst="roundRect">
+            <a:avLst>
+              <a:gd fmla="val 28000" name="adj"/>
+            </a:avLst>
+          </a:prstGeom>
+          <a:solidFill>
+            <a:srgbClr val="F4748A"/>
+          </a:solidFill>
+          <a:ln>
+            <a:noFill/>
+          </a:ln>
+        </p:spPr>
+        <p:txBody>
+          <a:bodyPr anchorCtr="0" anchor="ctr" bIns="91425" lIns="91425" spcFirstLastPara="1" rIns="91425" wrap="square" tIns="91425">
+            <a:noAutofit/>
+          </a:bodyPr>
+          <a:lstStyle/>
+          <a:p>
+            <a:pPr indent="0" lvl="0" marL="0" rtl="0" algn="l">
+              <a:spcBef>
+                <a:spcPts val="0"/>
+              </a:spcBef>
+              <a:spcAft>
+                <a:spcPts val="0"/>
+              </a:spcAft>
+              <a:buNone/>
+            </a:pPr>
+            <a:r>
+              <a:t/>
+            </a:r>
+            <a:endParaRPr/>
+          </a:p>
+        </p:txBody>
+      </p:sp>
+      <p:pic>
+        <p:nvPicPr>
+          <p:cNvPr descr="preencoded.png" id="49" name="Google Shape;49;p4"/>
+          <p:cNvPicPr preferRelativeResize="0"/>
+          <p:nvPr/>
+        </p:nvPicPr>
+        <p:blipFill rotWithShape="1">
+          <a:blip r:embed="rId3">
+            <a:alphaModFix/>
+          </a:blip>
+          <a:srcRect b="0" l="0" r="0" t="0"/>
+          <a:stretch/>
+        </p:blipFill>
+        <p:spPr>
+          <a:xfrm>
+            <a:off x="4810506" y="2448306"/>
+            <a:ext cx="352044" cy="352044"/>
+          </a:xfrm>
+          <a:prstGeom prst="rect">
+            <a:avLst/>
+          </a:prstGeom>
+          <a:noFill/>
+          <a:ln>
+            <a:noFill/>
+          </a:ln>
+        </p:spPr>
+      </p:pic>
+      <p:sp>
+        <p:nvSpPr>
+          <p:cNvPr id="50" name="Google Shape;50;p4"/>
+          <p:cNvSpPr/>
+          <p:nvPr/>
+        </p:nvSpPr>
+        <p:spPr>
+          <a:xfrm>
+            <a:off x="4666488" y="3090672"/>
+            <a:ext cx="2956560" cy="457200"/>
+          </a:xfrm>
+          <a:prstGeom prst="rect">
+            <a:avLst/>
+          </a:prstGeom>
+          <a:noFill/>
+          <a:ln>
+            <a:noFill/>
+          </a:ln>
+        </p:spPr>
+        <p:txBody>
+          <a:bodyPr anchorCtr="0" anchor="ctr" bIns="0" lIns="0" spcFirstLastPara="1" rIns="0" wrap="square" tIns="0">
+            <a:noAutofit/>
+          </a:bodyPr>
+          <a:lstStyle/>
+          <a:p>
+            <a:pPr indent="0" lvl="0" marL="0" marR="0" rtl="0" algn="l">
+              <a:spcBef>
+                <a:spcPts val="0"/>
+              </a:spcBef>
+              <a:spcAft>
+                <a:spcPts val="0"/>
+              </a:spcAft>
+              <a:buClr>
+                <a:srgbClr val="20223F"/>
+              </a:buClr>
+              <a:buSzPts val="1600"/>
+              <a:buFont typeface="Arial"/>
+              <a:buNone/>
+            </a:pPr>
+            <a:r>
+              <a:rPr b="1" i="0" lang="en-US" sz="1600" u="none" cap="none" strike="noStrike">
+                <a:solidFill>
+                  <a:srgbClr val="20223F"/>
+                </a:solidFill>
+                <a:latin typeface="Arial"/>
+                <a:ea typeface="Arial"/>
+                <a:cs typeface="Arial"/>
+                <a:sym typeface="Arial"/>
+              </a:rPr>
+              <a:t>勝手に公開しません</a:t>
+            </a:r>
+            <a:endParaRPr b="0" i="0" sz="1600" u="none" cap="none" strike="noStrike">
+              <a:solidFill>
+                <a:schemeClr val="dk1"/>
+              </a:solidFill>
+              <a:latin typeface="Calibri"/>
+              <a:ea typeface="Calibri"/>
+              <a:cs typeface="Calibri"/>
+              <a:sym typeface="Calibri"/>
+            </a:endParaRPr>
+          </a:p>
+        </p:txBody>
+      </p:sp>
+      <p:sp>
+        <p:nvSpPr>
+          <p:cNvPr id="51" name="Google Shape;51;p4"/>
+          <p:cNvSpPr/>
+          <p:nvPr/>
+        </p:nvSpPr>
+        <p:spPr>
+          <a:xfrm>
+            <a:off x="4666488" y="3584448"/>
+            <a:ext cx="2956560" cy="594360"/>
+          </a:xfrm>
+          <a:prstGeom prst="rect">
+            <a:avLst/>
+          </a:prstGeom>
+          <a:noFill/>
+          <a:ln>
+            <a:noFill/>
+          </a:ln>
+        </p:spPr>
+        <p:txBody>
+          <a:bodyPr anchorCtr="0" anchor="ctr" bIns="0" lIns="0" spcFirstLastPara="1" rIns="0" wrap="square" tIns="0">
+            <a:noAutofit/>
+          </a:bodyPr>
+          <a:lstStyle/>
+          <a:p>
+            <a:pPr indent="0" lvl="0" marL="0" marR="0" rtl="0" algn="l">
+              <a:lnSpc>
+                <a:spcPct val="115000"/>
+              </a:lnSpc>
+              <a:spcBef>
+                <a:spcPts val="0"/>
+              </a:spcBef>
+              <a:spcAft>
+                <a:spcPts val="0"/>
+              </a:spcAft>
+              <a:buClr>
+                <a:srgbClr val="6B7280"/>
+              </a:buClr>
+              <a:buSzPts val="1200"/>
+              <a:buFont typeface="Arial"/>
+              <a:buNone/>
+            </a:pPr>
+            <a:r>
+              <a:rPr b="0" i="0" lang="en-US" sz="1200" u="none" cap="none" strike="noStrike">
+                <a:solidFill>
+                  <a:srgbClr val="6B7280"/>
+                </a:solidFill>
+                <a:latin typeface="Arial"/>
+                <a:ea typeface="Arial"/>
+                <a:cs typeface="Arial"/>
+                <a:sym typeface="Arial"/>
+              </a:rPr>
+              <a:t>AIが下ごしらえし、人が薬機法・表現・トーンを確認してから公開します。</a:t>
+            </a:r>
+            <a:endParaRPr b="0" i="0" sz="1200" u="none" cap="none" strike="noStrike">
+              <a:solidFill>
+                <a:schemeClr val="dk1"/>
+              </a:solidFill>
+              <a:latin typeface="Calibri"/>
+              <a:ea typeface="Calibri"/>
+              <a:cs typeface="Calibri"/>
+              <a:sym typeface="Calibri"/>
+            </a:endParaRPr>
+          </a:p>
+        </p:txBody>
+      </p:sp>
+      <p:sp>
+        <p:nvSpPr>
+          <p:cNvPr id="52" name="Google Shape;52;p4"/>
+          <p:cNvSpPr/>
+          <p:nvPr/>
+        </p:nvSpPr>
+        <p:spPr>
+          <a:xfrm>
+            <a:off x="8061960" y="2011680"/>
+            <a:ext cx="3505200" cy="2240280"/>
+          </a:xfrm>
+          <a:prstGeom prst="roundRect">
+            <a:avLst>
+              <a:gd fmla="val 4898" name="adj"/>
+            </a:avLst>
+          </a:prstGeom>
+          <a:solidFill>
+            <a:srgbClr val="FFFFFF"/>
+          </a:solidFill>
+          <a:ln cap="flat" cmpd="sng" w="12700">
+            <a:solidFill>
+              <a:srgbClr val="E2E4F0"/>
+            </a:solidFill>
+            <a:prstDash val="solid"/>
+            <a:round/>
+            <a:headEnd len="sm" w="sm" type="none"/>
+            <a:tailEnd len="sm" w="sm" type="none"/>
+          </a:ln>
+          <a:effectLst>
+            <a:outerShdw blurRad="114300" rotWithShape="0" algn="bl" dir="5400000" dist="38100">
+              <a:srgbClr val="232A55">
+                <a:alpha val="12156"/>
+              </a:srgbClr>
+            </a:outerShdw>
+          </a:effectLst>
+        </p:spPr>
+        <p:txBody>
+          <a:bodyPr anchorCtr="0" anchor="ctr" bIns="91425" lIns="91425" spcFirstLastPara="1" rIns="91425" wrap="square" tIns="91425">
+            <a:noAutofit/>
+          </a:bodyPr>
+          <a:lstStyle/>
+          <a:p>
+            <a:pPr indent="0" lvl="0" marL="0" rtl="0" algn="l">
+              <a:spcBef>
+                <a:spcPts val="0"/>
+              </a:spcBef>
+              <a:spcAft>
+                <a:spcPts val="0"/>
+              </a:spcAft>
+              <a:buNone/>
+            </a:pPr>
+            <a:r>
+              <a:t/>
+            </a:r>
+            <a:endParaRPr/>
+          </a:p>
+        </p:txBody>
+      </p:sp>
+      <p:sp>
+        <p:nvSpPr>
+          <p:cNvPr id="53" name="Google Shape;53;p4"/>
+          <p:cNvSpPr/>
+          <p:nvPr/>
+        </p:nvSpPr>
+        <p:spPr>
+          <a:xfrm>
+            <a:off x="8354568" y="2304288"/>
+            <a:ext cx="640080" cy="640080"/>
+          </a:xfrm>
+          <a:prstGeom prst="roundRect">
+            <a:avLst>
+              <a:gd fmla="val 28000" name="adj"/>
+            </a:avLst>
+          </a:prstGeom>
+          <a:solidFill>
+            <a:srgbClr val="10987A"/>
+          </a:solidFill>
+          <a:ln>
+            <a:noFill/>
+          </a:ln>
+        </p:spPr>
+        <p:txBody>
+          <a:bodyPr anchorCtr="0" anchor="ctr" bIns="91425" lIns="91425" spcFirstLastPara="1" rIns="91425" wrap="square" tIns="91425">
+            <a:noAutofit/>
+          </a:bodyPr>
+          <a:lstStyle/>
+          <a:p>
+            <a:pPr indent="0" lvl="0" marL="0" rtl="0" algn="l">
+              <a:spcBef>
+                <a:spcPts val="0"/>
+              </a:spcBef>
+              <a:spcAft>
+                <a:spcPts val="0"/>
+              </a:spcAft>
+              <a:buNone/>
+            </a:pPr>
+            <a:r>
+              <a:t/>
+            </a:r>
+            <a:endParaRPr/>
+          </a:p>
+        </p:txBody>
+      </p:sp>
+      <p:pic>
+        <p:nvPicPr>
+          <p:cNvPr descr="preencoded.png" id="54" name="Google Shape;54;p4"/>
+          <p:cNvPicPr preferRelativeResize="0"/>
+          <p:nvPr/>
+        </p:nvPicPr>
+        <p:blipFill rotWithShape="1">
+          <a:blip r:embed="rId4">
+            <a:alphaModFix/>
+          </a:blip>
+          <a:srcRect b="0" l="0" r="0" t="0"/>
+          <a:stretch/>
+        </p:blipFill>
+        <p:spPr>
+          <a:xfrm>
+            <a:off x="8498586" y="2448306"/>
+            <a:ext cx="352044" cy="352044"/>
+          </a:xfrm>
+          <a:prstGeom prst="rect">
+            <a:avLst/>
+          </a:prstGeom>
+          <a:noFill/>
+          <a:ln>
+            <a:noFill/>
+          </a:ln>
+        </p:spPr>
+      </p:pic>
+      <p:sp>
+        <p:nvSpPr>
+          <p:cNvPr id="55" name="Google Shape;55;p4"/>
+          <p:cNvSpPr/>
+          <p:nvPr/>
+        </p:nvSpPr>
+        <p:spPr>
+          <a:xfrm>
+            <a:off x="8354568" y="3090672"/>
+            <a:ext cx="2956560" cy="457200"/>
+          </a:xfrm>
+          <a:prstGeom prst="rect">
+            <a:avLst/>
+          </a:prstGeom>
+          <a:noFill/>
+          <a:ln>
+            <a:noFill/>
+          </a:ln>
+        </p:spPr>
+        <p:txBody>
+          <a:bodyPr anchorCtr="0" anchor="ctr" bIns="0" lIns="0" spcFirstLastPara="1" rIns="0" wrap="square" tIns="0">
+            <a:noAutofit/>
+          </a:bodyPr>
+          <a:lstStyle/>
+          <a:p>
+            <a:pPr indent="0" lvl="0" marL="0" marR="0" rtl="0" algn="l">
+              <a:spcBef>
+                <a:spcPts val="0"/>
+              </a:spcBef>
+              <a:spcAft>
+                <a:spcPts val="0"/>
+              </a:spcAft>
+              <a:buClr>
+                <a:srgbClr val="20223F"/>
+              </a:buClr>
+              <a:buSzPts val="1600"/>
+              <a:buFont typeface="Arial"/>
+              <a:buNone/>
+            </a:pPr>
+            <a:r>
+              <a:rPr b="1" i="0" lang="en-US" sz="1600" u="none" cap="none" strike="noStrike">
+                <a:solidFill>
+                  <a:srgbClr val="20223F"/>
+                </a:solidFill>
+                <a:latin typeface="Arial"/>
+                <a:ea typeface="Arial"/>
+                <a:cs typeface="Arial"/>
+                <a:sym typeface="Arial"/>
+              </a:rPr>
+              <a:t>サクラ・対価はしません</a:t>
+            </a:r>
+            <a:endParaRPr b="0" i="0" sz="1600" u="none" cap="none" strike="noStrike">
+              <a:solidFill>
+                <a:schemeClr val="dk1"/>
+              </a:solidFill>
+              <a:latin typeface="Calibri"/>
+              <a:ea typeface="Calibri"/>
+              <a:cs typeface="Calibri"/>
+              <a:sym typeface="Calibri"/>
+            </a:endParaRPr>
+          </a:p>
+        </p:txBody>
+      </p:sp>
+      <p:sp>
+        <p:nvSpPr>
+          <p:cNvPr id="56" name="Google Shape;56;p4"/>
+          <p:cNvSpPr/>
+          <p:nvPr/>
+        </p:nvSpPr>
+        <p:spPr>
+          <a:xfrm>
+            <a:off x="8354568" y="3584448"/>
+            <a:ext cx="2956560" cy="594360"/>
+          </a:xfrm>
+          <a:prstGeom prst="rect">
+            <a:avLst/>
+          </a:prstGeom>
+          <a:noFill/>
+          <a:ln>
+            <a:noFill/>
+          </a:ln>
+        </p:spPr>
+        <p:txBody>
+          <a:bodyPr anchorCtr="0" anchor="ctr" bIns="0" lIns="0" spcFirstLastPara="1" rIns="0" wrap="square" tIns="0">
+            <a:noAutofit/>
+          </a:bodyPr>
+          <a:lstStyle/>
+          <a:p>
+            <a:pPr indent="0" lvl="0" marL="0" marR="0" rtl="0" algn="l">
+              <a:lnSpc>
+                <a:spcPct val="115000"/>
+              </a:lnSpc>
+              <a:spcBef>
+                <a:spcPts val="0"/>
+              </a:spcBef>
+              <a:spcAft>
+                <a:spcPts val="0"/>
+              </a:spcAft>
+              <a:buClr>
+                <a:srgbClr val="6B7280"/>
+              </a:buClr>
+              <a:buSzPts val="1200"/>
+              <a:buFont typeface="Arial"/>
+              <a:buNone/>
+            </a:pPr>
+            <a:r>
+              <a:rPr b="0" i="0" lang="en-US" sz="1200" u="none" cap="none" strike="noStrike">
+                <a:solidFill>
+                  <a:srgbClr val="6B7280"/>
+                </a:solidFill>
+                <a:latin typeface="Arial"/>
+                <a:ea typeface="Arial"/>
+                <a:cs typeface="Arial"/>
+                <a:sym typeface="Arial"/>
+              </a:rPr>
+              <a:t>ご希望でも、対価と引き換えの口コミは一切行いません。それが2026年のポリシー厳格化からあなたの資産を守る方法です。</a:t>
+            </a:r>
+            <a:endParaRPr b="0" i="0" sz="1200" u="none" cap="none" strike="noStrike">
+              <a:solidFill>
+                <a:schemeClr val="dk1"/>
+              </a:solidFill>
+              <a:latin typeface="Calibri"/>
+              <a:ea typeface="Calibri"/>
+              <a:cs typeface="Calibri"/>
+              <a:sym typeface="Calibri"/>
+            </a:endParaRPr>
+          </a:p>
+        </p:txBody>
+      </p:sp>
+      <p:sp>
+        <p:nvSpPr>
+          <p:cNvPr id="57" name="Google Shape;57;p4"/>
+          <p:cNvSpPr/>
+          <p:nvPr/>
+        </p:nvSpPr>
+        <p:spPr>
+          <a:xfrm>
+            <a:off x="548640" y="4617720"/>
+            <a:ext cx="11064240" cy="914400"/>
+          </a:xfrm>
+          <a:prstGeom prst="roundRect">
+            <a:avLst>
+              <a:gd fmla="val 10000" name="adj"/>
+            </a:avLst>
+          </a:prstGeom>
+          <a:solidFill>
+            <a:srgbClr val="ECEEF8"/>
+          </a:solidFill>
+          <a:ln>
+            <a:noFill/>
+          </a:ln>
+        </p:spPr>
+        <p:txBody>
+          <a:bodyPr anchorCtr="0" anchor="ctr" bIns="91425" lIns="91425" spcFirstLastPara="1" rIns="91425" wrap="square" tIns="91425">
+            <a:noAutofit/>
+          </a:bodyPr>
+          <a:lstStyle/>
+          <a:p>
+            <a:pPr indent="0" lvl="0" marL="0" rtl="0" algn="l">
+              <a:spcBef>
+                <a:spcPts val="0"/>
+              </a:spcBef>
+              <a:spcAft>
+                <a:spcPts val="0"/>
+              </a:spcAft>
+              <a:buNone/>
+            </a:pPr>
+            <a:r>
+              <a:t/>
+            </a:r>
+            <a:endParaRPr/>
+          </a:p>
+        </p:txBody>
+      </p:sp>
+      <p:sp>
+        <p:nvSpPr>
+          <p:cNvPr id="58" name="Google Shape;58;p4"/>
+          <p:cNvSpPr/>
+          <p:nvPr/>
+        </p:nvSpPr>
+        <p:spPr>
+          <a:xfrm>
+            <a:off x="960120" y="4617720"/>
+            <a:ext cx="10241280" cy="914400"/>
+          </a:xfrm>
+          <a:prstGeom prst="rect">
+            <a:avLst/>
+          </a:prstGeom>
+          <a:noFill/>
+          <a:ln>
+            <a:noFill/>
+          </a:ln>
+        </p:spPr>
+        <p:txBody>
+          <a:bodyPr anchorCtr="0" anchor="ctr" bIns="0" lIns="0" spcFirstLastPara="1" rIns="0" wrap="square" tIns="0">
+            <a:noAutofit/>
+          </a:bodyPr>
+          <a:lstStyle/>
+          <a:p>
+            <a:pPr indent="0" lvl="0" marL="0" marR="0" rtl="0" algn="l">
+              <a:lnSpc>
+                <a:spcPct val="120000"/>
+              </a:lnSpc>
+              <a:spcBef>
+                <a:spcPts val="0"/>
+              </a:spcBef>
+              <a:spcAft>
+                <a:spcPts val="0"/>
+              </a:spcAft>
+              <a:buClr>
+                <a:srgbClr val="3E4BA0"/>
+              </a:buClr>
+              <a:buSzPts val="1500"/>
+              <a:buFont typeface="Arial"/>
+              <a:buNone/>
+            </a:pPr>
+            <a:r>
+              <a:rPr b="1" i="0" lang="en-US" sz="1500" u="none" cap="none" strike="noStrike">
+                <a:solidFill>
+                  <a:srgbClr val="3E4BA0"/>
+                </a:solidFill>
+                <a:latin typeface="Arial"/>
+                <a:ea typeface="Arial"/>
+                <a:cs typeface="Arial"/>
+                <a:sym typeface="Arial"/>
+              </a:rPr>
+              <a:t>「しないこと」を正直に守ることが、2026年のポリシー厳格化（違反で全口コミ削除）から、あなたの口コミ資産を守ります。</a:t>
+            </a:r>
+            <a:endParaRPr b="0" i="0" sz="1500" u="none" cap="none" strike="noStrike">
+              <a:solidFill>
+                <a:schemeClr val="dk1"/>
+              </a:solidFill>
+              <a:latin typeface="Calibri"/>
+              <a:ea typeface="Calibri"/>
+              <a:cs typeface="Calibri"/>
+              <a:sym typeface="Calibri"/>
+            </a:endParaRPr>
+          </a:p>
+        </p:txBody>
+      </p:sp>
+      <p:sp>
+        <p:nvSpPr>
+          <p:cNvPr id="59" name="Google Shape;59;p4"/>
+          <p:cNvSpPr/>
+          <p:nvPr/>
+        </p:nvSpPr>
+        <p:spPr>
+          <a:xfrm>
+            <a:off x="548640" y="6492240"/>
+            <a:ext cx="11064240" cy="274320"/>
+          </a:xfrm>
+          <a:prstGeom prst="rect">
+            <a:avLst/>
+          </a:prstGeom>
+          <a:noFill/>
+          <a:ln>
+            <a:noFill/>
+          </a:ln>
+        </p:spPr>
+        <p:txBody>
+          <a:bodyPr anchorCtr="0" anchor="ctr" bIns="0" lIns="0" spcFirstLastPara="1" rIns="0" wrap="square" tIns="0">
+            <a:noAutofit/>
+          </a:bodyPr>
+          <a:lstStyle/>
+          <a:p>
+            <a:pPr indent="0" lvl="0" marL="0" marR="0" rtl="0" algn="l">
+              <a:spcBef>
+                <a:spcPts val="0"/>
+              </a:spcBef>
+              <a:spcAft>
+                <a:spcPts val="0"/>
+              </a:spcAft>
+              <a:buClr>
+                <a:srgbClr val="3E4BA0"/>
+              </a:buClr>
+              <a:buSzPts val="900"/>
+              <a:buFont typeface="Arial"/>
+              <a:buNone/>
+            </a:pPr>
+            <a:r>
+              <a:rPr b="1" i="0" lang="en-US" sz="900" u="none" cap="none" strike="noStrike">
+                <a:solidFill>
+                  <a:srgbClr val="3E4BA0"/>
+                </a:solidFill>
+                <a:latin typeface="Arial"/>
+                <a:ea typeface="Arial"/>
+                <a:cs typeface="Arial"/>
+                <a:sym typeface="Arial"/>
+              </a:rPr>
+              <a:t>株式会社みらい編集</a:t>
+            </a:r>
+            <a:r>
+              <a:rPr b="0" i="0" lang="en-US" sz="900" u="none" cap="none" strike="noStrike">
+                <a:solidFill>
+                  <a:srgbClr val="6B7280"/>
+                </a:solidFill>
+                <a:latin typeface="Arial"/>
+                <a:ea typeface="Arial"/>
+                <a:cs typeface="Arial"/>
+                <a:sym typeface="Arial"/>
+              </a:rPr>
+              <a:t>  |  MEO運用支援サービス ご提案</a:t>
+            </a:r>
+            <a:endParaRPr b="0" i="0" sz="900" u="none" cap="none" strike="noStrike">
+              <a:solidFill>
+                <a:schemeClr val="dk1"/>
+              </a:solidFill>
+              <a:latin typeface="Calibri"/>
+              <a:ea typeface="Calibri"/>
+              <a:cs typeface="Calibri"/>
+              <a:sym typeface="Calibri"/>
+            </a:endParaRPr>
+          </a:p>
+        </p:txBody>
+      </p:sp>
+    </p:spTree>
+  </p:cSld>
+  <p:clrMapOvr>
+    <a:masterClrMapping/>
+  </p:clrMapOvr>
+</p:sld>
+</file>
+
+<file path=ppt/slides/slide12.xml><?xml version="1.0" encoding="utf-8"?>
+<p:sld xmlns:a="http://schemas.openxmlformats.org/drawingml/2006/main" xmlns:r="http://schemas.openxmlformats.org/officeDocument/2006/relationships" xmlns:mc="http://schemas.openxmlformats.org/markup-compatibility/2006" xmlns:mv="urn:schemas-microsoft-com:mac:vml" xmlns:p="http://schemas.openxmlformats.org/presentationml/2006/main" xmlns:c="http://schemas.openxmlformats.org/drawingml/2006/chart" xmlns:dgm="http://schemas.openxmlformats.org/drawingml/2006/diagram" xmlns:o="urn:schemas-microsoft-com:office:office" xmlns:v="urn:schemas-microsoft-com:vml" xmlns:pvml="urn:schemas-microsoft-com:office:powerpoint" xmlns:com="http://schemas.openxmlformats.org/drawingml/2006/compatibility" xmlns:p14="http://schemas.microsoft.com/office/powerpoint/2010/main" xmlns:p15="http://schemas.microsoft.com/office/powerpoint/2012/main" xmlns:ahyp="http://schemas.microsoft.com/office/drawing/2018/hyperlinkcolor">
+  <p:cSld>
+    <p:bg>
+      <p:bgPr>
+        <a:solidFill>
+          <a:srgbClr val="FFFFFF"/>
         </a:solidFill>
       </p:bgPr>
     </p:bg>
@@ -6538,2547 +9763,13 @@
 </p:sld>
 </file>
 
-<file path=ppt/slides/slide11.xml><?xml version="1.0" encoding="utf-8"?>
-<p:sld xmlns:a="http://schemas.openxmlformats.org/drawingml/2006/main" xmlns:p="http://schemas.openxmlformats.org/presentationml/2006/main" xmlns:r="http://schemas.openxmlformats.org/officeDocument/2006/relationships">
-  <p:cSld>
-    <p:bg>
-      <p:bgPr>
-        <a:solidFill>
-          <a:srgbClr val="F5F6FB"/>
-        </a:solidFill>
-      </p:bgPr>
-    </p:bg>
-    <p:spTree>
-      <p:nvGrpSpPr>
-        <p:cNvPr id="1" name=""/>
-        <p:cNvGrpSpPr/>
-        <p:nvPr/>
-      </p:nvGrpSpPr>
-      <p:grpSpPr/>
-      <p:sp>
-        <p:nvSpPr>
-          <p:cNvPr id="37" name="Google Shape;37;p4"/>
-          <p:cNvSpPr/>
-          <p:nvPr/>
-        </p:nvSpPr>
-        <p:spPr>
-          <a:xfrm>
-            <a:off x="10149840" y="-1188720"/>
-            <a:ext cx="2926080" cy="2926080"/>
-          </a:xfrm>
-          <a:prstGeom prst="ellipse">
-            <a:avLst/>
-          </a:prstGeom>
-          <a:solidFill>
-            <a:srgbClr val="3E4BA0">
-              <a:alpha val="7843"/>
-            </a:srgbClr>
-          </a:solidFill>
-          <a:ln>
-            <a:noFill/>
-          </a:ln>
-        </p:spPr>
-        <p:txBody>
-          <a:bodyPr anchorCtr="0" anchor="ctr" bIns="91425" lIns="91425" spcFirstLastPara="1" rIns="91425" wrap="square" tIns="91425">
-            <a:noAutofit/>
-          </a:bodyPr>
-          <a:lstStyle/>
-          <a:p>
-            <a:pPr indent="0" lvl="0" marL="0" rtl="0" algn="l">
-              <a:spcBef>
-                <a:spcPts val="0"/>
-              </a:spcBef>
-              <a:spcAft>
-                <a:spcPts val="0"/>
-              </a:spcAft>
-              <a:buNone/>
-            </a:pPr>
-            <a:r>
-              <a:t/>
-            </a:r>
-            <a:endParaRPr/>
-          </a:p>
-        </p:txBody>
-      </p:sp>
-      <p:sp>
-        <p:nvSpPr>
-          <p:cNvPr id="38" name="Google Shape;38;p4"/>
-          <p:cNvSpPr/>
-          <p:nvPr/>
-        </p:nvSpPr>
-        <p:spPr>
-          <a:xfrm>
-            <a:off x="548640" y="411480"/>
-            <a:ext cx="182880" cy="182880"/>
-          </a:xfrm>
-          <a:prstGeom prst="roundRect">
-            <a:avLst>
-              <a:gd fmla="val 25000" name="adj"/>
-            </a:avLst>
-          </a:prstGeom>
-          <a:solidFill>
-            <a:srgbClr val="F4748A"/>
-          </a:solidFill>
-          <a:ln>
-            <a:noFill/>
-          </a:ln>
-        </p:spPr>
-        <p:txBody>
-          <a:bodyPr anchorCtr="0" anchor="ctr" bIns="91425" lIns="91425" spcFirstLastPara="1" rIns="91425" wrap="square" tIns="91425">
-            <a:noAutofit/>
-          </a:bodyPr>
-          <a:lstStyle/>
-          <a:p>
-            <a:pPr indent="0" lvl="0" marL="0" rtl="0" algn="l">
-              <a:spcBef>
-                <a:spcPts val="0"/>
-              </a:spcBef>
-              <a:spcAft>
-                <a:spcPts val="0"/>
-              </a:spcAft>
-              <a:buNone/>
-            </a:pPr>
-            <a:r>
-              <a:t/>
-            </a:r>
-            <a:endParaRPr/>
-          </a:p>
-        </p:txBody>
-      </p:sp>
-      <p:sp>
-        <p:nvSpPr>
-          <p:cNvPr id="39" name="Google Shape;39;p4"/>
-          <p:cNvSpPr/>
-          <p:nvPr/>
-        </p:nvSpPr>
-        <p:spPr>
-          <a:xfrm>
-            <a:off x="841248" y="329184"/>
-            <a:ext cx="10771632" cy="292608"/>
-          </a:xfrm>
-          <a:prstGeom prst="rect">
-            <a:avLst/>
-          </a:prstGeom>
-          <a:noFill/>
-          <a:ln>
-            <a:noFill/>
-          </a:ln>
-        </p:spPr>
-        <p:txBody>
-          <a:bodyPr anchorCtr="0" anchor="ctr" bIns="0" lIns="0" spcFirstLastPara="1" rIns="0" wrap="square" tIns="0">
-            <a:noAutofit/>
-          </a:bodyPr>
-          <a:lstStyle/>
-          <a:p>
-            <a:pPr indent="0" lvl="0" marL="0" marR="0" rtl="0" algn="l">
-              <a:spcBef>
-                <a:spcPts val="0"/>
-              </a:spcBef>
-              <a:spcAft>
-                <a:spcPts val="0"/>
-              </a:spcAft>
-              <a:buClr>
-                <a:srgbClr val="F4748A"/>
-              </a:buClr>
-              <a:buSzPts val="1200"/>
-              <a:buFont typeface="Arial"/>
-              <a:buNone/>
-            </a:pPr>
-            <a:r>
-              <a:rPr b="1" i="0" lang="en-US" sz="1200" u="none" cap="none" strike="noStrike">
-                <a:solidFill>
-                  <a:srgbClr val="F4748A"/>
-                </a:solidFill>
-                <a:latin typeface="Arial"/>
-                <a:ea typeface="Arial"/>
-                <a:cs typeface="Arial"/>
-                <a:sym typeface="Arial"/>
-              </a:rPr>
-              <a:t>ONBOARDING</a:t>
-            </a:r>
-            <a:endParaRPr b="0" i="0" sz="1200" u="none" cap="none" strike="noStrike">
-              <a:solidFill>
-                <a:schemeClr val="dk1"/>
-              </a:solidFill>
-              <a:latin typeface="Calibri"/>
-              <a:ea typeface="Calibri"/>
-              <a:cs typeface="Calibri"/>
-              <a:sym typeface="Calibri"/>
-            </a:endParaRPr>
-          </a:p>
-        </p:txBody>
-      </p:sp>
-      <p:sp>
-        <p:nvSpPr>
-          <p:cNvPr id="40" name="Google Shape;40;p4"/>
-          <p:cNvSpPr/>
-          <p:nvPr/>
-        </p:nvSpPr>
-        <p:spPr>
-          <a:xfrm>
-            <a:off x="548640" y="603504"/>
-            <a:ext cx="11064240" cy="603504"/>
-          </a:xfrm>
-          <a:prstGeom prst="rect">
-            <a:avLst/>
-          </a:prstGeom>
-          <a:noFill/>
-          <a:ln>
-            <a:noFill/>
-          </a:ln>
-        </p:spPr>
-        <p:txBody>
-          <a:bodyPr anchorCtr="0" anchor="ctr" bIns="0" lIns="0" spcFirstLastPara="1" rIns="0" wrap="square" tIns="0">
-            <a:noAutofit/>
-          </a:bodyPr>
-          <a:lstStyle/>
-          <a:p>
-            <a:pPr indent="0" lvl="0" marL="0" marR="0" rtl="0" algn="l">
-              <a:spcBef>
-                <a:spcPts val="0"/>
-              </a:spcBef>
-              <a:spcAft>
-                <a:spcPts val="0"/>
-              </a:spcAft>
-              <a:buClr>
-                <a:srgbClr val="20223F"/>
-              </a:buClr>
-              <a:buSzPts val="2700"/>
-              <a:buFont typeface="Arial"/>
-              <a:buNone/>
-            </a:pPr>
-            <a:r>
-              <a:rPr b="1" i="0" lang="en-US" sz="2700" u="none" cap="none" strike="noStrike">
-                <a:solidFill>
-                  <a:srgbClr val="20223F"/>
-                </a:solidFill>
-                <a:latin typeface="Arial"/>
-                <a:ea typeface="Arial"/>
-                <a:cs typeface="Arial"/>
-                <a:sym typeface="Arial"/>
-              </a:rPr>
-              <a:t>はじめに、30〜60分の面談で「運用の方針」を一緒に決めます</a:t>
-            </a:r>
-            <a:endParaRPr b="0" i="0" sz="2700" u="none" cap="none" strike="noStrike">
-              <a:solidFill>
-                <a:schemeClr val="dk1"/>
-              </a:solidFill>
-              <a:latin typeface="Calibri"/>
-              <a:ea typeface="Calibri"/>
-              <a:cs typeface="Calibri"/>
-              <a:sym typeface="Calibri"/>
-            </a:endParaRPr>
-          </a:p>
-        </p:txBody>
-      </p:sp>
-      <p:sp>
-        <p:nvSpPr>
-          <p:cNvPr id="41" name="Google Shape;41;p4"/>
-          <p:cNvSpPr/>
-          <p:nvPr/>
-        </p:nvSpPr>
-        <p:spPr>
-          <a:xfrm>
-            <a:off x="548640" y="1325880"/>
-            <a:ext cx="11064240" cy="457200"/>
-          </a:xfrm>
-          <a:prstGeom prst="rect">
-            <a:avLst/>
-          </a:prstGeom>
-          <a:noFill/>
-          <a:ln>
-            <a:noFill/>
-          </a:ln>
-        </p:spPr>
-        <p:txBody>
-          <a:bodyPr anchorCtr="0" anchor="ctr" bIns="0" lIns="0" spcFirstLastPara="1" rIns="0" wrap="square" tIns="0">
-            <a:noAutofit/>
-          </a:bodyPr>
-          <a:lstStyle/>
-          <a:p>
-            <a:pPr indent="0" lvl="0" marL="0" marR="0" rtl="0" algn="l">
-              <a:spcBef>
-                <a:spcPts val="0"/>
-              </a:spcBef>
-              <a:spcAft>
-                <a:spcPts val="0"/>
-              </a:spcAft>
-              <a:buClr>
-                <a:srgbClr val="20223F"/>
-              </a:buClr>
-              <a:buSzPts val="1400"/>
-              <a:buFont typeface="Arial"/>
-              <a:buNone/>
-            </a:pPr>
-            <a:r>
-              <a:rPr b="0" i="0" lang="en-US" sz="1400" u="none" cap="none" strike="noStrike">
-                <a:solidFill>
-                  <a:srgbClr val="20223F"/>
-                </a:solidFill>
-                <a:latin typeface="Arial"/>
-                <a:ea typeface="Arial"/>
-                <a:cs typeface="Arial"/>
-                <a:sym typeface="Arial"/>
-              </a:rPr>
-              <a:t>運用の方針を最初に一緒に決めるので、あとはお任せいただいても、あなたの意図からズレません。</a:t>
-            </a:r>
-            <a:endParaRPr b="0" i="0" sz="1400" u="none" cap="none" strike="noStrike">
-              <a:solidFill>
-                <a:schemeClr val="dk1"/>
-              </a:solidFill>
-              <a:latin typeface="Calibri"/>
-              <a:ea typeface="Calibri"/>
-              <a:cs typeface="Calibri"/>
-              <a:sym typeface="Calibri"/>
-            </a:endParaRPr>
-          </a:p>
-        </p:txBody>
-      </p:sp>
-      <p:sp>
-        <p:nvSpPr>
-          <p:cNvPr id="42" name="Google Shape;42;p4"/>
-          <p:cNvSpPr/>
-          <p:nvPr/>
-        </p:nvSpPr>
-        <p:spPr>
-          <a:xfrm>
-            <a:off x="548640" y="2011680"/>
-            <a:ext cx="3505200" cy="2240280"/>
-          </a:xfrm>
-          <a:prstGeom prst="roundRect">
-            <a:avLst>
-              <a:gd fmla="val 4898" name="adj"/>
-            </a:avLst>
-          </a:prstGeom>
-          <a:solidFill>
-            <a:srgbClr val="FFFFFF"/>
-          </a:solidFill>
-          <a:ln cap="flat" cmpd="sng" w="12700">
-            <a:solidFill>
-              <a:srgbClr val="E2E4F0"/>
-            </a:solidFill>
-            <a:prstDash val="solid"/>
-            <a:round/>
-            <a:headEnd len="sm" w="sm" type="none"/>
-            <a:tailEnd len="sm" w="sm" type="none"/>
-          </a:ln>
-          <a:effectLst>
-            <a:outerShdw blurRad="114300" rotWithShape="0" algn="bl" dir="5400000" dist="38100">
-              <a:srgbClr val="232A55">
-                <a:alpha val="12156"/>
-              </a:srgbClr>
-            </a:outerShdw>
-          </a:effectLst>
-        </p:spPr>
-        <p:txBody>
-          <a:bodyPr anchorCtr="0" anchor="ctr" bIns="91425" lIns="91425" spcFirstLastPara="1" rIns="91425" wrap="square" tIns="91425">
-            <a:noAutofit/>
-          </a:bodyPr>
-          <a:lstStyle/>
-          <a:p>
-            <a:pPr indent="0" lvl="0" marL="0" rtl="0" algn="l">
-              <a:spcBef>
-                <a:spcPts val="0"/>
-              </a:spcBef>
-              <a:spcAft>
-                <a:spcPts val="0"/>
-              </a:spcAft>
-              <a:buNone/>
-            </a:pPr>
-            <a:r>
-              <a:t/>
-            </a:r>
-            <a:endParaRPr/>
-          </a:p>
-        </p:txBody>
-      </p:sp>
-      <p:sp>
-        <p:nvSpPr>
-          <p:cNvPr id="43" name="Google Shape;43;p4"/>
-          <p:cNvSpPr/>
-          <p:nvPr/>
-        </p:nvSpPr>
-        <p:spPr>
-          <a:xfrm>
-            <a:off x="841248" y="2304288"/>
-            <a:ext cx="640080" cy="640080"/>
-          </a:xfrm>
-          <a:prstGeom prst="roundRect">
-            <a:avLst>
-              <a:gd fmla="val 28000" name="adj"/>
-            </a:avLst>
-          </a:prstGeom>
-          <a:solidFill>
-            <a:srgbClr val="3E4BA0"/>
-          </a:solidFill>
-          <a:ln>
-            <a:noFill/>
-          </a:ln>
-        </p:spPr>
-        <p:txBody>
-          <a:bodyPr anchorCtr="0" anchor="ctr" bIns="91425" lIns="91425" spcFirstLastPara="1" rIns="91425" wrap="square" tIns="91425">
-            <a:noAutofit/>
-          </a:bodyPr>
-          <a:lstStyle/>
-          <a:p>
-            <a:pPr indent="0" lvl="0" marL="0" rtl="0" algn="l">
-              <a:spcBef>
-                <a:spcPts val="0"/>
-              </a:spcBef>
-              <a:spcAft>
-                <a:spcPts val="0"/>
-              </a:spcAft>
-              <a:buNone/>
-            </a:pPr>
-            <a:r>
-              <a:t/>
-            </a:r>
-            <a:endParaRPr/>
-          </a:p>
-        </p:txBody>
-      </p:sp>
-      <p:pic>
-        <p:nvPicPr>
-          <p:cNvPr descr="preencoded.png" id="44" name="Google Shape;44;p4"/>
-          <p:cNvPicPr preferRelativeResize="0"/>
-          <p:nvPr/>
-        </p:nvPicPr>
-        <p:blipFill rotWithShape="1">
-          <a:blip r:embed="rId2">
-            <a:alphaModFix/>
-          </a:blip>
-          <a:srcRect b="0" l="0" r="0" t="0"/>
-          <a:stretch/>
-        </p:blipFill>
-        <p:spPr>
-          <a:xfrm>
-            <a:off x="985266" y="2448306"/>
-            <a:ext cx="352044" cy="352044"/>
-          </a:xfrm>
-          <a:prstGeom prst="rect">
-            <a:avLst/>
-          </a:prstGeom>
-          <a:noFill/>
-          <a:ln>
-            <a:noFill/>
-          </a:ln>
-        </p:spPr>
-      </p:pic>
-      <p:sp>
-        <p:nvSpPr>
-          <p:cNvPr id="45" name="Google Shape;45;p4"/>
-          <p:cNvSpPr/>
-          <p:nvPr/>
-        </p:nvSpPr>
-        <p:spPr>
-          <a:xfrm>
-            <a:off x="841248" y="3090672"/>
-            <a:ext cx="2956560" cy="457200"/>
-          </a:xfrm>
-          <a:prstGeom prst="rect">
-            <a:avLst/>
-          </a:prstGeom>
-          <a:noFill/>
-          <a:ln>
-            <a:noFill/>
-          </a:ln>
-        </p:spPr>
-        <p:txBody>
-          <a:bodyPr anchorCtr="0" anchor="ctr" bIns="0" lIns="0" spcFirstLastPara="1" rIns="0" wrap="square" tIns="0">
-            <a:noAutofit/>
-          </a:bodyPr>
-          <a:lstStyle/>
-          <a:p>
-            <a:pPr indent="0" lvl="0" marL="0" marR="0" rtl="0" algn="l">
-              <a:spcBef>
-                <a:spcPts val="0"/>
-              </a:spcBef>
-              <a:spcAft>
-                <a:spcPts val="0"/>
-              </a:spcAft>
-              <a:buClr>
-                <a:srgbClr val="20223F"/>
-              </a:buClr>
-              <a:buSzPts val="1600"/>
-              <a:buFont typeface="Arial"/>
-              <a:buNone/>
-            </a:pPr>
-            <a:r>
-              <a:rPr b="1" i="0" lang="en-US" sz="1600" u="none" cap="none" strike="noStrike">
-                <a:solidFill>
-                  <a:srgbClr val="20223F"/>
-                </a:solidFill>
-                <a:latin typeface="Arial"/>
-                <a:ea typeface="Arial"/>
-                <a:cs typeface="Arial"/>
-                <a:sym typeface="Arial"/>
-              </a:rPr>
-              <a:t>強み・NGを共有</a:t>
-            </a:r>
-            <a:endParaRPr b="0" i="0" sz="1600" u="none" cap="none" strike="noStrike">
-              <a:solidFill>
-                <a:schemeClr val="dk1"/>
-              </a:solidFill>
-              <a:latin typeface="Calibri"/>
-              <a:ea typeface="Calibri"/>
-              <a:cs typeface="Calibri"/>
-              <a:sym typeface="Calibri"/>
-            </a:endParaRPr>
-          </a:p>
-        </p:txBody>
-      </p:sp>
-      <p:sp>
-        <p:nvSpPr>
-          <p:cNvPr id="46" name="Google Shape;46;p4"/>
-          <p:cNvSpPr/>
-          <p:nvPr/>
-        </p:nvSpPr>
-        <p:spPr>
-          <a:xfrm>
-            <a:off x="841248" y="3584448"/>
-            <a:ext cx="2956560" cy="594360"/>
-          </a:xfrm>
-          <a:prstGeom prst="rect">
-            <a:avLst/>
-          </a:prstGeom>
-          <a:noFill/>
-          <a:ln>
-            <a:noFill/>
-          </a:ln>
-        </p:spPr>
-        <p:txBody>
-          <a:bodyPr anchorCtr="0" anchor="ctr" bIns="0" lIns="0" spcFirstLastPara="1" rIns="0" wrap="square" tIns="0">
-            <a:noAutofit/>
-          </a:bodyPr>
-          <a:lstStyle/>
-          <a:p>
-            <a:pPr indent="0" lvl="0" marL="0" marR="0" rtl="0" algn="l">
-              <a:lnSpc>
-                <a:spcPct val="115000"/>
-              </a:lnSpc>
-              <a:spcBef>
-                <a:spcPts val="0"/>
-              </a:spcBef>
-              <a:spcAft>
-                <a:spcPts val="0"/>
-              </a:spcAft>
-              <a:buClr>
-                <a:srgbClr val="6B7280"/>
-              </a:buClr>
-              <a:buSzPts val="1200"/>
-              <a:buFont typeface="Arial"/>
-              <a:buNone/>
-            </a:pPr>
-            <a:r>
-              <a:rPr b="0" i="0" lang="en-US" sz="1200" u="none" cap="none" strike="noStrike">
-                <a:solidFill>
-                  <a:srgbClr val="6B7280"/>
-                </a:solidFill>
-                <a:latin typeface="Arial"/>
-                <a:ea typeface="Arial"/>
-                <a:cs typeface="Arial"/>
-                <a:sym typeface="Arial"/>
-              </a:rPr>
-              <a:t>お店の強み・NG表現・伝えたいことをヒアリング</a:t>
-            </a:r>
-            <a:endParaRPr b="0" i="0" sz="1200" u="none" cap="none" strike="noStrike">
-              <a:solidFill>
-                <a:schemeClr val="dk1"/>
-              </a:solidFill>
-              <a:latin typeface="Calibri"/>
-              <a:ea typeface="Calibri"/>
-              <a:cs typeface="Calibri"/>
-              <a:sym typeface="Calibri"/>
-            </a:endParaRPr>
-          </a:p>
-        </p:txBody>
-      </p:sp>
-      <p:sp>
-        <p:nvSpPr>
-          <p:cNvPr id="47" name="Google Shape;47;p4"/>
-          <p:cNvSpPr/>
-          <p:nvPr/>
-        </p:nvSpPr>
-        <p:spPr>
-          <a:xfrm>
-            <a:off x="4373880" y="2011680"/>
-            <a:ext cx="3505200" cy="2240280"/>
-          </a:xfrm>
-          <a:prstGeom prst="roundRect">
-            <a:avLst>
-              <a:gd fmla="val 4898" name="adj"/>
-            </a:avLst>
-          </a:prstGeom>
-          <a:solidFill>
-            <a:srgbClr val="FFFFFF"/>
-          </a:solidFill>
-          <a:ln cap="flat" cmpd="sng" w="12700">
-            <a:solidFill>
-              <a:srgbClr val="E2E4F0"/>
-            </a:solidFill>
-            <a:prstDash val="solid"/>
-            <a:round/>
-            <a:headEnd len="sm" w="sm" type="none"/>
-            <a:tailEnd len="sm" w="sm" type="none"/>
-          </a:ln>
-          <a:effectLst>
-            <a:outerShdw blurRad="114300" rotWithShape="0" algn="bl" dir="5400000" dist="38100">
-              <a:srgbClr val="232A55">
-                <a:alpha val="12156"/>
-              </a:srgbClr>
-            </a:outerShdw>
-          </a:effectLst>
-        </p:spPr>
-        <p:txBody>
-          <a:bodyPr anchorCtr="0" anchor="ctr" bIns="91425" lIns="91425" spcFirstLastPara="1" rIns="91425" wrap="square" tIns="91425">
-            <a:noAutofit/>
-          </a:bodyPr>
-          <a:lstStyle/>
-          <a:p>
-            <a:pPr indent="0" lvl="0" marL="0" rtl="0" algn="l">
-              <a:spcBef>
-                <a:spcPts val="0"/>
-              </a:spcBef>
-              <a:spcAft>
-                <a:spcPts val="0"/>
-              </a:spcAft>
-              <a:buNone/>
-            </a:pPr>
-            <a:r>
-              <a:t/>
-            </a:r>
-            <a:endParaRPr/>
-          </a:p>
-        </p:txBody>
-      </p:sp>
-      <p:sp>
-        <p:nvSpPr>
-          <p:cNvPr id="48" name="Google Shape;48;p4"/>
-          <p:cNvSpPr/>
-          <p:nvPr/>
-        </p:nvSpPr>
-        <p:spPr>
-          <a:xfrm>
-            <a:off x="4666488" y="2304288"/>
-            <a:ext cx="640080" cy="640080"/>
-          </a:xfrm>
-          <a:prstGeom prst="roundRect">
-            <a:avLst>
-              <a:gd fmla="val 28000" name="adj"/>
-            </a:avLst>
-          </a:prstGeom>
-          <a:solidFill>
-            <a:srgbClr val="F4748A"/>
-          </a:solidFill>
-          <a:ln>
-            <a:noFill/>
-          </a:ln>
-        </p:spPr>
-        <p:txBody>
-          <a:bodyPr anchorCtr="0" anchor="ctr" bIns="91425" lIns="91425" spcFirstLastPara="1" rIns="91425" wrap="square" tIns="91425">
-            <a:noAutofit/>
-          </a:bodyPr>
-          <a:lstStyle/>
-          <a:p>
-            <a:pPr indent="0" lvl="0" marL="0" rtl="0" algn="l">
-              <a:spcBef>
-                <a:spcPts val="0"/>
-              </a:spcBef>
-              <a:spcAft>
-                <a:spcPts val="0"/>
-              </a:spcAft>
-              <a:buNone/>
-            </a:pPr>
-            <a:r>
-              <a:t/>
-            </a:r>
-            <a:endParaRPr/>
-          </a:p>
-        </p:txBody>
-      </p:sp>
-      <p:pic>
-        <p:nvPicPr>
-          <p:cNvPr descr="preencoded.png" id="49" name="Google Shape;49;p4"/>
-          <p:cNvPicPr preferRelativeResize="0"/>
-          <p:nvPr/>
-        </p:nvPicPr>
-        <p:blipFill rotWithShape="1">
-          <a:blip r:embed="rId3">
-            <a:alphaModFix/>
-          </a:blip>
-          <a:srcRect b="0" l="0" r="0" t="0"/>
-          <a:stretch/>
-        </p:blipFill>
-        <p:spPr>
-          <a:xfrm>
-            <a:off x="4810506" y="2448306"/>
-            <a:ext cx="352044" cy="352044"/>
-          </a:xfrm>
-          <a:prstGeom prst="rect">
-            <a:avLst/>
-          </a:prstGeom>
-          <a:noFill/>
-          <a:ln>
-            <a:noFill/>
-          </a:ln>
-        </p:spPr>
-      </p:pic>
-      <p:sp>
-        <p:nvSpPr>
-          <p:cNvPr id="50" name="Google Shape;50;p4"/>
-          <p:cNvSpPr/>
-          <p:nvPr/>
-        </p:nvSpPr>
-        <p:spPr>
-          <a:xfrm>
-            <a:off x="4666488" y="3090672"/>
-            <a:ext cx="2956560" cy="457200"/>
-          </a:xfrm>
-          <a:prstGeom prst="rect">
-            <a:avLst/>
-          </a:prstGeom>
-          <a:noFill/>
-          <a:ln>
-            <a:noFill/>
-          </a:ln>
-        </p:spPr>
-        <p:txBody>
-          <a:bodyPr anchorCtr="0" anchor="ctr" bIns="0" lIns="0" spcFirstLastPara="1" rIns="0" wrap="square" tIns="0">
-            <a:noAutofit/>
-          </a:bodyPr>
-          <a:lstStyle/>
-          <a:p>
-            <a:pPr indent="0" lvl="0" marL="0" marR="0" rtl="0" algn="l">
-              <a:spcBef>
-                <a:spcPts val="0"/>
-              </a:spcBef>
-              <a:spcAft>
-                <a:spcPts val="0"/>
-              </a:spcAft>
-              <a:buClr>
-                <a:srgbClr val="20223F"/>
-              </a:buClr>
-              <a:buSzPts val="1600"/>
-              <a:buFont typeface="Arial"/>
-              <a:buNone/>
-            </a:pPr>
-            <a:r>
-              <a:rPr b="1" i="0" lang="en-US" sz="1600" u="none" cap="none" strike="noStrike">
-                <a:solidFill>
-                  <a:srgbClr val="20223F"/>
-                </a:solidFill>
-                <a:latin typeface="Arial"/>
-                <a:ea typeface="Arial"/>
-                <a:cs typeface="Arial"/>
-                <a:sym typeface="Arial"/>
-              </a:rPr>
-              <a:t>方針を一緒に確定</a:t>
-            </a:r>
-            <a:endParaRPr b="0" i="0" sz="1600" u="none" cap="none" strike="noStrike">
-              <a:solidFill>
-                <a:schemeClr val="dk1"/>
-              </a:solidFill>
-              <a:latin typeface="Calibri"/>
-              <a:ea typeface="Calibri"/>
-              <a:cs typeface="Calibri"/>
-              <a:sym typeface="Calibri"/>
-            </a:endParaRPr>
-          </a:p>
-        </p:txBody>
-      </p:sp>
-      <p:sp>
-        <p:nvSpPr>
-          <p:cNvPr id="51" name="Google Shape;51;p4"/>
-          <p:cNvSpPr/>
-          <p:nvPr/>
-        </p:nvSpPr>
-        <p:spPr>
-          <a:xfrm>
-            <a:off x="4666488" y="3584448"/>
-            <a:ext cx="2956560" cy="594360"/>
-          </a:xfrm>
-          <a:prstGeom prst="rect">
-            <a:avLst/>
-          </a:prstGeom>
-          <a:noFill/>
-          <a:ln>
-            <a:noFill/>
-          </a:ln>
-        </p:spPr>
-        <p:txBody>
-          <a:bodyPr anchorCtr="0" anchor="ctr" bIns="0" lIns="0" spcFirstLastPara="1" rIns="0" wrap="square" tIns="0">
-            <a:noAutofit/>
-          </a:bodyPr>
-          <a:lstStyle/>
-          <a:p>
-            <a:pPr indent="0" lvl="0" marL="0" marR="0" rtl="0" algn="l">
-              <a:lnSpc>
-                <a:spcPct val="115000"/>
-              </a:lnSpc>
-              <a:spcBef>
-                <a:spcPts val="0"/>
-              </a:spcBef>
-              <a:spcAft>
-                <a:spcPts val="0"/>
-              </a:spcAft>
-              <a:buClr>
-                <a:srgbClr val="6B7280"/>
-              </a:buClr>
-              <a:buSzPts val="1200"/>
-              <a:buFont typeface="Arial"/>
-              <a:buNone/>
-            </a:pPr>
-            <a:r>
-              <a:rPr b="0" i="0" lang="en-US" sz="1200" u="none" cap="none" strike="noStrike">
-                <a:solidFill>
-                  <a:srgbClr val="6B7280"/>
-                </a:solidFill>
-                <a:latin typeface="Arial"/>
-                <a:ea typeface="Arial"/>
-                <a:cs typeface="Arial"/>
-                <a:sym typeface="Arial"/>
-              </a:rPr>
-              <a:t>投稿のテーマ方針、口コミへの向き合い方を確定</a:t>
-            </a:r>
-            <a:endParaRPr b="0" i="0" sz="1200" u="none" cap="none" strike="noStrike">
-              <a:solidFill>
-                <a:schemeClr val="dk1"/>
-              </a:solidFill>
-              <a:latin typeface="Calibri"/>
-              <a:ea typeface="Calibri"/>
-              <a:cs typeface="Calibri"/>
-              <a:sym typeface="Calibri"/>
-            </a:endParaRPr>
-          </a:p>
-        </p:txBody>
-      </p:sp>
-      <p:sp>
-        <p:nvSpPr>
-          <p:cNvPr id="52" name="Google Shape;52;p4"/>
-          <p:cNvSpPr/>
-          <p:nvPr/>
-        </p:nvSpPr>
-        <p:spPr>
-          <a:xfrm>
-            <a:off x="8061960" y="2011680"/>
-            <a:ext cx="3505200" cy="2240280"/>
-          </a:xfrm>
-          <a:prstGeom prst="roundRect">
-            <a:avLst>
-              <a:gd fmla="val 4898" name="adj"/>
-            </a:avLst>
-          </a:prstGeom>
-          <a:solidFill>
-            <a:srgbClr val="FFFFFF"/>
-          </a:solidFill>
-          <a:ln cap="flat" cmpd="sng" w="12700">
-            <a:solidFill>
-              <a:srgbClr val="E2E4F0"/>
-            </a:solidFill>
-            <a:prstDash val="solid"/>
-            <a:round/>
-            <a:headEnd len="sm" w="sm" type="none"/>
-            <a:tailEnd len="sm" w="sm" type="none"/>
-          </a:ln>
-          <a:effectLst>
-            <a:outerShdw blurRad="114300" rotWithShape="0" algn="bl" dir="5400000" dist="38100">
-              <a:srgbClr val="232A55">
-                <a:alpha val="12156"/>
-              </a:srgbClr>
-            </a:outerShdw>
-          </a:effectLst>
-        </p:spPr>
-        <p:txBody>
-          <a:bodyPr anchorCtr="0" anchor="ctr" bIns="91425" lIns="91425" spcFirstLastPara="1" rIns="91425" wrap="square" tIns="91425">
-            <a:noAutofit/>
-          </a:bodyPr>
-          <a:lstStyle/>
-          <a:p>
-            <a:pPr indent="0" lvl="0" marL="0" rtl="0" algn="l">
-              <a:spcBef>
-                <a:spcPts val="0"/>
-              </a:spcBef>
-              <a:spcAft>
-                <a:spcPts val="0"/>
-              </a:spcAft>
-              <a:buNone/>
-            </a:pPr>
-            <a:r>
-              <a:t/>
-            </a:r>
-            <a:endParaRPr/>
-          </a:p>
-        </p:txBody>
-      </p:sp>
-      <p:sp>
-        <p:nvSpPr>
-          <p:cNvPr id="53" name="Google Shape;53;p4"/>
-          <p:cNvSpPr/>
-          <p:nvPr/>
-        </p:nvSpPr>
-        <p:spPr>
-          <a:xfrm>
-            <a:off x="8354568" y="2304288"/>
-            <a:ext cx="640080" cy="640080"/>
-          </a:xfrm>
-          <a:prstGeom prst="roundRect">
-            <a:avLst>
-              <a:gd fmla="val 28000" name="adj"/>
-            </a:avLst>
-          </a:prstGeom>
-          <a:solidFill>
-            <a:srgbClr val="10987A"/>
-          </a:solidFill>
-          <a:ln>
-            <a:noFill/>
-          </a:ln>
-        </p:spPr>
-        <p:txBody>
-          <a:bodyPr anchorCtr="0" anchor="ctr" bIns="91425" lIns="91425" spcFirstLastPara="1" rIns="91425" wrap="square" tIns="91425">
-            <a:noAutofit/>
-          </a:bodyPr>
-          <a:lstStyle/>
-          <a:p>
-            <a:pPr indent="0" lvl="0" marL="0" rtl="0" algn="l">
-              <a:spcBef>
-                <a:spcPts val="0"/>
-              </a:spcBef>
-              <a:spcAft>
-                <a:spcPts val="0"/>
-              </a:spcAft>
-              <a:buNone/>
-            </a:pPr>
-            <a:r>
-              <a:t/>
-            </a:r>
-            <a:endParaRPr/>
-          </a:p>
-        </p:txBody>
-      </p:sp>
-      <p:pic>
-        <p:nvPicPr>
-          <p:cNvPr descr="preencoded.png" id="54" name="Google Shape;54;p4"/>
-          <p:cNvPicPr preferRelativeResize="0"/>
-          <p:nvPr/>
-        </p:nvPicPr>
-        <p:blipFill rotWithShape="1">
-          <a:blip r:embed="rId4">
-            <a:alphaModFix/>
-          </a:blip>
-          <a:srcRect b="0" l="0" r="0" t="0"/>
-          <a:stretch/>
-        </p:blipFill>
-        <p:spPr>
-          <a:xfrm>
-            <a:off x="8498586" y="2448306"/>
-            <a:ext cx="352044" cy="352044"/>
-          </a:xfrm>
-          <a:prstGeom prst="rect">
-            <a:avLst/>
-          </a:prstGeom>
-          <a:noFill/>
-          <a:ln>
-            <a:noFill/>
-          </a:ln>
-        </p:spPr>
-      </p:pic>
-      <p:sp>
-        <p:nvSpPr>
-          <p:cNvPr id="55" name="Google Shape;55;p4"/>
-          <p:cNvSpPr/>
-          <p:nvPr/>
-        </p:nvSpPr>
-        <p:spPr>
-          <a:xfrm>
-            <a:off x="8354568" y="3090672"/>
-            <a:ext cx="2956560" cy="457200"/>
-          </a:xfrm>
-          <a:prstGeom prst="rect">
-            <a:avLst/>
-          </a:prstGeom>
-          <a:noFill/>
-          <a:ln>
-            <a:noFill/>
-          </a:ln>
-        </p:spPr>
-        <p:txBody>
-          <a:bodyPr anchorCtr="0" anchor="ctr" bIns="0" lIns="0" spcFirstLastPara="1" rIns="0" wrap="square" tIns="0">
-            <a:noAutofit/>
-          </a:bodyPr>
-          <a:lstStyle/>
-          <a:p>
-            <a:pPr indent="0" lvl="0" marL="0" marR="0" rtl="0" algn="l">
-              <a:spcBef>
-                <a:spcPts val="0"/>
-              </a:spcBef>
-              <a:spcAft>
-                <a:spcPts val="0"/>
-              </a:spcAft>
-              <a:buClr>
-                <a:srgbClr val="20223F"/>
-              </a:buClr>
-              <a:buSzPts val="1600"/>
-              <a:buFont typeface="Arial"/>
-              <a:buNone/>
-            </a:pPr>
-            <a:r>
-              <a:rPr b="1" i="0" lang="en-US" sz="1600" u="none" cap="none" strike="noStrike">
-                <a:solidFill>
-                  <a:srgbClr val="20223F"/>
-                </a:solidFill>
-                <a:latin typeface="Arial"/>
-                <a:ea typeface="Arial"/>
-                <a:cs typeface="Arial"/>
-                <a:sym typeface="Arial"/>
-              </a:rPr>
-              <a:t>以後は自動で回る</a:t>
-            </a:r>
-            <a:endParaRPr b="0" i="0" sz="1600" u="none" cap="none" strike="noStrike">
-              <a:solidFill>
-                <a:schemeClr val="dk1"/>
-              </a:solidFill>
-              <a:latin typeface="Calibri"/>
-              <a:ea typeface="Calibri"/>
-              <a:cs typeface="Calibri"/>
-              <a:sym typeface="Calibri"/>
-            </a:endParaRPr>
-          </a:p>
-        </p:txBody>
-      </p:sp>
-      <p:sp>
-        <p:nvSpPr>
-          <p:cNvPr id="56" name="Google Shape;56;p4"/>
-          <p:cNvSpPr/>
-          <p:nvPr/>
-        </p:nvSpPr>
-        <p:spPr>
-          <a:xfrm>
-            <a:off x="8354568" y="3584448"/>
-            <a:ext cx="2956560" cy="594360"/>
-          </a:xfrm>
-          <a:prstGeom prst="rect">
-            <a:avLst/>
-          </a:prstGeom>
-          <a:noFill/>
-          <a:ln>
-            <a:noFill/>
-          </a:ln>
-        </p:spPr>
-        <p:txBody>
-          <a:bodyPr anchorCtr="0" anchor="ctr" bIns="0" lIns="0" spcFirstLastPara="1" rIns="0" wrap="square" tIns="0">
-            <a:noAutofit/>
-          </a:bodyPr>
-          <a:lstStyle/>
-          <a:p>
-            <a:pPr indent="0" lvl="0" marL="0" marR="0" rtl="0" algn="l">
-              <a:lnSpc>
-                <a:spcPct val="115000"/>
-              </a:lnSpc>
-              <a:spcBef>
-                <a:spcPts val="0"/>
-              </a:spcBef>
-              <a:spcAft>
-                <a:spcPts val="0"/>
-              </a:spcAft>
-              <a:buClr>
-                <a:srgbClr val="6B7280"/>
-              </a:buClr>
-              <a:buSzPts val="1200"/>
-              <a:buFont typeface="Arial"/>
-              <a:buNone/>
-            </a:pPr>
-            <a:r>
-              <a:rPr b="0" i="0" lang="en-US" sz="1200" u="none" cap="none" strike="noStrike">
-                <a:solidFill>
-                  <a:srgbClr val="6B7280"/>
-                </a:solidFill>
-                <a:latin typeface="Arial"/>
-                <a:ea typeface="Arial"/>
-                <a:cs typeface="Arial"/>
-                <a:sym typeface="Arial"/>
-              </a:rPr>
-              <a:t>決めた“方針”の中で、毎月の運用が自動的に回ります</a:t>
-            </a:r>
-            <a:endParaRPr b="0" i="0" sz="1200" u="none" cap="none" strike="noStrike">
-              <a:solidFill>
-                <a:schemeClr val="dk1"/>
-              </a:solidFill>
-              <a:latin typeface="Calibri"/>
-              <a:ea typeface="Calibri"/>
-              <a:cs typeface="Calibri"/>
-              <a:sym typeface="Calibri"/>
-            </a:endParaRPr>
-          </a:p>
-        </p:txBody>
-      </p:sp>
-      <p:sp>
-        <p:nvSpPr>
-          <p:cNvPr id="57" name="Google Shape;57;p4"/>
-          <p:cNvSpPr/>
-          <p:nvPr/>
-        </p:nvSpPr>
-        <p:spPr>
-          <a:xfrm>
-            <a:off x="548640" y="4617720"/>
-            <a:ext cx="11064240" cy="914400"/>
-          </a:xfrm>
-          <a:prstGeom prst="roundRect">
-            <a:avLst>
-              <a:gd fmla="val 10000" name="adj"/>
-            </a:avLst>
-          </a:prstGeom>
-          <a:solidFill>
-            <a:srgbClr val="ECEEF8"/>
-          </a:solidFill>
-          <a:ln>
-            <a:noFill/>
-          </a:ln>
-        </p:spPr>
-        <p:txBody>
-          <a:bodyPr anchorCtr="0" anchor="ctr" bIns="91425" lIns="91425" spcFirstLastPara="1" rIns="91425" wrap="square" tIns="91425">
-            <a:noAutofit/>
-          </a:bodyPr>
-          <a:lstStyle/>
-          <a:p>
-            <a:pPr indent="0" lvl="0" marL="0" rtl="0" algn="l">
-              <a:spcBef>
-                <a:spcPts val="0"/>
-              </a:spcBef>
-              <a:spcAft>
-                <a:spcPts val="0"/>
-              </a:spcAft>
-              <a:buNone/>
-            </a:pPr>
-            <a:r>
-              <a:t/>
-            </a:r>
-            <a:endParaRPr/>
-          </a:p>
-        </p:txBody>
-      </p:sp>
-      <p:sp>
-        <p:nvSpPr>
-          <p:cNvPr id="58" name="Google Shape;58;p4"/>
-          <p:cNvSpPr/>
-          <p:nvPr/>
-        </p:nvSpPr>
-        <p:spPr>
-          <a:xfrm>
-            <a:off x="960120" y="4617720"/>
-            <a:ext cx="10241280" cy="914400"/>
-          </a:xfrm>
-          <a:prstGeom prst="rect">
-            <a:avLst/>
-          </a:prstGeom>
-          <a:noFill/>
-          <a:ln>
-            <a:noFill/>
-          </a:ln>
-        </p:spPr>
-        <p:txBody>
-          <a:bodyPr anchorCtr="0" anchor="ctr" bIns="0" lIns="0" spcFirstLastPara="1" rIns="0" wrap="square" tIns="0">
-            <a:noAutofit/>
-          </a:bodyPr>
-          <a:lstStyle/>
-          <a:p>
-            <a:pPr indent="0" lvl="0" marL="0" marR="0" rtl="0" algn="l">
-              <a:lnSpc>
-                <a:spcPct val="120000"/>
-              </a:lnSpc>
-              <a:spcBef>
-                <a:spcPts val="0"/>
-              </a:spcBef>
-              <a:spcAft>
-                <a:spcPts val="0"/>
-              </a:spcAft>
-              <a:buClr>
-                <a:srgbClr val="3E4BA0"/>
-              </a:buClr>
-              <a:buSzPts val="1500"/>
-              <a:buFont typeface="Arial"/>
-              <a:buNone/>
-            </a:pPr>
-            <a:r>
-              <a:rPr b="1" i="0" lang="en-US" sz="1500" u="none" cap="none" strike="noStrike">
-                <a:solidFill>
-                  <a:srgbClr val="3E4BA0"/>
-                </a:solidFill>
-                <a:latin typeface="Arial"/>
-                <a:ea typeface="Arial"/>
-                <a:cs typeface="Arial"/>
-                <a:sym typeface="Arial"/>
-              </a:rPr>
-              <a:t>丸投げでも、あなたの意図からズレない。最初にきちんと握るから、毎月の確認は最小限で済みます。</a:t>
-            </a:r>
-            <a:endParaRPr b="0" i="0" sz="1500" u="none" cap="none" strike="noStrike">
-              <a:solidFill>
-                <a:schemeClr val="dk1"/>
-              </a:solidFill>
-              <a:latin typeface="Calibri"/>
-              <a:ea typeface="Calibri"/>
-              <a:cs typeface="Calibri"/>
-              <a:sym typeface="Calibri"/>
-            </a:endParaRPr>
-          </a:p>
-        </p:txBody>
-      </p:sp>
-      <p:sp>
-        <p:nvSpPr>
-          <p:cNvPr id="59" name="Google Shape;59;p4"/>
-          <p:cNvSpPr/>
-          <p:nvPr/>
-        </p:nvSpPr>
-        <p:spPr>
-          <a:xfrm>
-            <a:off x="548640" y="6492240"/>
-            <a:ext cx="11064240" cy="274320"/>
-          </a:xfrm>
-          <a:prstGeom prst="rect">
-            <a:avLst/>
-          </a:prstGeom>
-          <a:noFill/>
-          <a:ln>
-            <a:noFill/>
-          </a:ln>
-        </p:spPr>
-        <p:txBody>
-          <a:bodyPr anchorCtr="0" anchor="ctr" bIns="0" lIns="0" spcFirstLastPara="1" rIns="0" wrap="square" tIns="0">
-            <a:noAutofit/>
-          </a:bodyPr>
-          <a:lstStyle/>
-          <a:p>
-            <a:pPr indent="0" lvl="0" marL="0" marR="0" rtl="0" algn="l">
-              <a:spcBef>
-                <a:spcPts val="0"/>
-              </a:spcBef>
-              <a:spcAft>
-                <a:spcPts val="0"/>
-              </a:spcAft>
-              <a:buClr>
-                <a:srgbClr val="3E4BA0"/>
-              </a:buClr>
-              <a:buSzPts val="900"/>
-              <a:buFont typeface="Arial"/>
-              <a:buNone/>
-            </a:pPr>
-            <a:r>
-              <a:rPr b="1" i="0" lang="en-US" sz="900" u="none" cap="none" strike="noStrike">
-                <a:solidFill>
-                  <a:srgbClr val="3E4BA0"/>
-                </a:solidFill>
-                <a:latin typeface="Arial"/>
-                <a:ea typeface="Arial"/>
-                <a:cs typeface="Arial"/>
-                <a:sym typeface="Arial"/>
-              </a:rPr>
-              <a:t>株式会社みらい編集</a:t>
-            </a:r>
-            <a:r>
-              <a:rPr b="0" i="0" lang="en-US" sz="900" u="none" cap="none" strike="noStrike">
-                <a:solidFill>
-                  <a:srgbClr val="6B7280"/>
-                </a:solidFill>
-                <a:latin typeface="Arial"/>
-                <a:ea typeface="Arial"/>
-                <a:cs typeface="Arial"/>
-                <a:sym typeface="Arial"/>
-              </a:rPr>
-              <a:t>  |  MEO運用支援サービス ご提案</a:t>
-            </a:r>
-            <a:endParaRPr b="0" i="0" sz="900" u="none" cap="none" strike="noStrike">
-              <a:solidFill>
-                <a:schemeClr val="dk1"/>
-              </a:solidFill>
-              <a:latin typeface="Calibri"/>
-              <a:ea typeface="Calibri"/>
-              <a:cs typeface="Calibri"/>
-              <a:sym typeface="Calibri"/>
-            </a:endParaRPr>
-          </a:p>
-        </p:txBody>
-      </p:sp>
-    </p:spTree>
-  </p:cSld>
-  <p:clrMapOvr>
-    <a:masterClrMapping/>
-  </p:clrMapOvr>
-</p:sld>
-</file>
-
-<file path=ppt/slides/slide12.xml><?xml version="1.0" encoding="utf-8"?>
-<p:sld xmlns:a="http://schemas.openxmlformats.org/drawingml/2006/main" xmlns:p="http://schemas.openxmlformats.org/presentationml/2006/main" xmlns:r="http://schemas.openxmlformats.org/officeDocument/2006/relationships">
-  <p:cSld>
-    <p:bg>
-      <p:bgPr>
-        <a:solidFill>
-          <a:srgbClr val="F5F6FB"/>
-        </a:solidFill>
-      </p:bgPr>
-    </p:bg>
-    <p:spTree>
-      <p:nvGrpSpPr>
-        <p:cNvPr id="1" name=""/>
-        <p:cNvGrpSpPr/>
-        <p:nvPr/>
-      </p:nvGrpSpPr>
-      <p:grpSpPr/>
-      <p:sp>
-        <p:nvSpPr>
-          <p:cNvPr id="37" name="Google Shape;37;p4"/>
-          <p:cNvSpPr/>
-          <p:nvPr/>
-        </p:nvSpPr>
-        <p:spPr>
-          <a:xfrm>
-            <a:off x="10149840" y="-1188720"/>
-            <a:ext cx="2926080" cy="2926080"/>
-          </a:xfrm>
-          <a:prstGeom prst="ellipse">
-            <a:avLst/>
-          </a:prstGeom>
-          <a:solidFill>
-            <a:srgbClr val="3E4BA0">
-              <a:alpha val="7843"/>
-            </a:srgbClr>
-          </a:solidFill>
-          <a:ln>
-            <a:noFill/>
-          </a:ln>
-        </p:spPr>
-        <p:txBody>
-          <a:bodyPr anchorCtr="0" anchor="ctr" bIns="91425" lIns="91425" spcFirstLastPara="1" rIns="91425" wrap="square" tIns="91425">
-            <a:noAutofit/>
-          </a:bodyPr>
-          <a:lstStyle/>
-          <a:p>
-            <a:pPr indent="0" lvl="0" marL="0" rtl="0" algn="l">
-              <a:spcBef>
-                <a:spcPts val="0"/>
-              </a:spcBef>
-              <a:spcAft>
-                <a:spcPts val="0"/>
-              </a:spcAft>
-              <a:buNone/>
-            </a:pPr>
-            <a:r>
-              <a:t/>
-            </a:r>
-            <a:endParaRPr/>
-          </a:p>
-        </p:txBody>
-      </p:sp>
-      <p:sp>
-        <p:nvSpPr>
-          <p:cNvPr id="38" name="Google Shape;38;p4"/>
-          <p:cNvSpPr/>
-          <p:nvPr/>
-        </p:nvSpPr>
-        <p:spPr>
-          <a:xfrm>
-            <a:off x="548640" y="411480"/>
-            <a:ext cx="182880" cy="182880"/>
-          </a:xfrm>
-          <a:prstGeom prst="roundRect">
-            <a:avLst>
-              <a:gd fmla="val 25000" name="adj"/>
-            </a:avLst>
-          </a:prstGeom>
-          <a:solidFill>
-            <a:srgbClr val="F4748A"/>
-          </a:solidFill>
-          <a:ln>
-            <a:noFill/>
-          </a:ln>
-        </p:spPr>
-        <p:txBody>
-          <a:bodyPr anchorCtr="0" anchor="ctr" bIns="91425" lIns="91425" spcFirstLastPara="1" rIns="91425" wrap="square" tIns="91425">
-            <a:noAutofit/>
-          </a:bodyPr>
-          <a:lstStyle/>
-          <a:p>
-            <a:pPr indent="0" lvl="0" marL="0" rtl="0" algn="l">
-              <a:spcBef>
-                <a:spcPts val="0"/>
-              </a:spcBef>
-              <a:spcAft>
-                <a:spcPts val="0"/>
-              </a:spcAft>
-              <a:buNone/>
-            </a:pPr>
-            <a:r>
-              <a:t/>
-            </a:r>
-            <a:endParaRPr/>
-          </a:p>
-        </p:txBody>
-      </p:sp>
-      <p:sp>
-        <p:nvSpPr>
-          <p:cNvPr id="39" name="Google Shape;39;p4"/>
-          <p:cNvSpPr/>
-          <p:nvPr/>
-        </p:nvSpPr>
-        <p:spPr>
-          <a:xfrm>
-            <a:off x="841248" y="329184"/>
-            <a:ext cx="10771632" cy="292608"/>
-          </a:xfrm>
-          <a:prstGeom prst="rect">
-            <a:avLst/>
-          </a:prstGeom>
-          <a:noFill/>
-          <a:ln>
-            <a:noFill/>
-          </a:ln>
-        </p:spPr>
-        <p:txBody>
-          <a:bodyPr anchorCtr="0" anchor="ctr" bIns="0" lIns="0" spcFirstLastPara="1" rIns="0" wrap="square" tIns="0">
-            <a:noAutofit/>
-          </a:bodyPr>
-          <a:lstStyle/>
-          <a:p>
-            <a:pPr indent="0" lvl="0" marL="0" marR="0" rtl="0" algn="l">
-              <a:spcBef>
-                <a:spcPts val="0"/>
-              </a:spcBef>
-              <a:spcAft>
-                <a:spcPts val="0"/>
-              </a:spcAft>
-              <a:buClr>
-                <a:srgbClr val="F4748A"/>
-              </a:buClr>
-              <a:buSzPts val="1200"/>
-              <a:buFont typeface="Arial"/>
-              <a:buNone/>
-            </a:pPr>
-            <a:r>
-              <a:rPr b="1" i="0" lang="en-US" sz="1200" u="none" cap="none" strike="noStrike">
-                <a:solidFill>
-                  <a:srgbClr val="F4748A"/>
-                </a:solidFill>
-                <a:latin typeface="Arial"/>
-                <a:ea typeface="Arial"/>
-                <a:cs typeface="Arial"/>
-                <a:sym typeface="Arial"/>
-              </a:rPr>
-              <a:t>OUR HONESTY</a:t>
-            </a:r>
-            <a:endParaRPr b="0" i="0" sz="1200" u="none" cap="none" strike="noStrike">
-              <a:solidFill>
-                <a:schemeClr val="dk1"/>
-              </a:solidFill>
-              <a:latin typeface="Calibri"/>
-              <a:ea typeface="Calibri"/>
-              <a:cs typeface="Calibri"/>
-              <a:sym typeface="Calibri"/>
-            </a:endParaRPr>
-          </a:p>
-        </p:txBody>
-      </p:sp>
-      <p:sp>
-        <p:nvSpPr>
-          <p:cNvPr id="40" name="Google Shape;40;p4"/>
-          <p:cNvSpPr/>
-          <p:nvPr/>
-        </p:nvSpPr>
-        <p:spPr>
-          <a:xfrm>
-            <a:off x="548640" y="603504"/>
-            <a:ext cx="11064240" cy="603504"/>
-          </a:xfrm>
-          <a:prstGeom prst="rect">
-            <a:avLst/>
-          </a:prstGeom>
-          <a:noFill/>
-          <a:ln>
-            <a:noFill/>
-          </a:ln>
-        </p:spPr>
-        <p:txBody>
-          <a:bodyPr anchorCtr="0" anchor="ctr" bIns="0" lIns="0" spcFirstLastPara="1" rIns="0" wrap="square" tIns="0">
-            <a:noAutofit/>
-          </a:bodyPr>
-          <a:lstStyle/>
-          <a:p>
-            <a:pPr indent="0" lvl="0" marL="0" marR="0" rtl="0" algn="l">
-              <a:spcBef>
-                <a:spcPts val="0"/>
-              </a:spcBef>
-              <a:spcAft>
-                <a:spcPts val="0"/>
-              </a:spcAft>
-              <a:buClr>
-                <a:srgbClr val="20223F"/>
-              </a:buClr>
-              <a:buSzPts val="2700"/>
-              <a:buFont typeface="Arial"/>
-              <a:buNone/>
-            </a:pPr>
-            <a:r>
-              <a:rPr b="1" i="0" lang="en-US" sz="2700" u="none" cap="none" strike="noStrike">
-                <a:solidFill>
-                  <a:srgbClr val="20223F"/>
-                </a:solidFill>
-                <a:latin typeface="Arial"/>
-                <a:ea typeface="Arial"/>
-                <a:cs typeface="Arial"/>
-                <a:sym typeface="Arial"/>
-              </a:rPr>
-              <a:t>私たちが「しないこと」を、正直にお伝えします</a:t>
-            </a:r>
-            <a:endParaRPr b="0" i="0" sz="2700" u="none" cap="none" strike="noStrike">
-              <a:solidFill>
-                <a:schemeClr val="dk1"/>
-              </a:solidFill>
-              <a:latin typeface="Calibri"/>
-              <a:ea typeface="Calibri"/>
-              <a:cs typeface="Calibri"/>
-              <a:sym typeface="Calibri"/>
-            </a:endParaRPr>
-          </a:p>
-        </p:txBody>
-      </p:sp>
-      <p:sp>
-        <p:nvSpPr>
-          <p:cNvPr id="41" name="Google Shape;41;p4"/>
-          <p:cNvSpPr/>
-          <p:nvPr/>
-        </p:nvSpPr>
-        <p:spPr>
-          <a:xfrm>
-            <a:off x="548640" y="1325880"/>
-            <a:ext cx="11064240" cy="457200"/>
-          </a:xfrm>
-          <a:prstGeom prst="rect">
-            <a:avLst/>
-          </a:prstGeom>
-          <a:noFill/>
-          <a:ln>
-            <a:noFill/>
-          </a:ln>
-        </p:spPr>
-        <p:txBody>
-          <a:bodyPr anchorCtr="0" anchor="ctr" bIns="0" lIns="0" spcFirstLastPara="1" rIns="0" wrap="square" tIns="0">
-            <a:noAutofit/>
-          </a:bodyPr>
-          <a:lstStyle/>
-          <a:p>
-            <a:pPr indent="0" lvl="0" marL="0" marR="0" rtl="0" algn="l">
-              <a:spcBef>
-                <a:spcPts val="0"/>
-              </a:spcBef>
-              <a:spcAft>
-                <a:spcPts val="0"/>
-              </a:spcAft>
-              <a:buClr>
-                <a:srgbClr val="20223F"/>
-              </a:buClr>
-              <a:buSzPts val="1400"/>
-              <a:buFont typeface="Arial"/>
-              <a:buNone/>
-            </a:pPr>
-            <a:r>
-              <a:rPr b="0" i="0" lang="en-US" sz="1400" u="none" cap="none" strike="noStrike">
-                <a:solidFill>
-                  <a:srgbClr val="20223F"/>
-                </a:solidFill>
-                <a:latin typeface="Arial"/>
-                <a:ea typeface="Arial"/>
-                <a:cs typeface="Arial"/>
-                <a:sym typeface="Arial"/>
-              </a:rPr>
-              <a:t>できることだけでなく、できない・やらないことも先にお伝えします。それが、あなたの口コミ資産を守ります。</a:t>
-            </a:r>
-            <a:endParaRPr b="0" i="0" sz="1400" u="none" cap="none" strike="noStrike">
-              <a:solidFill>
-                <a:schemeClr val="dk1"/>
-              </a:solidFill>
-              <a:latin typeface="Calibri"/>
-              <a:ea typeface="Calibri"/>
-              <a:cs typeface="Calibri"/>
-              <a:sym typeface="Calibri"/>
-            </a:endParaRPr>
-          </a:p>
-        </p:txBody>
-      </p:sp>
-      <p:sp>
-        <p:nvSpPr>
-          <p:cNvPr id="42" name="Google Shape;42;p4"/>
-          <p:cNvSpPr/>
-          <p:nvPr/>
-        </p:nvSpPr>
-        <p:spPr>
-          <a:xfrm>
-            <a:off x="548640" y="2011680"/>
-            <a:ext cx="3505200" cy="2240280"/>
-          </a:xfrm>
-          <a:prstGeom prst="roundRect">
-            <a:avLst>
-              <a:gd fmla="val 4898" name="adj"/>
-            </a:avLst>
-          </a:prstGeom>
-          <a:solidFill>
-            <a:srgbClr val="FFFFFF"/>
-          </a:solidFill>
-          <a:ln cap="flat" cmpd="sng" w="12700">
-            <a:solidFill>
-              <a:srgbClr val="E2E4F0"/>
-            </a:solidFill>
-            <a:prstDash val="solid"/>
-            <a:round/>
-            <a:headEnd len="sm" w="sm" type="none"/>
-            <a:tailEnd len="sm" w="sm" type="none"/>
-          </a:ln>
-          <a:effectLst>
-            <a:outerShdw blurRad="114300" rotWithShape="0" algn="bl" dir="5400000" dist="38100">
-              <a:srgbClr val="232A55">
-                <a:alpha val="12156"/>
-              </a:srgbClr>
-            </a:outerShdw>
-          </a:effectLst>
-        </p:spPr>
-        <p:txBody>
-          <a:bodyPr anchorCtr="0" anchor="ctr" bIns="91425" lIns="91425" spcFirstLastPara="1" rIns="91425" wrap="square" tIns="91425">
-            <a:noAutofit/>
-          </a:bodyPr>
-          <a:lstStyle/>
-          <a:p>
-            <a:pPr indent="0" lvl="0" marL="0" rtl="0" algn="l">
-              <a:spcBef>
-                <a:spcPts val="0"/>
-              </a:spcBef>
-              <a:spcAft>
-                <a:spcPts val="0"/>
-              </a:spcAft>
-              <a:buNone/>
-            </a:pPr>
-            <a:r>
-              <a:t/>
-            </a:r>
-            <a:endParaRPr/>
-          </a:p>
-        </p:txBody>
-      </p:sp>
-      <p:sp>
-        <p:nvSpPr>
-          <p:cNvPr id="43" name="Google Shape;43;p4"/>
-          <p:cNvSpPr/>
-          <p:nvPr/>
-        </p:nvSpPr>
-        <p:spPr>
-          <a:xfrm>
-            <a:off x="841248" y="2304288"/>
-            <a:ext cx="640080" cy="640080"/>
-          </a:xfrm>
-          <a:prstGeom prst="roundRect">
-            <a:avLst>
-              <a:gd fmla="val 28000" name="adj"/>
-            </a:avLst>
-          </a:prstGeom>
-          <a:solidFill>
-            <a:srgbClr val="3E4BA0"/>
-          </a:solidFill>
-          <a:ln>
-            <a:noFill/>
-          </a:ln>
-        </p:spPr>
-        <p:txBody>
-          <a:bodyPr anchorCtr="0" anchor="ctr" bIns="91425" lIns="91425" spcFirstLastPara="1" rIns="91425" wrap="square" tIns="91425">
-            <a:noAutofit/>
-          </a:bodyPr>
-          <a:lstStyle/>
-          <a:p>
-            <a:pPr indent="0" lvl="0" marL="0" rtl="0" algn="l">
-              <a:spcBef>
-                <a:spcPts val="0"/>
-              </a:spcBef>
-              <a:spcAft>
-                <a:spcPts val="0"/>
-              </a:spcAft>
-              <a:buNone/>
-            </a:pPr>
-            <a:r>
-              <a:t/>
-            </a:r>
-            <a:endParaRPr/>
-          </a:p>
-        </p:txBody>
-      </p:sp>
-      <p:pic>
-        <p:nvPicPr>
-          <p:cNvPr descr="preencoded.png" id="44" name="Google Shape;44;p4"/>
-          <p:cNvPicPr preferRelativeResize="0"/>
-          <p:nvPr/>
-        </p:nvPicPr>
-        <p:blipFill rotWithShape="1">
-          <a:blip r:embed="rId2">
-            <a:alphaModFix/>
-          </a:blip>
-          <a:srcRect b="0" l="0" r="0" t="0"/>
-          <a:stretch/>
-        </p:blipFill>
-        <p:spPr>
-          <a:xfrm>
-            <a:off x="985266" y="2448306"/>
-            <a:ext cx="352044" cy="352044"/>
-          </a:xfrm>
-          <a:prstGeom prst="rect">
-            <a:avLst/>
-          </a:prstGeom>
-          <a:noFill/>
-          <a:ln>
-            <a:noFill/>
-          </a:ln>
-        </p:spPr>
-      </p:pic>
-      <p:sp>
-        <p:nvSpPr>
-          <p:cNvPr id="45" name="Google Shape;45;p4"/>
-          <p:cNvSpPr/>
-          <p:nvPr/>
-        </p:nvSpPr>
-        <p:spPr>
-          <a:xfrm>
-            <a:off x="841248" y="3090672"/>
-            <a:ext cx="2956560" cy="457200"/>
-          </a:xfrm>
-          <a:prstGeom prst="rect">
-            <a:avLst/>
-          </a:prstGeom>
-          <a:noFill/>
-          <a:ln>
-            <a:noFill/>
-          </a:ln>
-        </p:spPr>
-        <p:txBody>
-          <a:bodyPr anchorCtr="0" anchor="ctr" bIns="0" lIns="0" spcFirstLastPara="1" rIns="0" wrap="square" tIns="0">
-            <a:noAutofit/>
-          </a:bodyPr>
-          <a:lstStyle/>
-          <a:p>
-            <a:pPr indent="0" lvl="0" marL="0" marR="0" rtl="0" algn="l">
-              <a:spcBef>
-                <a:spcPts val="0"/>
-              </a:spcBef>
-              <a:spcAft>
-                <a:spcPts val="0"/>
-              </a:spcAft>
-              <a:buClr>
-                <a:srgbClr val="20223F"/>
-              </a:buClr>
-              <a:buSzPts val="1600"/>
-              <a:buFont typeface="Arial"/>
-              <a:buNone/>
-            </a:pPr>
-            <a:r>
-              <a:rPr b="1" i="0" lang="en-US" sz="1600" u="none" cap="none" strike="noStrike">
-                <a:solidFill>
-                  <a:srgbClr val="20223F"/>
-                </a:solidFill>
-                <a:latin typeface="Arial"/>
-                <a:ea typeface="Arial"/>
-                <a:cs typeface="Arial"/>
-                <a:sym typeface="Arial"/>
-              </a:rPr>
-              <a:t>成果は保証しません</a:t>
-            </a:r>
-            <a:endParaRPr b="0" i="0" sz="1600" u="none" cap="none" strike="noStrike">
-              <a:solidFill>
-                <a:schemeClr val="dk1"/>
-              </a:solidFill>
-              <a:latin typeface="Calibri"/>
-              <a:ea typeface="Calibri"/>
-              <a:cs typeface="Calibri"/>
-              <a:sym typeface="Calibri"/>
-            </a:endParaRPr>
-          </a:p>
-        </p:txBody>
-      </p:sp>
-      <p:sp>
-        <p:nvSpPr>
-          <p:cNvPr id="46" name="Google Shape;46;p4"/>
-          <p:cNvSpPr/>
-          <p:nvPr/>
-        </p:nvSpPr>
-        <p:spPr>
-          <a:xfrm>
-            <a:off x="841248" y="3584448"/>
-            <a:ext cx="2956560" cy="594360"/>
-          </a:xfrm>
-          <a:prstGeom prst="rect">
-            <a:avLst/>
-          </a:prstGeom>
-          <a:noFill/>
-          <a:ln>
-            <a:noFill/>
-          </a:ln>
-        </p:spPr>
-        <p:txBody>
-          <a:bodyPr anchorCtr="0" anchor="ctr" bIns="0" lIns="0" spcFirstLastPara="1" rIns="0" wrap="square" tIns="0">
-            <a:noAutofit/>
-          </a:bodyPr>
-          <a:lstStyle/>
-          <a:p>
-            <a:pPr indent="0" lvl="0" marL="0" marR="0" rtl="0" algn="l">
-              <a:lnSpc>
-                <a:spcPct val="115000"/>
-              </a:lnSpc>
-              <a:spcBef>
-                <a:spcPts val="0"/>
-              </a:spcBef>
-              <a:spcAft>
-                <a:spcPts val="0"/>
-              </a:spcAft>
-              <a:buClr>
-                <a:srgbClr val="6B7280"/>
-              </a:buClr>
-              <a:buSzPts val="1200"/>
-              <a:buFont typeface="Arial"/>
-              <a:buNone/>
-            </a:pPr>
-            <a:r>
-              <a:rPr b="0" i="0" lang="en-US" sz="1200" u="none" cap="none" strike="noStrike">
-                <a:solidFill>
-                  <a:srgbClr val="6B7280"/>
-                </a:solidFill>
-                <a:latin typeface="Arial"/>
-                <a:ea typeface="Arial"/>
-                <a:cs typeface="Arial"/>
-                <a:sym typeface="Arial"/>
-              </a:rPr>
-              <a:t>順位・問い合わせ数・売上の“保証”はしません（Googleの仕組み上、誰にもできません）。数値は毎月正直に開示します。</a:t>
-            </a:r>
-            <a:endParaRPr b="0" i="0" sz="1200" u="none" cap="none" strike="noStrike">
-              <a:solidFill>
-                <a:schemeClr val="dk1"/>
-              </a:solidFill>
-              <a:latin typeface="Calibri"/>
-              <a:ea typeface="Calibri"/>
-              <a:cs typeface="Calibri"/>
-              <a:sym typeface="Calibri"/>
-            </a:endParaRPr>
-          </a:p>
-        </p:txBody>
-      </p:sp>
-      <p:sp>
-        <p:nvSpPr>
-          <p:cNvPr id="47" name="Google Shape;47;p4"/>
-          <p:cNvSpPr/>
-          <p:nvPr/>
-        </p:nvSpPr>
-        <p:spPr>
-          <a:xfrm>
-            <a:off x="4373880" y="2011680"/>
-            <a:ext cx="3505200" cy="2240280"/>
-          </a:xfrm>
-          <a:prstGeom prst="roundRect">
-            <a:avLst>
-              <a:gd fmla="val 4898" name="adj"/>
-            </a:avLst>
-          </a:prstGeom>
-          <a:solidFill>
-            <a:srgbClr val="FFFFFF"/>
-          </a:solidFill>
-          <a:ln cap="flat" cmpd="sng" w="12700">
-            <a:solidFill>
-              <a:srgbClr val="E2E4F0"/>
-            </a:solidFill>
-            <a:prstDash val="solid"/>
-            <a:round/>
-            <a:headEnd len="sm" w="sm" type="none"/>
-            <a:tailEnd len="sm" w="sm" type="none"/>
-          </a:ln>
-          <a:effectLst>
-            <a:outerShdw blurRad="114300" rotWithShape="0" algn="bl" dir="5400000" dist="38100">
-              <a:srgbClr val="232A55">
-                <a:alpha val="12156"/>
-              </a:srgbClr>
-            </a:outerShdw>
-          </a:effectLst>
-        </p:spPr>
-        <p:txBody>
-          <a:bodyPr anchorCtr="0" anchor="ctr" bIns="91425" lIns="91425" spcFirstLastPara="1" rIns="91425" wrap="square" tIns="91425">
-            <a:noAutofit/>
-          </a:bodyPr>
-          <a:lstStyle/>
-          <a:p>
-            <a:pPr indent="0" lvl="0" marL="0" rtl="0" algn="l">
-              <a:spcBef>
-                <a:spcPts val="0"/>
-              </a:spcBef>
-              <a:spcAft>
-                <a:spcPts val="0"/>
-              </a:spcAft>
-              <a:buNone/>
-            </a:pPr>
-            <a:r>
-              <a:t/>
-            </a:r>
-            <a:endParaRPr/>
-          </a:p>
-        </p:txBody>
-      </p:sp>
-      <p:sp>
-        <p:nvSpPr>
-          <p:cNvPr id="48" name="Google Shape;48;p4"/>
-          <p:cNvSpPr/>
-          <p:nvPr/>
-        </p:nvSpPr>
-        <p:spPr>
-          <a:xfrm>
-            <a:off x="4666488" y="2304288"/>
-            <a:ext cx="640080" cy="640080"/>
-          </a:xfrm>
-          <a:prstGeom prst="roundRect">
-            <a:avLst>
-              <a:gd fmla="val 28000" name="adj"/>
-            </a:avLst>
-          </a:prstGeom>
-          <a:solidFill>
-            <a:srgbClr val="F4748A"/>
-          </a:solidFill>
-          <a:ln>
-            <a:noFill/>
-          </a:ln>
-        </p:spPr>
-        <p:txBody>
-          <a:bodyPr anchorCtr="0" anchor="ctr" bIns="91425" lIns="91425" spcFirstLastPara="1" rIns="91425" wrap="square" tIns="91425">
-            <a:noAutofit/>
-          </a:bodyPr>
-          <a:lstStyle/>
-          <a:p>
-            <a:pPr indent="0" lvl="0" marL="0" rtl="0" algn="l">
-              <a:spcBef>
-                <a:spcPts val="0"/>
-              </a:spcBef>
-              <a:spcAft>
-                <a:spcPts val="0"/>
-              </a:spcAft>
-              <a:buNone/>
-            </a:pPr>
-            <a:r>
-              <a:t/>
-            </a:r>
-            <a:endParaRPr/>
-          </a:p>
-        </p:txBody>
-      </p:sp>
-      <p:pic>
-        <p:nvPicPr>
-          <p:cNvPr descr="preencoded.png" id="49" name="Google Shape;49;p4"/>
-          <p:cNvPicPr preferRelativeResize="0"/>
-          <p:nvPr/>
-        </p:nvPicPr>
-        <p:blipFill rotWithShape="1">
-          <a:blip r:embed="rId3">
-            <a:alphaModFix/>
-          </a:blip>
-          <a:srcRect b="0" l="0" r="0" t="0"/>
-          <a:stretch/>
-        </p:blipFill>
-        <p:spPr>
-          <a:xfrm>
-            <a:off x="4810506" y="2448306"/>
-            <a:ext cx="352044" cy="352044"/>
-          </a:xfrm>
-          <a:prstGeom prst="rect">
-            <a:avLst/>
-          </a:prstGeom>
-          <a:noFill/>
-          <a:ln>
-            <a:noFill/>
-          </a:ln>
-        </p:spPr>
-      </p:pic>
-      <p:sp>
-        <p:nvSpPr>
-          <p:cNvPr id="50" name="Google Shape;50;p4"/>
-          <p:cNvSpPr/>
-          <p:nvPr/>
-        </p:nvSpPr>
-        <p:spPr>
-          <a:xfrm>
-            <a:off x="4666488" y="3090672"/>
-            <a:ext cx="2956560" cy="457200"/>
-          </a:xfrm>
-          <a:prstGeom prst="rect">
-            <a:avLst/>
-          </a:prstGeom>
-          <a:noFill/>
-          <a:ln>
-            <a:noFill/>
-          </a:ln>
-        </p:spPr>
-        <p:txBody>
-          <a:bodyPr anchorCtr="0" anchor="ctr" bIns="0" lIns="0" spcFirstLastPara="1" rIns="0" wrap="square" tIns="0">
-            <a:noAutofit/>
-          </a:bodyPr>
-          <a:lstStyle/>
-          <a:p>
-            <a:pPr indent="0" lvl="0" marL="0" marR="0" rtl="0" algn="l">
-              <a:spcBef>
-                <a:spcPts val="0"/>
-              </a:spcBef>
-              <a:spcAft>
-                <a:spcPts val="0"/>
-              </a:spcAft>
-              <a:buClr>
-                <a:srgbClr val="20223F"/>
-              </a:buClr>
-              <a:buSzPts val="1600"/>
-              <a:buFont typeface="Arial"/>
-              <a:buNone/>
-            </a:pPr>
-            <a:r>
-              <a:rPr b="1" i="0" lang="en-US" sz="1600" u="none" cap="none" strike="noStrike">
-                <a:solidFill>
-                  <a:srgbClr val="20223F"/>
-                </a:solidFill>
-                <a:latin typeface="Arial"/>
-                <a:ea typeface="Arial"/>
-                <a:cs typeface="Arial"/>
-                <a:sym typeface="Arial"/>
-              </a:rPr>
-              <a:t>勝手に公開しません</a:t>
-            </a:r>
-            <a:endParaRPr b="0" i="0" sz="1600" u="none" cap="none" strike="noStrike">
-              <a:solidFill>
-                <a:schemeClr val="dk1"/>
-              </a:solidFill>
-              <a:latin typeface="Calibri"/>
-              <a:ea typeface="Calibri"/>
-              <a:cs typeface="Calibri"/>
-              <a:sym typeface="Calibri"/>
-            </a:endParaRPr>
-          </a:p>
-        </p:txBody>
-      </p:sp>
-      <p:sp>
-        <p:nvSpPr>
-          <p:cNvPr id="51" name="Google Shape;51;p4"/>
-          <p:cNvSpPr/>
-          <p:nvPr/>
-        </p:nvSpPr>
-        <p:spPr>
-          <a:xfrm>
-            <a:off x="4666488" y="3584448"/>
-            <a:ext cx="2956560" cy="594360"/>
-          </a:xfrm>
-          <a:prstGeom prst="rect">
-            <a:avLst/>
-          </a:prstGeom>
-          <a:noFill/>
-          <a:ln>
-            <a:noFill/>
-          </a:ln>
-        </p:spPr>
-        <p:txBody>
-          <a:bodyPr anchorCtr="0" anchor="ctr" bIns="0" lIns="0" spcFirstLastPara="1" rIns="0" wrap="square" tIns="0">
-            <a:noAutofit/>
-          </a:bodyPr>
-          <a:lstStyle/>
-          <a:p>
-            <a:pPr indent="0" lvl="0" marL="0" marR="0" rtl="0" algn="l">
-              <a:lnSpc>
-                <a:spcPct val="115000"/>
-              </a:lnSpc>
-              <a:spcBef>
-                <a:spcPts val="0"/>
-              </a:spcBef>
-              <a:spcAft>
-                <a:spcPts val="0"/>
-              </a:spcAft>
-              <a:buClr>
-                <a:srgbClr val="6B7280"/>
-              </a:buClr>
-              <a:buSzPts val="1200"/>
-              <a:buFont typeface="Arial"/>
-              <a:buNone/>
-            </a:pPr>
-            <a:r>
-              <a:rPr b="0" i="0" lang="en-US" sz="1200" u="none" cap="none" strike="noStrike">
-                <a:solidFill>
-                  <a:srgbClr val="6B7280"/>
-                </a:solidFill>
-                <a:latin typeface="Arial"/>
-                <a:ea typeface="Arial"/>
-                <a:cs typeface="Arial"/>
-                <a:sym typeface="Arial"/>
-              </a:rPr>
-              <a:t>AIが下ごしらえし、人が薬機法・表現・トーンを確認してから公開します。</a:t>
-            </a:r>
-            <a:endParaRPr b="0" i="0" sz="1200" u="none" cap="none" strike="noStrike">
-              <a:solidFill>
-                <a:schemeClr val="dk1"/>
-              </a:solidFill>
-              <a:latin typeface="Calibri"/>
-              <a:ea typeface="Calibri"/>
-              <a:cs typeface="Calibri"/>
-              <a:sym typeface="Calibri"/>
-            </a:endParaRPr>
-          </a:p>
-        </p:txBody>
-      </p:sp>
-      <p:sp>
-        <p:nvSpPr>
-          <p:cNvPr id="52" name="Google Shape;52;p4"/>
-          <p:cNvSpPr/>
-          <p:nvPr/>
-        </p:nvSpPr>
-        <p:spPr>
-          <a:xfrm>
-            <a:off x="8061960" y="2011680"/>
-            <a:ext cx="3505200" cy="2240280"/>
-          </a:xfrm>
-          <a:prstGeom prst="roundRect">
-            <a:avLst>
-              <a:gd fmla="val 4898" name="adj"/>
-            </a:avLst>
-          </a:prstGeom>
-          <a:solidFill>
-            <a:srgbClr val="FFFFFF"/>
-          </a:solidFill>
-          <a:ln cap="flat" cmpd="sng" w="12700">
-            <a:solidFill>
-              <a:srgbClr val="E2E4F0"/>
-            </a:solidFill>
-            <a:prstDash val="solid"/>
-            <a:round/>
-            <a:headEnd len="sm" w="sm" type="none"/>
-            <a:tailEnd len="sm" w="sm" type="none"/>
-          </a:ln>
-          <a:effectLst>
-            <a:outerShdw blurRad="114300" rotWithShape="0" algn="bl" dir="5400000" dist="38100">
-              <a:srgbClr val="232A55">
-                <a:alpha val="12156"/>
-              </a:srgbClr>
-            </a:outerShdw>
-          </a:effectLst>
-        </p:spPr>
-        <p:txBody>
-          <a:bodyPr anchorCtr="0" anchor="ctr" bIns="91425" lIns="91425" spcFirstLastPara="1" rIns="91425" wrap="square" tIns="91425">
-            <a:noAutofit/>
-          </a:bodyPr>
-          <a:lstStyle/>
-          <a:p>
-            <a:pPr indent="0" lvl="0" marL="0" rtl="0" algn="l">
-              <a:spcBef>
-                <a:spcPts val="0"/>
-              </a:spcBef>
-              <a:spcAft>
-                <a:spcPts val="0"/>
-              </a:spcAft>
-              <a:buNone/>
-            </a:pPr>
-            <a:r>
-              <a:t/>
-            </a:r>
-            <a:endParaRPr/>
-          </a:p>
-        </p:txBody>
-      </p:sp>
-      <p:sp>
-        <p:nvSpPr>
-          <p:cNvPr id="53" name="Google Shape;53;p4"/>
-          <p:cNvSpPr/>
-          <p:nvPr/>
-        </p:nvSpPr>
-        <p:spPr>
-          <a:xfrm>
-            <a:off x="8354568" y="2304288"/>
-            <a:ext cx="640080" cy="640080"/>
-          </a:xfrm>
-          <a:prstGeom prst="roundRect">
-            <a:avLst>
-              <a:gd fmla="val 28000" name="adj"/>
-            </a:avLst>
-          </a:prstGeom>
-          <a:solidFill>
-            <a:srgbClr val="10987A"/>
-          </a:solidFill>
-          <a:ln>
-            <a:noFill/>
-          </a:ln>
-        </p:spPr>
-        <p:txBody>
-          <a:bodyPr anchorCtr="0" anchor="ctr" bIns="91425" lIns="91425" spcFirstLastPara="1" rIns="91425" wrap="square" tIns="91425">
-            <a:noAutofit/>
-          </a:bodyPr>
-          <a:lstStyle/>
-          <a:p>
-            <a:pPr indent="0" lvl="0" marL="0" rtl="0" algn="l">
-              <a:spcBef>
-                <a:spcPts val="0"/>
-              </a:spcBef>
-              <a:spcAft>
-                <a:spcPts val="0"/>
-              </a:spcAft>
-              <a:buNone/>
-            </a:pPr>
-            <a:r>
-              <a:t/>
-            </a:r>
-            <a:endParaRPr/>
-          </a:p>
-        </p:txBody>
-      </p:sp>
-      <p:pic>
-        <p:nvPicPr>
-          <p:cNvPr descr="preencoded.png" id="54" name="Google Shape;54;p4"/>
-          <p:cNvPicPr preferRelativeResize="0"/>
-          <p:nvPr/>
-        </p:nvPicPr>
-        <p:blipFill rotWithShape="1">
-          <a:blip r:embed="rId4">
-            <a:alphaModFix/>
-          </a:blip>
-          <a:srcRect b="0" l="0" r="0" t="0"/>
-          <a:stretch/>
-        </p:blipFill>
-        <p:spPr>
-          <a:xfrm>
-            <a:off x="8498586" y="2448306"/>
-            <a:ext cx="352044" cy="352044"/>
-          </a:xfrm>
-          <a:prstGeom prst="rect">
-            <a:avLst/>
-          </a:prstGeom>
-          <a:noFill/>
-          <a:ln>
-            <a:noFill/>
-          </a:ln>
-        </p:spPr>
-      </p:pic>
-      <p:sp>
-        <p:nvSpPr>
-          <p:cNvPr id="55" name="Google Shape;55;p4"/>
-          <p:cNvSpPr/>
-          <p:nvPr/>
-        </p:nvSpPr>
-        <p:spPr>
-          <a:xfrm>
-            <a:off x="8354568" y="3090672"/>
-            <a:ext cx="2956560" cy="457200"/>
-          </a:xfrm>
-          <a:prstGeom prst="rect">
-            <a:avLst/>
-          </a:prstGeom>
-          <a:noFill/>
-          <a:ln>
-            <a:noFill/>
-          </a:ln>
-        </p:spPr>
-        <p:txBody>
-          <a:bodyPr anchorCtr="0" anchor="ctr" bIns="0" lIns="0" spcFirstLastPara="1" rIns="0" wrap="square" tIns="0">
-            <a:noAutofit/>
-          </a:bodyPr>
-          <a:lstStyle/>
-          <a:p>
-            <a:pPr indent="0" lvl="0" marL="0" marR="0" rtl="0" algn="l">
-              <a:spcBef>
-                <a:spcPts val="0"/>
-              </a:spcBef>
-              <a:spcAft>
-                <a:spcPts val="0"/>
-              </a:spcAft>
-              <a:buClr>
-                <a:srgbClr val="20223F"/>
-              </a:buClr>
-              <a:buSzPts val="1600"/>
-              <a:buFont typeface="Arial"/>
-              <a:buNone/>
-            </a:pPr>
-            <a:r>
-              <a:rPr b="1" i="0" lang="en-US" sz="1600" u="none" cap="none" strike="noStrike">
-                <a:solidFill>
-                  <a:srgbClr val="20223F"/>
-                </a:solidFill>
-                <a:latin typeface="Arial"/>
-                <a:ea typeface="Arial"/>
-                <a:cs typeface="Arial"/>
-                <a:sym typeface="Arial"/>
-              </a:rPr>
-              <a:t>サクラ・対価はしません</a:t>
-            </a:r>
-            <a:endParaRPr b="0" i="0" sz="1600" u="none" cap="none" strike="noStrike">
-              <a:solidFill>
-                <a:schemeClr val="dk1"/>
-              </a:solidFill>
-              <a:latin typeface="Calibri"/>
-              <a:ea typeface="Calibri"/>
-              <a:cs typeface="Calibri"/>
-              <a:sym typeface="Calibri"/>
-            </a:endParaRPr>
-          </a:p>
-        </p:txBody>
-      </p:sp>
-      <p:sp>
-        <p:nvSpPr>
-          <p:cNvPr id="56" name="Google Shape;56;p4"/>
-          <p:cNvSpPr/>
-          <p:nvPr/>
-        </p:nvSpPr>
-        <p:spPr>
-          <a:xfrm>
-            <a:off x="8354568" y="3584448"/>
-            <a:ext cx="2956560" cy="594360"/>
-          </a:xfrm>
-          <a:prstGeom prst="rect">
-            <a:avLst/>
-          </a:prstGeom>
-          <a:noFill/>
-          <a:ln>
-            <a:noFill/>
-          </a:ln>
-        </p:spPr>
-        <p:txBody>
-          <a:bodyPr anchorCtr="0" anchor="ctr" bIns="0" lIns="0" spcFirstLastPara="1" rIns="0" wrap="square" tIns="0">
-            <a:noAutofit/>
-          </a:bodyPr>
-          <a:lstStyle/>
-          <a:p>
-            <a:pPr indent="0" lvl="0" marL="0" marR="0" rtl="0" algn="l">
-              <a:lnSpc>
-                <a:spcPct val="115000"/>
-              </a:lnSpc>
-              <a:spcBef>
-                <a:spcPts val="0"/>
-              </a:spcBef>
-              <a:spcAft>
-                <a:spcPts val="0"/>
-              </a:spcAft>
-              <a:buClr>
-                <a:srgbClr val="6B7280"/>
-              </a:buClr>
-              <a:buSzPts val="1200"/>
-              <a:buFont typeface="Arial"/>
-              <a:buNone/>
-            </a:pPr>
-            <a:r>
-              <a:rPr b="0" i="0" lang="en-US" sz="1200" u="none" cap="none" strike="noStrike">
-                <a:solidFill>
-                  <a:srgbClr val="6B7280"/>
-                </a:solidFill>
-                <a:latin typeface="Arial"/>
-                <a:ea typeface="Arial"/>
-                <a:cs typeface="Arial"/>
-                <a:sym typeface="Arial"/>
-              </a:rPr>
-              <a:t>ご希望でも、対価と引き換えの口コミは一切行いません。それが2026年のポリシー厳格化からあなたの資産を守る方法です。</a:t>
-            </a:r>
-            <a:endParaRPr b="0" i="0" sz="1200" u="none" cap="none" strike="noStrike">
-              <a:solidFill>
-                <a:schemeClr val="dk1"/>
-              </a:solidFill>
-              <a:latin typeface="Calibri"/>
-              <a:ea typeface="Calibri"/>
-              <a:cs typeface="Calibri"/>
-              <a:sym typeface="Calibri"/>
-            </a:endParaRPr>
-          </a:p>
-        </p:txBody>
-      </p:sp>
-      <p:sp>
-        <p:nvSpPr>
-          <p:cNvPr id="57" name="Google Shape;57;p4"/>
-          <p:cNvSpPr/>
-          <p:nvPr/>
-        </p:nvSpPr>
-        <p:spPr>
-          <a:xfrm>
-            <a:off x="548640" y="4617720"/>
-            <a:ext cx="11064240" cy="914400"/>
-          </a:xfrm>
-          <a:prstGeom prst="roundRect">
-            <a:avLst>
-              <a:gd fmla="val 10000" name="adj"/>
-            </a:avLst>
-          </a:prstGeom>
-          <a:solidFill>
-            <a:srgbClr val="ECEEF8"/>
-          </a:solidFill>
-          <a:ln>
-            <a:noFill/>
-          </a:ln>
-        </p:spPr>
-        <p:txBody>
-          <a:bodyPr anchorCtr="0" anchor="ctr" bIns="91425" lIns="91425" spcFirstLastPara="1" rIns="91425" wrap="square" tIns="91425">
-            <a:noAutofit/>
-          </a:bodyPr>
-          <a:lstStyle/>
-          <a:p>
-            <a:pPr indent="0" lvl="0" marL="0" rtl="0" algn="l">
-              <a:spcBef>
-                <a:spcPts val="0"/>
-              </a:spcBef>
-              <a:spcAft>
-                <a:spcPts val="0"/>
-              </a:spcAft>
-              <a:buNone/>
-            </a:pPr>
-            <a:r>
-              <a:t/>
-            </a:r>
-            <a:endParaRPr/>
-          </a:p>
-        </p:txBody>
-      </p:sp>
-      <p:sp>
-        <p:nvSpPr>
-          <p:cNvPr id="58" name="Google Shape;58;p4"/>
-          <p:cNvSpPr/>
-          <p:nvPr/>
-        </p:nvSpPr>
-        <p:spPr>
-          <a:xfrm>
-            <a:off x="960120" y="4617720"/>
-            <a:ext cx="10241280" cy="914400"/>
-          </a:xfrm>
-          <a:prstGeom prst="rect">
-            <a:avLst/>
-          </a:prstGeom>
-          <a:noFill/>
-          <a:ln>
-            <a:noFill/>
-          </a:ln>
-        </p:spPr>
-        <p:txBody>
-          <a:bodyPr anchorCtr="0" anchor="ctr" bIns="0" lIns="0" spcFirstLastPara="1" rIns="0" wrap="square" tIns="0">
-            <a:noAutofit/>
-          </a:bodyPr>
-          <a:lstStyle/>
-          <a:p>
-            <a:pPr indent="0" lvl="0" marL="0" marR="0" rtl="0" algn="l">
-              <a:lnSpc>
-                <a:spcPct val="120000"/>
-              </a:lnSpc>
-              <a:spcBef>
-                <a:spcPts val="0"/>
-              </a:spcBef>
-              <a:spcAft>
-                <a:spcPts val="0"/>
-              </a:spcAft>
-              <a:buClr>
-                <a:srgbClr val="3E4BA0"/>
-              </a:buClr>
-              <a:buSzPts val="1500"/>
-              <a:buFont typeface="Arial"/>
-              <a:buNone/>
-            </a:pPr>
-            <a:r>
-              <a:rPr b="1" i="0" lang="en-US" sz="1500" u="none" cap="none" strike="noStrike">
-                <a:solidFill>
-                  <a:srgbClr val="3E4BA0"/>
-                </a:solidFill>
-                <a:latin typeface="Arial"/>
-                <a:ea typeface="Arial"/>
-                <a:cs typeface="Arial"/>
-                <a:sym typeface="Arial"/>
-              </a:rPr>
-              <a:t>「しないこと」を正直に守ることが、2026年のポリシー厳格化（違反で全口コミ削除）から、あなたの口コミ資産を守ります。</a:t>
-            </a:r>
-            <a:endParaRPr b="0" i="0" sz="1500" u="none" cap="none" strike="noStrike">
-              <a:solidFill>
-                <a:schemeClr val="dk1"/>
-              </a:solidFill>
-              <a:latin typeface="Calibri"/>
-              <a:ea typeface="Calibri"/>
-              <a:cs typeface="Calibri"/>
-              <a:sym typeface="Calibri"/>
-            </a:endParaRPr>
-          </a:p>
-        </p:txBody>
-      </p:sp>
-      <p:sp>
-        <p:nvSpPr>
-          <p:cNvPr id="59" name="Google Shape;59;p4"/>
-          <p:cNvSpPr/>
-          <p:nvPr/>
-        </p:nvSpPr>
-        <p:spPr>
-          <a:xfrm>
-            <a:off x="548640" y="6492240"/>
-            <a:ext cx="11064240" cy="274320"/>
-          </a:xfrm>
-          <a:prstGeom prst="rect">
-            <a:avLst/>
-          </a:prstGeom>
-          <a:noFill/>
-          <a:ln>
-            <a:noFill/>
-          </a:ln>
-        </p:spPr>
-        <p:txBody>
-          <a:bodyPr anchorCtr="0" anchor="ctr" bIns="0" lIns="0" spcFirstLastPara="1" rIns="0" wrap="square" tIns="0">
-            <a:noAutofit/>
-          </a:bodyPr>
-          <a:lstStyle/>
-          <a:p>
-            <a:pPr indent="0" lvl="0" marL="0" marR="0" rtl="0" algn="l">
-              <a:spcBef>
-                <a:spcPts val="0"/>
-              </a:spcBef>
-              <a:spcAft>
-                <a:spcPts val="0"/>
-              </a:spcAft>
-              <a:buClr>
-                <a:srgbClr val="3E4BA0"/>
-              </a:buClr>
-              <a:buSzPts val="900"/>
-              <a:buFont typeface="Arial"/>
-              <a:buNone/>
-            </a:pPr>
-            <a:r>
-              <a:rPr b="1" i="0" lang="en-US" sz="900" u="none" cap="none" strike="noStrike">
-                <a:solidFill>
-                  <a:srgbClr val="3E4BA0"/>
-                </a:solidFill>
-                <a:latin typeface="Arial"/>
-                <a:ea typeface="Arial"/>
-                <a:cs typeface="Arial"/>
-                <a:sym typeface="Arial"/>
-              </a:rPr>
-              <a:t>株式会社みらい編集</a:t>
-            </a:r>
-            <a:r>
-              <a:rPr b="0" i="0" lang="en-US" sz="900" u="none" cap="none" strike="noStrike">
-                <a:solidFill>
-                  <a:srgbClr val="6B7280"/>
-                </a:solidFill>
-                <a:latin typeface="Arial"/>
-                <a:ea typeface="Arial"/>
-                <a:cs typeface="Arial"/>
-                <a:sym typeface="Arial"/>
-              </a:rPr>
-              <a:t>  |  MEO運用支援サービス ご提案</a:t>
-            </a:r>
-            <a:endParaRPr b="0" i="0" sz="900" u="none" cap="none" strike="noStrike">
-              <a:solidFill>
-                <a:schemeClr val="dk1"/>
-              </a:solidFill>
-              <a:latin typeface="Calibri"/>
-              <a:ea typeface="Calibri"/>
-              <a:cs typeface="Calibri"/>
-              <a:sym typeface="Calibri"/>
-            </a:endParaRPr>
-          </a:p>
-        </p:txBody>
-      </p:sp>
-    </p:spTree>
-  </p:cSld>
-  <p:clrMapOvr>
-    <a:masterClrMapping/>
-  </p:clrMapOvr>
-</p:sld>
-</file>
-
 <file path=ppt/slides/slide2.xml><?xml version="1.0" encoding="utf-8"?>
 <p:sld xmlns:a="http://schemas.openxmlformats.org/drawingml/2006/main" xmlns:r="http://schemas.openxmlformats.org/officeDocument/2006/relationships" xmlns:mc="http://schemas.openxmlformats.org/markup-compatibility/2006" xmlns:mv="urn:schemas-microsoft-com:mac:vml" xmlns:p="http://schemas.openxmlformats.org/presentationml/2006/main" xmlns:c="http://schemas.openxmlformats.org/drawingml/2006/chart" xmlns:dgm="http://schemas.openxmlformats.org/drawingml/2006/diagram" xmlns:o="urn:schemas-microsoft-com:office:office" xmlns:v="urn:schemas-microsoft-com:vml" xmlns:pvml="urn:schemas-microsoft-com:office:powerpoint" xmlns:com="http://schemas.openxmlformats.org/drawingml/2006/compatibility" xmlns:p14="http://schemas.microsoft.com/office/powerpoint/2010/main" xmlns:p15="http://schemas.microsoft.com/office/powerpoint/2012/main" xmlns:ahyp="http://schemas.microsoft.com/office/drawing/2018/hyperlinkcolor">
   <p:cSld>
     <p:bg>
       <p:bgPr>
         <a:solidFill>
-          <a:srgbClr val="F5F6FB"/>
+          <a:srgbClr val="FFFFFF"/>
         </a:solidFill>
       </p:bgPr>
     </p:bg>
@@ -9813,7 +10504,7 @@
                 <a:cs typeface="Arial"/>
                 <a:sym typeface="Arial"/>
               </a:rPr>
-              <a:t>相談に対応してくれそうか？</a:t>
+              <a:t>自分に合っていそうか？</a:t>
             </a:r>
             <a:endParaRPr b="0" i="0" sz="1600" u="none" cap="none" strike="noStrike">
               <a:solidFill>
@@ -9879,7 +10570,7 @@
                 <a:cs typeface="Arial"/>
                 <a:sym typeface="Arial"/>
               </a:rPr>
-              <a:t>サービス内容・説明文・投稿で「自分の相談に合うか」を見られる</a:t>
+              <a:t>サービス内容・説明文・投稿で「自分に合うか」を見られる</a:t>
             </a:r>
             <a:endParaRPr b="0" i="0" sz="1200" u="none" cap="none" strike="noStrike">
               <a:solidFill>
@@ -10249,7 +10940,7 @@
                 <a:cs typeface="Arial"/>
                 <a:sym typeface="Arial"/>
               </a:rPr>
-              <a:t>つまりMEOとは　</a:t>
+              <a:t>つまりMEOとは　見つかった後に「お願いしたい」と思ってもらうための受け皿づくり。広告で生まれた興味を、問い合わせに変える仕事です。</a:t>
             </a:r>
             <a:r>
               <a:rPr b="1" i="0" lang="en-US" sz="1500" u="none" cap="none" strike="noStrike">
@@ -10261,7 +10952,7 @@
                 <a:cs typeface="Arial"/>
                 <a:sym typeface="Arial"/>
               </a:rPr>
-              <a:t>見つかった後に「相談したい」と思ってもらうための受け皿づくり</a:t>
+              <a:t/>
             </a:r>
             <a:r>
               <a:rPr b="0" i="0" lang="en-US" sz="1500" u="none" cap="none" strike="noStrike">
@@ -10273,7 +10964,7 @@
                 <a:cs typeface="Arial"/>
                 <a:sym typeface="Arial"/>
               </a:rPr>
-              <a:t>。広告で生まれた興味を、問い合わせに変える仕事です。</a:t>
+              <a:t/>
             </a:r>
             <a:endParaRPr b="0" i="0" sz="1500" u="none" cap="none" strike="noStrike">
               <a:solidFill>
@@ -10376,7 +11067,7 @@
     <p:bg>
       <p:bgPr>
         <a:solidFill>
-          <a:srgbClr val="F5F6FB"/>
+          <a:srgbClr val="FFFFFF"/>
         </a:solidFill>
       </p:bgPr>
     </p:bg>
@@ -12858,7 +13549,7 @@
     <p:bg>
       <p:bgPr>
         <a:solidFill>
-          <a:srgbClr val="F5F6FB"/>
+          <a:srgbClr val="FFFFFF"/>
         </a:solidFill>
       </p:bgPr>
     </p:bg>
@@ -16205,7 +16896,7 @@
     <p:bg>
       <p:bgPr>
         <a:solidFill>
-          <a:srgbClr val="F5F6FB"/>
+          <a:srgbClr val="FFFFFF"/>
         </a:solidFill>
       </p:bgPr>
     </p:bg>
@@ -17069,7 +17760,7 @@
                 <a:cs typeface="Arial"/>
                 <a:sym typeface="Arial"/>
               </a:rPr>
-              <a:t>外観・相談スペース・スタッフ・リノベ事例で「相談して大丈夫」な印象を</a:t>
+              <a:t>外観・店内・スタッフ・事例写真で「安心できる」印象を</a:t>
             </a:r>
             <a:endParaRPr b="0" i="0" sz="1050" u="none" cap="none" strike="noStrike">
               <a:solidFill>
@@ -17391,7 +18082,7 @@
                 <a:cs typeface="Arial"/>
                 <a:sym typeface="Arial"/>
               </a:rPr>
-              <a:t>相談後・契約後にQRコード・LINEで口コミを依頼する導線を整える</a:t>
+              <a:t>来店後・利用後にQRコード・LINEで口コミを依頼する導線を整える</a:t>
             </a:r>
             <a:endParaRPr b="0" i="0" sz="1050" u="none" cap="none" strike="noStrike">
               <a:solidFill>
@@ -18035,7 +18726,7 @@
                 <a:cs typeface="Arial"/>
                 <a:sym typeface="Arial"/>
               </a:rPr>
-              <a:t>売却・買取・相続・借地権などのテーマで投稿し専門性を継続発信</a:t>
+              <a:t>サービス・季節・お客様の声などのテーマで投稿し専門性を継続発信</a:t>
             </a:r>
             <a:endParaRPr b="0" i="0" sz="1050" u="none" cap="none" strike="noStrike">
               <a:solidFill>
@@ -18523,7 +19214,7 @@
     <p:bg>
       <p:bgPr>
         <a:solidFill>
-          <a:srgbClr val="F5F6FB"/>
+          <a:srgbClr val="FFFFFF"/>
         </a:solidFill>
       </p:bgPr>
     </p:bg>
@@ -21094,7 +21785,7 @@
     <p:bg>
       <p:bgPr>
         <a:solidFill>
-          <a:srgbClr val="F5F6FB"/>
+          <a:srgbClr val="FFFFFF"/>
         </a:solidFill>
       </p:bgPr>
     </p:bg>
@@ -25419,7 +26110,7 @@
     <p:bg>
       <p:bgPr>
         <a:solidFill>
-          <a:srgbClr val="F5F6FB"/>
+          <a:srgbClr val="FFFFFF"/>
         </a:solidFill>
       </p:bgPr>
     </p:bg>
@@ -26169,7 +26860,7 @@
                 <a:cs typeface="Arial"/>
                 <a:sym typeface="Arial"/>
               </a:rPr>
-              <a:t>相談テーマを明確に伝える必要がある</a:t>
+              <a:t>強み・サービスを明確に伝える必要がある</a:t>
             </a:r>
             <a:endParaRPr b="0" i="0" sz="1500" u="none" cap="none" strike="noStrike">
               <a:solidFill>
@@ -26929,32 +27620,25 @@
 </file>
 
 <file path=ppt/slides/slide9.xml><?xml version="1.0" encoding="utf-8"?>
-<p:sld xmlns:a="http://schemas.openxmlformats.org/drawingml/2006/main" xmlns:r="http://schemas.openxmlformats.org/officeDocument/2006/relationships" xmlns:mc="http://schemas.openxmlformats.org/markup-compatibility/2006" xmlns:mv="urn:schemas-microsoft-com:mac:vml" xmlns:p="http://schemas.openxmlformats.org/presentationml/2006/main" xmlns:c="http://schemas.openxmlformats.org/drawingml/2006/chart" xmlns:dgm="http://schemas.openxmlformats.org/drawingml/2006/diagram" xmlns:o="urn:schemas-microsoft-com:office:office" xmlns:v="urn:schemas-microsoft-com:vml" xmlns:pvml="urn:schemas-microsoft-com:office:powerpoint" xmlns:com="http://schemas.openxmlformats.org/drawingml/2006/compatibility" xmlns:p14="http://schemas.microsoft.com/office/powerpoint/2010/main" xmlns:p15="http://schemas.microsoft.com/office/powerpoint/2012/main" xmlns:ahyp="http://schemas.microsoft.com/office/drawing/2018/hyperlinkcolor">
+<p:sld xmlns:a="http://schemas.openxmlformats.org/drawingml/2006/main" xmlns:p="http://schemas.openxmlformats.org/presentationml/2006/main" xmlns:r="http://schemas.openxmlformats.org/officeDocument/2006/relationships">
   <p:cSld>
     <p:bg>
       <p:bgPr>
         <a:solidFill>
-          <a:srgbClr val="F5F6FB"/>
+          <a:srgbClr val="FFFFFF"/>
         </a:solidFill>
       </p:bgPr>
     </p:bg>
     <p:spTree>
       <p:nvGrpSpPr>
-        <p:cNvPr id="248" name="Shape 248"/>
+        <p:cNvPr id="1" name=""/>
         <p:cNvGrpSpPr/>
         <p:nvPr/>
       </p:nvGrpSpPr>
-      <p:grpSpPr>
-        <a:xfrm>
-          <a:off x="0" y="0"/>
-          <a:ext cx="0" cy="0"/>
-          <a:chOff x="0" y="0"/>
-          <a:chExt cx="0" cy="0"/>
-        </a:xfrm>
-      </p:grpSpPr>
-      <p:sp>
-        <p:nvSpPr>
-          <p:cNvPr id="249" name="Google Shape;249;p11"/>
+      <p:grpSpPr/>
+      <p:sp>
+        <p:nvSpPr>
+          <p:cNvPr id="37" name="Google Shape;37;p4"/>
           <p:cNvSpPr/>
           <p:nvPr/>
         </p:nvSpPr>
@@ -26999,7 +27683,7 @@
       </p:sp>
       <p:sp>
         <p:nvSpPr>
-          <p:cNvPr id="250" name="Google Shape;250;p11"/>
+          <p:cNvPr id="38" name="Google Shape;38;p4"/>
           <p:cNvSpPr/>
           <p:nvPr/>
         </p:nvSpPr>
@@ -27044,7 +27728,7 @@
       </p:sp>
       <p:sp>
         <p:nvSpPr>
-          <p:cNvPr id="251" name="Google Shape;251;p11"/>
+          <p:cNvPr id="39" name="Google Shape;39;p4"/>
           <p:cNvSpPr/>
           <p:nvPr/>
         </p:nvSpPr>
@@ -27091,7 +27775,7 @@
                 <a:cs typeface="Arial"/>
                 <a:sym typeface="Arial"/>
               </a:rPr>
-              <a:t>EXPECTED OUTCOMES</a:t>
+              <a:t>ONBOARDING</a:t>
             </a:r>
             <a:endParaRPr b="0" i="0" sz="1200" u="none" cap="none" strike="noStrike">
               <a:solidFill>
@@ -27107,7 +27791,7 @@
       </p:sp>
       <p:sp>
         <p:nvSpPr>
-          <p:cNvPr id="252" name="Google Shape;252;p11"/>
+          <p:cNvPr id="40" name="Google Shape;40;p4"/>
           <p:cNvSpPr/>
           <p:nvPr/>
         </p:nvSpPr>
@@ -27154,7 +27838,7 @@
                 <a:cs typeface="Arial"/>
                 <a:sym typeface="Arial"/>
               </a:rPr>
-              <a:t>本サービスで期待できる効果</a:t>
+              <a:t>はじめに、30〜60分の面談で「運用の方針」を一緒に決めます</a:t>
             </a:r>
             <a:endParaRPr b="0" i="0" sz="2700" u="none" cap="none" strike="noStrike">
               <a:solidFill>
@@ -27170,18 +27854,81 @@
       </p:sp>
       <p:sp>
         <p:nvSpPr>
-          <p:cNvPr id="253" name="Google Shape;253;p11"/>
+          <p:cNvPr id="41" name="Google Shape;41;p4"/>
           <p:cNvSpPr/>
           <p:nvPr/>
         </p:nvSpPr>
         <p:spPr>
           <a:xfrm>
-            <a:off x="548640" y="1463040"/>
-            <a:ext cx="3535680" cy="1783080"/>
+            <a:off x="548640" y="1325880"/>
+            <a:ext cx="11064240" cy="457200"/>
+          </a:xfrm>
+          <a:prstGeom prst="rect">
+            <a:avLst/>
+          </a:prstGeom>
+          <a:noFill/>
+          <a:ln>
+            <a:noFill/>
+          </a:ln>
+        </p:spPr>
+        <p:txBody>
+          <a:bodyPr anchorCtr="0" anchor="ctr" bIns="0" lIns="0" spcFirstLastPara="1" rIns="0" wrap="square" tIns="0">
+            <a:noAutofit/>
+          </a:bodyPr>
+          <a:lstStyle/>
+          <a:p>
+            <a:pPr indent="0" lvl="0" marL="0" marR="0" rtl="0" algn="l">
+              <a:spcBef>
+                <a:spcPts val="0"/>
+              </a:spcBef>
+              <a:spcAft>
+                <a:spcPts val="0"/>
+              </a:spcAft>
+              <a:buClr>
+                <a:srgbClr val="20223F"/>
+              </a:buClr>
+              <a:buSzPts val="1400"/>
+              <a:buFont typeface="Arial"/>
+              <a:buNone/>
+            </a:pPr>
+            <a:r>
+              <a:rPr b="0" i="0" lang="en-US" sz="1400" u="none" cap="none" strike="noStrike">
+                <a:solidFill>
+                  <a:srgbClr val="20223F"/>
+                </a:solidFill>
+                <a:latin typeface="Arial"/>
+                <a:ea typeface="Arial"/>
+                <a:cs typeface="Arial"/>
+                <a:sym typeface="Arial"/>
+              </a:rPr>
+              <a:t>運用の方針を最初に一緒に決めるので、あとはお任せいただいても、あなたの意図からズレません。</a:t>
+            </a:r>
+            <a:endParaRPr b="0" i="0" sz="1400" u="none" cap="none" strike="noStrike">
+              <a:solidFill>
+                <a:schemeClr val="dk1"/>
+              </a:solidFill>
+              <a:latin typeface="Calibri"/>
+              <a:ea typeface="Calibri"/>
+              <a:cs typeface="Calibri"/>
+              <a:sym typeface="Calibri"/>
+            </a:endParaRPr>
+          </a:p>
+        </p:txBody>
+      </p:sp>
+      <p:sp>
+        <p:nvSpPr>
+          <p:cNvPr id="42" name="Google Shape;42;p4"/>
+          <p:cNvSpPr/>
+          <p:nvPr/>
+        </p:nvSpPr>
+        <p:spPr>
+          <a:xfrm>
+            <a:off x="548640" y="2011680"/>
+            <a:ext cx="3505200" cy="2240280"/>
           </a:xfrm>
           <a:prstGeom prst="roundRect">
             <a:avLst>
-              <a:gd fmla="val 5128" name="adj"/>
+              <a:gd fmla="val 4898" name="adj"/>
             </a:avLst>
           </a:prstGeom>
           <a:solidFill>
@@ -27228,14 +27975,14 @@
       </p:sp>
       <p:sp>
         <p:nvSpPr>
-          <p:cNvPr id="254" name="Google Shape;254;p11"/>
+          <p:cNvPr id="43" name="Google Shape;43;p4"/>
           <p:cNvSpPr/>
           <p:nvPr/>
         </p:nvSpPr>
         <p:spPr>
           <a:xfrm>
-            <a:off x="804672" y="1700784"/>
-            <a:ext cx="512064" cy="512064"/>
+            <a:off x="841248" y="2304288"/>
+            <a:ext cx="640080" cy="640080"/>
           </a:xfrm>
           <a:prstGeom prst="roundRect">
             <a:avLst>
@@ -27273,12 +28020,12 @@
       </p:sp>
       <p:pic>
         <p:nvPicPr>
-          <p:cNvPr descr="preencoded.png" id="255" name="Google Shape;255;p11"/>
+          <p:cNvPr descr="preencoded.png" id="44" name="Google Shape;44;p4"/>
           <p:cNvPicPr preferRelativeResize="0"/>
           <p:nvPr/>
         </p:nvPicPr>
         <p:blipFill rotWithShape="1">
-          <a:blip r:embed="rId3">
+          <a:blip r:embed="rId2">
             <a:alphaModFix/>
           </a:blip>
           <a:srcRect b="0" l="0" r="0" t="0"/>
@@ -27286,8 +28033,8 @@
         </p:blipFill>
         <p:spPr>
           <a:xfrm>
-            <a:off x="919886" y="1815998"/>
-            <a:ext cx="281635" cy="281635"/>
+            <a:off x="985266" y="2448306"/>
+            <a:ext cx="352044" cy="352044"/>
           </a:xfrm>
           <a:prstGeom prst="rect">
             <a:avLst/>
@@ -27300,14 +28047,14 @@
       </p:pic>
       <p:sp>
         <p:nvSpPr>
-          <p:cNvPr id="256" name="Google Shape;256;p11"/>
+          <p:cNvPr id="45" name="Google Shape;45;p4"/>
           <p:cNvSpPr/>
           <p:nvPr/>
         </p:nvSpPr>
         <p:spPr>
           <a:xfrm>
-            <a:off x="804672" y="2304288"/>
-            <a:ext cx="3078480" cy="457200"/>
+            <a:off x="841248" y="3090672"/>
+            <a:ext cx="2956560" cy="457200"/>
           </a:xfrm>
           <a:prstGeom prst="rect">
             <a:avLst/>
@@ -27324,9 +28071,6 @@
           <a:lstStyle/>
           <a:p>
             <a:pPr indent="0" lvl="0" marL="0" marR="0" rtl="0" algn="l">
-              <a:lnSpc>
-                <a:spcPct val="105000"/>
-              </a:lnSpc>
               <a:spcBef>
                 <a:spcPts val="0"/>
               </a:spcBef>
@@ -27336,12 +28080,12 @@
               <a:buClr>
                 <a:srgbClr val="20223F"/>
               </a:buClr>
-              <a:buSzPts val="1350"/>
+              <a:buSzPts val="1600"/>
               <a:buFont typeface="Arial"/>
               <a:buNone/>
             </a:pPr>
             <a:r>
-              <a:rPr b="1" i="0" lang="en-US" sz="1350" u="none" cap="none" strike="noStrike">
+              <a:rPr b="1" i="0" lang="en-US" sz="1600" u="none" cap="none" strike="noStrike">
                 <a:solidFill>
                   <a:srgbClr val="20223F"/>
                 </a:solidFill>
@@ -27350,9 +28094,9 @@
                 <a:cs typeface="Arial"/>
                 <a:sym typeface="Arial"/>
               </a:rPr>
-              <a:t>Googleに正しく認識される</a:t>
-            </a:r>
-            <a:endParaRPr b="0" i="0" sz="1350" u="none" cap="none" strike="noStrike">
+              <a:t>強み・NGを共有</a:t>
+            </a:r>
+            <a:endParaRPr b="0" i="0" sz="1600" u="none" cap="none" strike="noStrike">
               <a:solidFill>
                 <a:schemeClr val="dk1"/>
               </a:solidFill>
@@ -27366,14 +28110,14 @@
       </p:sp>
       <p:sp>
         <p:nvSpPr>
-          <p:cNvPr id="257" name="Google Shape;257;p11"/>
+          <p:cNvPr id="46" name="Google Shape;46;p4"/>
           <p:cNvSpPr/>
           <p:nvPr/>
         </p:nvSpPr>
         <p:spPr>
           <a:xfrm>
-            <a:off x="804672" y="2670048"/>
-            <a:ext cx="3078480" cy="548640"/>
+            <a:off x="841248" y="3584448"/>
+            <a:ext cx="2956560" cy="594360"/>
           </a:xfrm>
           <a:prstGeom prst="rect">
             <a:avLst/>
@@ -27391,7 +28135,7 @@
           <a:p>
             <a:pPr indent="0" lvl="0" marL="0" marR="0" rtl="0" algn="l">
               <a:lnSpc>
-                <a:spcPct val="112000"/>
+                <a:spcPct val="115000"/>
               </a:lnSpc>
               <a:spcBef>
                 <a:spcPts val="0"/>
@@ -27402,12 +28146,12 @@
               <a:buClr>
                 <a:srgbClr val="6B7280"/>
               </a:buClr>
-              <a:buSzPts val="1050"/>
+              <a:buSzPts val="1200"/>
               <a:buFont typeface="Arial"/>
               <a:buNone/>
             </a:pPr>
             <a:r>
-              <a:rPr b="0" i="0" lang="en-US" sz="1050" u="none" cap="none" strike="noStrike">
+              <a:rPr b="0" i="0" lang="en-US" sz="1200" u="none" cap="none" strike="noStrike">
                 <a:solidFill>
                   <a:srgbClr val="6B7280"/>
                 </a:solidFill>
@@ -27416,9 +28160,9 @@
                 <a:cs typeface="Arial"/>
                 <a:sym typeface="Arial"/>
               </a:rPr>
-              <a:t>地域名・相談内容・サービス内容が正しく伝わり、関連キーワードで表示されやすい状態へ</a:t>
-            </a:r>
-            <a:endParaRPr b="0" i="0" sz="1050" u="none" cap="none" strike="noStrike">
+              <a:t>お店の強み・NG表現・伝えたいことをヒアリング</a:t>
+            </a:r>
+            <a:endParaRPr b="0" i="0" sz="1200" u="none" cap="none" strike="noStrike">
               <a:solidFill>
                 <a:schemeClr val="dk1"/>
               </a:solidFill>
@@ -27432,18 +28176,18 @@
       </p:sp>
       <p:sp>
         <p:nvSpPr>
-          <p:cNvPr id="258" name="Google Shape;258;p11"/>
+          <p:cNvPr id="47" name="Google Shape;47;p4"/>
           <p:cNvSpPr/>
           <p:nvPr/>
         </p:nvSpPr>
         <p:spPr>
           <a:xfrm>
-            <a:off x="4312920" y="1463040"/>
-            <a:ext cx="3535680" cy="1783080"/>
+            <a:off x="4373880" y="2011680"/>
+            <a:ext cx="3505200" cy="2240280"/>
           </a:xfrm>
           <a:prstGeom prst="roundRect">
             <a:avLst>
-              <a:gd fmla="val 5128" name="adj"/>
+              <a:gd fmla="val 4898" name="adj"/>
             </a:avLst>
           </a:prstGeom>
           <a:solidFill>
@@ -27490,14 +28234,14 @@
       </p:sp>
       <p:sp>
         <p:nvSpPr>
-          <p:cNvPr id="259" name="Google Shape;259;p11"/>
+          <p:cNvPr id="48" name="Google Shape;48;p4"/>
           <p:cNvSpPr/>
           <p:nvPr/>
         </p:nvSpPr>
         <p:spPr>
           <a:xfrm>
-            <a:off x="4568952" y="1700784"/>
-            <a:ext cx="512064" cy="512064"/>
+            <a:off x="4666488" y="2304288"/>
+            <a:ext cx="640080" cy="640080"/>
           </a:xfrm>
           <a:prstGeom prst="roundRect">
             <a:avLst>
@@ -27535,12 +28279,12 @@
       </p:sp>
       <p:pic>
         <p:nvPicPr>
-          <p:cNvPr descr="preencoded.png" id="260" name="Google Shape;260;p11"/>
+          <p:cNvPr descr="preencoded.png" id="49" name="Google Shape;49;p4"/>
           <p:cNvPicPr preferRelativeResize="0"/>
           <p:nvPr/>
         </p:nvPicPr>
         <p:blipFill rotWithShape="1">
-          <a:blip r:embed="rId4">
+          <a:blip r:embed="rId3">
             <a:alphaModFix/>
           </a:blip>
           <a:srcRect b="0" l="0" r="0" t="0"/>
@@ -27548,8 +28292,8 @@
         </p:blipFill>
         <p:spPr>
           <a:xfrm>
-            <a:off x="4684166" y="1815998"/>
-            <a:ext cx="281635" cy="281635"/>
+            <a:off x="4810506" y="2448306"/>
+            <a:ext cx="352044" cy="352044"/>
           </a:xfrm>
           <a:prstGeom prst="rect">
             <a:avLst/>
@@ -27562,14 +28306,14 @@
       </p:pic>
       <p:sp>
         <p:nvSpPr>
-          <p:cNvPr id="261" name="Google Shape;261;p11"/>
+          <p:cNvPr id="50" name="Google Shape;50;p4"/>
           <p:cNvSpPr/>
           <p:nvPr/>
         </p:nvSpPr>
         <p:spPr>
           <a:xfrm>
-            <a:off x="4568952" y="2304288"/>
-            <a:ext cx="3078480" cy="457200"/>
+            <a:off x="4666488" y="3090672"/>
+            <a:ext cx="2956560" cy="457200"/>
           </a:xfrm>
           <a:prstGeom prst="rect">
             <a:avLst/>
@@ -27586,9 +28330,6 @@
           <a:lstStyle/>
           <a:p>
             <a:pPr indent="0" lvl="0" marL="0" marR="0" rtl="0" algn="l">
-              <a:lnSpc>
-                <a:spcPct val="105000"/>
-              </a:lnSpc>
               <a:spcBef>
                 <a:spcPts val="0"/>
               </a:spcBef>
@@ -27598,12 +28339,12 @@
               <a:buClr>
                 <a:srgbClr val="20223F"/>
               </a:buClr>
-              <a:buSzPts val="1350"/>
+              <a:buSzPts val="1600"/>
               <a:buFont typeface="Arial"/>
               <a:buNone/>
             </a:pPr>
             <a:r>
-              <a:rPr b="1" i="0" lang="en-US" sz="1350" u="none" cap="none" strike="noStrike">
+              <a:rPr b="1" i="0" lang="en-US" sz="1600" u="none" cap="none" strike="noStrike">
                 <a:solidFill>
                   <a:srgbClr val="20223F"/>
                 </a:solidFill>
@@ -27612,9 +28353,9 @@
                 <a:cs typeface="Arial"/>
                 <a:sym typeface="Arial"/>
               </a:rPr>
-              <a:t>比較されたときに強みが伝わる</a:t>
-            </a:r>
-            <a:endParaRPr b="0" i="0" sz="1350" u="none" cap="none" strike="noStrike">
+              <a:t>方針を一緒に確定</a:t>
+            </a:r>
+            <a:endParaRPr b="0" i="0" sz="1600" u="none" cap="none" strike="noStrike">
               <a:solidFill>
                 <a:schemeClr val="dk1"/>
               </a:solidFill>
@@ -27628,14 +28369,14 @@
       </p:sp>
       <p:sp>
         <p:nvSpPr>
-          <p:cNvPr id="262" name="Google Shape;262;p11"/>
+          <p:cNvPr id="51" name="Google Shape;51;p4"/>
           <p:cNvSpPr/>
           <p:nvPr/>
         </p:nvSpPr>
         <p:spPr>
           <a:xfrm>
-            <a:off x="4568952" y="2670048"/>
-            <a:ext cx="3078480" cy="548640"/>
+            <a:off x="4666488" y="3584448"/>
+            <a:ext cx="2956560" cy="594360"/>
           </a:xfrm>
           <a:prstGeom prst="rect">
             <a:avLst/>
@@ -27653,7 +28394,7 @@
           <a:p>
             <a:pPr indent="0" lvl="0" marL="0" marR="0" rtl="0" algn="l">
               <a:lnSpc>
-                <a:spcPct val="112000"/>
+                <a:spcPct val="115000"/>
               </a:lnSpc>
               <a:spcBef>
                 <a:spcPts val="0"/>
@@ -27664,12 +28405,12 @@
               <a:buClr>
                 <a:srgbClr val="6B7280"/>
               </a:buClr>
-              <a:buSzPts val="1050"/>
+              <a:buSzPts val="1200"/>
               <a:buFont typeface="Arial"/>
               <a:buNone/>
             </a:pPr>
             <a:r>
-              <a:rPr b="0" i="0" lang="en-US" sz="1050" u="none" cap="none" strike="noStrike">
+              <a:rPr b="0" i="0" lang="en-US" sz="1200" u="none" cap="none" strike="noStrike">
                 <a:solidFill>
                   <a:srgbClr val="6B7280"/>
                 </a:solidFill>
@@ -27678,9 +28419,9 @@
                 <a:cs typeface="Arial"/>
                 <a:sym typeface="Arial"/>
               </a:rPr>
-              <a:t>売却・買取・相続・リノベ・借地権など、専門性が比較時に一目で伝わる状態に</a:t>
-            </a:r>
-            <a:endParaRPr b="0" i="0" sz="1050" u="none" cap="none" strike="noStrike">
+              <a:t>投稿のテーマ方針、口コミへの向き合い方を確定</a:t>
+            </a:r>
+            <a:endParaRPr b="0" i="0" sz="1200" u="none" cap="none" strike="noStrike">
               <a:solidFill>
                 <a:schemeClr val="dk1"/>
               </a:solidFill>
@@ -27694,18 +28435,18 @@
       </p:sp>
       <p:sp>
         <p:nvSpPr>
-          <p:cNvPr id="263" name="Google Shape;263;p11"/>
+          <p:cNvPr id="52" name="Google Shape;52;p4"/>
           <p:cNvSpPr/>
           <p:nvPr/>
         </p:nvSpPr>
         <p:spPr>
           <a:xfrm>
-            <a:off x="8077200" y="1463040"/>
-            <a:ext cx="3535680" cy="1783080"/>
+            <a:off x="8061960" y="2011680"/>
+            <a:ext cx="3505200" cy="2240280"/>
           </a:xfrm>
           <a:prstGeom prst="roundRect">
             <a:avLst>
-              <a:gd fmla="val 5128" name="adj"/>
+              <a:gd fmla="val 4898" name="adj"/>
             </a:avLst>
           </a:prstGeom>
           <a:solidFill>
@@ -27752,14 +28493,14 @@
       </p:sp>
       <p:sp>
         <p:nvSpPr>
-          <p:cNvPr id="264" name="Google Shape;264;p11"/>
+          <p:cNvPr id="53" name="Google Shape;53;p4"/>
           <p:cNvSpPr/>
           <p:nvPr/>
         </p:nvSpPr>
         <p:spPr>
           <a:xfrm>
-            <a:off x="8333232" y="1700784"/>
-            <a:ext cx="512064" cy="512064"/>
+            <a:off x="8354568" y="2304288"/>
+            <a:ext cx="640080" cy="640080"/>
           </a:xfrm>
           <a:prstGeom prst="roundRect">
             <a:avLst>
@@ -27797,12 +28538,12 @@
       </p:sp>
       <p:pic>
         <p:nvPicPr>
-          <p:cNvPr descr="preencoded.png" id="265" name="Google Shape;265;p11"/>
+          <p:cNvPr descr="preencoded.png" id="54" name="Google Shape;54;p4"/>
           <p:cNvPicPr preferRelativeResize="0"/>
           <p:nvPr/>
         </p:nvPicPr>
         <p:blipFill rotWithShape="1">
-          <a:blip r:embed="rId5">
+          <a:blip r:embed="rId4">
             <a:alphaModFix/>
           </a:blip>
           <a:srcRect b="0" l="0" r="0" t="0"/>
@@ -27810,8 +28551,8 @@
         </p:blipFill>
         <p:spPr>
           <a:xfrm>
-            <a:off x="8448446" y="1815998"/>
-            <a:ext cx="281635" cy="281635"/>
+            <a:off x="8498586" y="2448306"/>
+            <a:ext cx="352044" cy="352044"/>
           </a:xfrm>
           <a:prstGeom prst="rect">
             <a:avLst/>
@@ -27824,14 +28565,14 @@
       </p:pic>
       <p:sp>
         <p:nvSpPr>
-          <p:cNvPr id="266" name="Google Shape;266;p11"/>
+          <p:cNvPr id="55" name="Google Shape;55;p4"/>
           <p:cNvSpPr/>
           <p:nvPr/>
         </p:nvSpPr>
         <p:spPr>
           <a:xfrm>
-            <a:off x="8333232" y="2304288"/>
-            <a:ext cx="3078480" cy="457200"/>
+            <a:off x="8354568" y="3090672"/>
+            <a:ext cx="2956560" cy="457200"/>
           </a:xfrm>
           <a:prstGeom prst="rect">
             <a:avLst/>
@@ -27848,9 +28589,6 @@
           <a:lstStyle/>
           <a:p>
             <a:pPr indent="0" lvl="0" marL="0" marR="0" rtl="0" algn="l">
-              <a:lnSpc>
-                <a:spcPct val="105000"/>
-              </a:lnSpc>
               <a:spcBef>
                 <a:spcPts val="0"/>
               </a:spcBef>
@@ -27860,12 +28598,12 @@
               <a:buClr>
                 <a:srgbClr val="20223F"/>
               </a:buClr>
-              <a:buSzPts val="1350"/>
+              <a:buSzPts val="1600"/>
               <a:buFont typeface="Arial"/>
               <a:buNone/>
             </a:pPr>
             <a:r>
-              <a:rPr b="1" i="0" lang="en-US" sz="1350" u="none" cap="none" strike="noStrike">
+              <a:rPr b="1" i="0" lang="en-US" sz="1600" u="none" cap="none" strike="noStrike">
                 <a:solidFill>
                   <a:srgbClr val="20223F"/>
                 </a:solidFill>
@@ -27874,9 +28612,9 @@
                 <a:cs typeface="Arial"/>
                 <a:sym typeface="Arial"/>
               </a:rPr>
-              <a:t>問い合わせ前の不安を減らす</a:t>
-            </a:r>
-            <a:endParaRPr b="0" i="0" sz="1350" u="none" cap="none" strike="noStrike">
+              <a:t>以後は自動で回る</a:t>
+            </a:r>
+            <a:endParaRPr b="0" i="0" sz="1600" u="none" cap="none" strike="noStrike">
               <a:solidFill>
                 <a:schemeClr val="dk1"/>
               </a:solidFill>
@@ -27890,14 +28628,14 @@
       </p:sp>
       <p:sp>
         <p:nvSpPr>
-          <p:cNvPr id="267" name="Google Shape;267;p11"/>
+          <p:cNvPr id="56" name="Google Shape;56;p4"/>
           <p:cNvSpPr/>
           <p:nvPr/>
         </p:nvSpPr>
         <p:spPr>
           <a:xfrm>
-            <a:off x="8333232" y="2670048"/>
-            <a:ext cx="3078480" cy="548640"/>
+            <a:off x="8354568" y="3584448"/>
+            <a:ext cx="2956560" cy="594360"/>
           </a:xfrm>
           <a:prstGeom prst="rect">
             <a:avLst/>
@@ -27915,7 +28653,7 @@
           <a:p>
             <a:pPr indent="0" lvl="0" marL="0" marR="0" rtl="0" algn="l">
               <a:lnSpc>
-                <a:spcPct val="112000"/>
+                <a:spcPct val="115000"/>
               </a:lnSpc>
               <a:spcBef>
                 <a:spcPts val="0"/>
@@ -27926,12 +28664,12 @@
               <a:buClr>
                 <a:srgbClr val="6B7280"/>
               </a:buClr>
-              <a:buSzPts val="1050"/>
+              <a:buSzPts val="1200"/>
               <a:buFont typeface="Arial"/>
               <a:buNone/>
             </a:pPr>
             <a:r>
-              <a:rPr b="0" i="0" lang="en-US" sz="1050" u="none" cap="none" strike="noStrike">
+              <a:rPr b="0" i="0" lang="en-US" sz="1200" u="none" cap="none" strike="noStrike">
                 <a:solidFill>
                   <a:srgbClr val="6B7280"/>
                 </a:solidFill>
@@ -27940,9 +28678,9 @@
                 <a:cs typeface="Arial"/>
                 <a:sym typeface="Arial"/>
               </a:rPr>
-              <a:t>写真・口コミ・返信・投稿で「相談して大丈夫そう」と思ってもらえる状態を継続</a:t>
-            </a:r>
-            <a:endParaRPr b="0" i="0" sz="1050" u="none" cap="none" strike="noStrike">
+              <a:t>決めた“方針”の中で、毎月の運用が自動的に回ります</a:t>
+            </a:r>
+            <a:endParaRPr b="0" i="0" sz="1200" u="none" cap="none" strike="noStrike">
               <a:solidFill>
                 <a:schemeClr val="dk1"/>
               </a:solidFill>
@@ -27956,80 +28694,22 @@
       </p:sp>
       <p:sp>
         <p:nvSpPr>
-          <p:cNvPr id="268" name="Google Shape;268;p11"/>
+          <p:cNvPr id="57" name="Google Shape;57;p4"/>
           <p:cNvSpPr/>
           <p:nvPr/>
         </p:nvSpPr>
         <p:spPr>
           <a:xfrm>
-            <a:off x="548640" y="3447288"/>
-            <a:ext cx="3535680" cy="1783080"/>
+            <a:off x="548640" y="4617720"/>
+            <a:ext cx="11064240" cy="914400"/>
           </a:xfrm>
           <a:prstGeom prst="roundRect">
             <a:avLst>
-              <a:gd fmla="val 5128" name="adj"/>
+              <a:gd fmla="val 10000" name="adj"/>
             </a:avLst>
           </a:prstGeom>
           <a:solidFill>
-            <a:srgbClr val="FFFFFF"/>
-          </a:solidFill>
-          <a:ln cap="flat" cmpd="sng" w="12700">
-            <a:solidFill>
-              <a:srgbClr val="E2E4F0"/>
-            </a:solidFill>
-            <a:prstDash val="solid"/>
-            <a:round/>
-            <a:headEnd len="sm" w="sm" type="none"/>
-            <a:tailEnd len="sm" w="sm" type="none"/>
-          </a:ln>
-          <a:effectLst>
-            <a:outerShdw blurRad="114300" rotWithShape="0" algn="bl" dir="5400000" dist="38100">
-              <a:srgbClr val="232A55">
-                <a:alpha val="12156"/>
-              </a:srgbClr>
-            </a:outerShdw>
-          </a:effectLst>
-        </p:spPr>
-        <p:txBody>
-          <a:bodyPr anchorCtr="0" anchor="ctr" bIns="91425" lIns="91425" spcFirstLastPara="1" rIns="91425" wrap="square" tIns="91425">
-            <a:noAutofit/>
-          </a:bodyPr>
-          <a:lstStyle/>
-          <a:p>
-            <a:pPr indent="0" lvl="0" marL="0" rtl="0" algn="l">
-              <a:spcBef>
-                <a:spcPts val="0"/>
-              </a:spcBef>
-              <a:spcAft>
-                <a:spcPts val="0"/>
-              </a:spcAft>
-              <a:buNone/>
-            </a:pPr>
-            <a:r>
-              <a:t/>
-            </a:r>
-            <a:endParaRPr/>
-          </a:p>
-        </p:txBody>
-      </p:sp>
-      <p:sp>
-        <p:nvSpPr>
-          <p:cNvPr id="269" name="Google Shape;269;p11"/>
-          <p:cNvSpPr/>
-          <p:nvPr/>
-        </p:nvSpPr>
-        <p:spPr>
-          <a:xfrm>
-            <a:off x="804672" y="3685032"/>
-            <a:ext cx="512064" cy="512064"/>
-          </a:xfrm>
-          <a:prstGeom prst="roundRect">
-            <a:avLst>
-              <a:gd fmla="val 28000" name="adj"/>
-            </a:avLst>
-          </a:prstGeom>
-          <a:solidFill>
-            <a:srgbClr val="F4748A"/>
+            <a:srgbClr val="ECEEF8"/>
           </a:solidFill>
           <a:ln>
             <a:noFill/>
@@ -28057,23 +28737,16 @@
           </a:p>
         </p:txBody>
       </p:sp>
-      <p:pic>
-        <p:nvPicPr>
-          <p:cNvPr descr="preencoded.png" id="270" name="Google Shape;270;p11"/>
-          <p:cNvPicPr preferRelativeResize="0"/>
-          <p:nvPr/>
-        </p:nvPicPr>
-        <p:blipFill rotWithShape="1">
-          <a:blip r:embed="rId6">
-            <a:alphaModFix/>
-          </a:blip>
-          <a:srcRect b="0" l="0" r="0" t="0"/>
-          <a:stretch/>
-        </p:blipFill>
-        <p:spPr>
-          <a:xfrm>
-            <a:off x="919886" y="3800246"/>
-            <a:ext cx="281635" cy="281635"/>
+      <p:sp>
+        <p:nvSpPr>
+          <p:cNvPr id="58" name="Google Shape;58;p4"/>
+          <p:cNvSpPr/>
+          <p:nvPr/>
+        </p:nvSpPr>
+        <p:spPr>
+          <a:xfrm>
+            <a:off x="960120" y="4617720"/>
+            <a:ext cx="10241280" cy="914400"/>
           </a:xfrm>
           <a:prstGeom prst="rect">
             <a:avLst/>
@@ -28083,26 +28756,6 @@
             <a:noFill/>
           </a:ln>
         </p:spPr>
-      </p:pic>
-      <p:sp>
-        <p:nvSpPr>
-          <p:cNvPr id="271" name="Google Shape;271;p11"/>
-          <p:cNvSpPr/>
-          <p:nvPr/>
-        </p:nvSpPr>
-        <p:spPr>
-          <a:xfrm>
-            <a:off x="804672" y="4288536"/>
-            <a:ext cx="3078480" cy="457200"/>
-          </a:xfrm>
-          <a:prstGeom prst="rect">
-            <a:avLst/>
-          </a:prstGeom>
-          <a:noFill/>
-          <a:ln>
-            <a:noFill/>
-          </a:ln>
-        </p:spPr>
         <p:txBody>
           <a:bodyPr anchorCtr="0" anchor="ctr" bIns="0" lIns="0" spcFirstLastPara="1" rIns="0" wrap="square" tIns="0">
             <a:noAutofit/>
@@ -28111,7 +28764,7 @@
           <a:p>
             <a:pPr indent="0" lvl="0" marL="0" marR="0" rtl="0" algn="l">
               <a:lnSpc>
-                <a:spcPct val="105000"/>
+                <a:spcPct val="120000"/>
               </a:lnSpc>
               <a:spcBef>
                 <a:spcPts val="0"/>
@@ -28120,25 +28773,25 @@
                 <a:spcPts val="0"/>
               </a:spcAft>
               <a:buClr>
-                <a:srgbClr val="20223F"/>
+                <a:srgbClr val="3E4BA0"/>
               </a:buClr>
-              <a:buSzPts val="1350"/>
+              <a:buSzPts val="1500"/>
               <a:buFont typeface="Arial"/>
               <a:buNone/>
             </a:pPr>
             <a:r>
-              <a:rPr b="1" i="0" lang="en-US" sz="1350" u="none" cap="none" strike="noStrike">
+              <a:rPr b="1" i="0" lang="en-US" sz="1500" u="none" cap="none" strike="noStrike">
                 <a:solidFill>
-                  <a:srgbClr val="20223F"/>
+                  <a:srgbClr val="3E4BA0"/>
                 </a:solidFill>
                 <a:latin typeface="Arial"/>
                 <a:ea typeface="Arial"/>
                 <a:cs typeface="Arial"/>
                 <a:sym typeface="Arial"/>
               </a:rPr>
-              <a:t>信頼されやすい状態をつくる</a:t>
-            </a:r>
-            <a:endParaRPr b="0" i="0" sz="1350" u="none" cap="none" strike="noStrike">
+              <a:t>丸投げでも、あなたの意図からズレない。最初にきちんと握るから、毎月の確認は最小限で済みます。</a:t>
+            </a:r>
+            <a:endParaRPr b="0" i="0" sz="1500" u="none" cap="none" strike="noStrike">
               <a:solidFill>
                 <a:schemeClr val="dk1"/>
               </a:solidFill>
@@ -28152,660 +28805,7 @@
       </p:sp>
       <p:sp>
         <p:nvSpPr>
-          <p:cNvPr id="272" name="Google Shape;272;p11"/>
-          <p:cNvSpPr/>
-          <p:nvPr/>
-        </p:nvSpPr>
-        <p:spPr>
-          <a:xfrm>
-            <a:off x="804672" y="4654296"/>
-            <a:ext cx="3078480" cy="548640"/>
-          </a:xfrm>
-          <a:prstGeom prst="rect">
-            <a:avLst/>
-          </a:prstGeom>
-          <a:noFill/>
-          <a:ln>
-            <a:noFill/>
-          </a:ln>
-        </p:spPr>
-        <p:txBody>
-          <a:bodyPr anchorCtr="0" anchor="ctr" bIns="0" lIns="0" spcFirstLastPara="1" rIns="0" wrap="square" tIns="0">
-            <a:noAutofit/>
-          </a:bodyPr>
-          <a:lstStyle/>
-          <a:p>
-            <a:pPr indent="0" lvl="0" marL="0" marR="0" rtl="0" algn="l">
-              <a:lnSpc>
-                <a:spcPct val="112000"/>
-              </a:lnSpc>
-              <a:spcBef>
-                <a:spcPts val="0"/>
-              </a:spcBef>
-              <a:spcAft>
-                <a:spcPts val="0"/>
-              </a:spcAft>
-              <a:buClr>
-                <a:srgbClr val="6B7280"/>
-              </a:buClr>
-              <a:buSzPts val="1050"/>
-              <a:buFont typeface="Arial"/>
-              <a:buNone/>
-            </a:pPr>
-            <a:r>
-              <a:rPr b="0" i="0" lang="en-US" sz="1050" u="none" cap="none" strike="noStrike">
-                <a:solidFill>
-                  <a:srgbClr val="6B7280"/>
-                </a:solidFill>
-                <a:latin typeface="Arial"/>
-                <a:ea typeface="Arial"/>
-                <a:cs typeface="Arial"/>
-                <a:sym typeface="Arial"/>
-              </a:rPr>
-              <a:t>第三者の口コミが積み重なり、新規顧客の問い合わせ前の安心材料になる</a:t>
-            </a:r>
-            <a:endParaRPr b="0" i="0" sz="1050" u="none" cap="none" strike="noStrike">
-              <a:solidFill>
-                <a:schemeClr val="dk1"/>
-              </a:solidFill>
-              <a:latin typeface="Calibri"/>
-              <a:ea typeface="Calibri"/>
-              <a:cs typeface="Calibri"/>
-              <a:sym typeface="Calibri"/>
-            </a:endParaRPr>
-          </a:p>
-        </p:txBody>
-      </p:sp>
-      <p:sp>
-        <p:nvSpPr>
-          <p:cNvPr id="273" name="Google Shape;273;p11"/>
-          <p:cNvSpPr/>
-          <p:nvPr/>
-        </p:nvSpPr>
-        <p:spPr>
-          <a:xfrm>
-            <a:off x="4312920" y="3447288"/>
-            <a:ext cx="3535680" cy="1783080"/>
-          </a:xfrm>
-          <a:prstGeom prst="roundRect">
-            <a:avLst>
-              <a:gd fmla="val 5128" name="adj"/>
-            </a:avLst>
-          </a:prstGeom>
-          <a:solidFill>
-            <a:srgbClr val="FFFFFF"/>
-          </a:solidFill>
-          <a:ln cap="flat" cmpd="sng" w="12700">
-            <a:solidFill>
-              <a:srgbClr val="E2E4F0"/>
-            </a:solidFill>
-            <a:prstDash val="solid"/>
-            <a:round/>
-            <a:headEnd len="sm" w="sm" type="none"/>
-            <a:tailEnd len="sm" w="sm" type="none"/>
-          </a:ln>
-          <a:effectLst>
-            <a:outerShdw blurRad="114300" rotWithShape="0" algn="bl" dir="5400000" dist="38100">
-              <a:srgbClr val="232A55">
-                <a:alpha val="12156"/>
-              </a:srgbClr>
-            </a:outerShdw>
-          </a:effectLst>
-        </p:spPr>
-        <p:txBody>
-          <a:bodyPr anchorCtr="0" anchor="ctr" bIns="91425" lIns="91425" spcFirstLastPara="1" rIns="91425" wrap="square" tIns="91425">
-            <a:noAutofit/>
-          </a:bodyPr>
-          <a:lstStyle/>
-          <a:p>
-            <a:pPr indent="0" lvl="0" marL="0" rtl="0" algn="l">
-              <a:spcBef>
-                <a:spcPts val="0"/>
-              </a:spcBef>
-              <a:spcAft>
-                <a:spcPts val="0"/>
-              </a:spcAft>
-              <a:buNone/>
-            </a:pPr>
-            <a:r>
-              <a:t/>
-            </a:r>
-            <a:endParaRPr/>
-          </a:p>
-        </p:txBody>
-      </p:sp>
-      <p:sp>
-        <p:nvSpPr>
-          <p:cNvPr id="274" name="Google Shape;274;p11"/>
-          <p:cNvSpPr/>
-          <p:nvPr/>
-        </p:nvSpPr>
-        <p:spPr>
-          <a:xfrm>
-            <a:off x="4568952" y="3685032"/>
-            <a:ext cx="512064" cy="512064"/>
-          </a:xfrm>
-          <a:prstGeom prst="roundRect">
-            <a:avLst>
-              <a:gd fmla="val 28000" name="adj"/>
-            </a:avLst>
-          </a:prstGeom>
-          <a:solidFill>
-            <a:srgbClr val="10987A"/>
-          </a:solidFill>
-          <a:ln>
-            <a:noFill/>
-          </a:ln>
-        </p:spPr>
-        <p:txBody>
-          <a:bodyPr anchorCtr="0" anchor="ctr" bIns="91425" lIns="91425" spcFirstLastPara="1" rIns="91425" wrap="square" tIns="91425">
-            <a:noAutofit/>
-          </a:bodyPr>
-          <a:lstStyle/>
-          <a:p>
-            <a:pPr indent="0" lvl="0" marL="0" rtl="0" algn="l">
-              <a:spcBef>
-                <a:spcPts val="0"/>
-              </a:spcBef>
-              <a:spcAft>
-                <a:spcPts val="0"/>
-              </a:spcAft>
-              <a:buNone/>
-            </a:pPr>
-            <a:r>
-              <a:t/>
-            </a:r>
-            <a:endParaRPr/>
-          </a:p>
-        </p:txBody>
-      </p:sp>
-      <p:pic>
-        <p:nvPicPr>
-          <p:cNvPr descr="preencoded.png" id="275" name="Google Shape;275;p11"/>
-          <p:cNvPicPr preferRelativeResize="0"/>
-          <p:nvPr/>
-        </p:nvPicPr>
-        <p:blipFill rotWithShape="1">
-          <a:blip r:embed="rId7">
-            <a:alphaModFix/>
-          </a:blip>
-          <a:srcRect b="0" l="0" r="0" t="0"/>
-          <a:stretch/>
-        </p:blipFill>
-        <p:spPr>
-          <a:xfrm>
-            <a:off x="4684166" y="3800246"/>
-            <a:ext cx="281635" cy="281635"/>
-          </a:xfrm>
-          <a:prstGeom prst="rect">
-            <a:avLst/>
-          </a:prstGeom>
-          <a:noFill/>
-          <a:ln>
-            <a:noFill/>
-          </a:ln>
-        </p:spPr>
-      </p:pic>
-      <p:sp>
-        <p:nvSpPr>
-          <p:cNvPr id="276" name="Google Shape;276;p11"/>
-          <p:cNvSpPr/>
-          <p:nvPr/>
-        </p:nvSpPr>
-        <p:spPr>
-          <a:xfrm>
-            <a:off x="4568952" y="4288536"/>
-            <a:ext cx="3078480" cy="457200"/>
-          </a:xfrm>
-          <a:prstGeom prst="rect">
-            <a:avLst/>
-          </a:prstGeom>
-          <a:noFill/>
-          <a:ln>
-            <a:noFill/>
-          </a:ln>
-        </p:spPr>
-        <p:txBody>
-          <a:bodyPr anchorCtr="0" anchor="ctr" bIns="0" lIns="0" spcFirstLastPara="1" rIns="0" wrap="square" tIns="0">
-            <a:noAutofit/>
-          </a:bodyPr>
-          <a:lstStyle/>
-          <a:p>
-            <a:pPr indent="0" lvl="0" marL="0" marR="0" rtl="0" algn="l">
-              <a:lnSpc>
-                <a:spcPct val="105000"/>
-              </a:lnSpc>
-              <a:spcBef>
-                <a:spcPts val="0"/>
-              </a:spcBef>
-              <a:spcAft>
-                <a:spcPts val="0"/>
-              </a:spcAft>
-              <a:buClr>
-                <a:srgbClr val="20223F"/>
-              </a:buClr>
-              <a:buSzPts val="1350"/>
-              <a:buFont typeface="Arial"/>
-              <a:buNone/>
-            </a:pPr>
-            <a:r>
-              <a:rPr b="1" i="0" lang="en-US" sz="1350" u="none" cap="none" strike="noStrike">
-                <a:solidFill>
-                  <a:srgbClr val="20223F"/>
-                </a:solidFill>
-                <a:latin typeface="Arial"/>
-                <a:ea typeface="Arial"/>
-                <a:cs typeface="Arial"/>
-                <a:sym typeface="Arial"/>
-              </a:rPr>
-              <a:t>問い合わせにつながりやすく</a:t>
-            </a:r>
-            <a:endParaRPr b="0" i="0" sz="1350" u="none" cap="none" strike="noStrike">
-              <a:solidFill>
-                <a:schemeClr val="dk1"/>
-              </a:solidFill>
-              <a:latin typeface="Calibri"/>
-              <a:ea typeface="Calibri"/>
-              <a:cs typeface="Calibri"/>
-              <a:sym typeface="Calibri"/>
-            </a:endParaRPr>
-          </a:p>
-        </p:txBody>
-      </p:sp>
-      <p:sp>
-        <p:nvSpPr>
-          <p:cNvPr id="277" name="Google Shape;277;p11"/>
-          <p:cNvSpPr/>
-          <p:nvPr/>
-        </p:nvSpPr>
-        <p:spPr>
-          <a:xfrm>
-            <a:off x="4568952" y="4654296"/>
-            <a:ext cx="3078480" cy="548640"/>
-          </a:xfrm>
-          <a:prstGeom prst="rect">
-            <a:avLst/>
-          </a:prstGeom>
-          <a:noFill/>
-          <a:ln>
-            <a:noFill/>
-          </a:ln>
-        </p:spPr>
-        <p:txBody>
-          <a:bodyPr anchorCtr="0" anchor="ctr" bIns="0" lIns="0" spcFirstLastPara="1" rIns="0" wrap="square" tIns="0">
-            <a:noAutofit/>
-          </a:bodyPr>
-          <a:lstStyle/>
-          <a:p>
-            <a:pPr indent="0" lvl="0" marL="0" marR="0" rtl="0" algn="l">
-              <a:lnSpc>
-                <a:spcPct val="112000"/>
-              </a:lnSpc>
-              <a:spcBef>
-                <a:spcPts val="0"/>
-              </a:spcBef>
-              <a:spcAft>
-                <a:spcPts val="0"/>
-              </a:spcAft>
-              <a:buClr>
-                <a:srgbClr val="6B7280"/>
-              </a:buClr>
-              <a:buSzPts val="1050"/>
-              <a:buFont typeface="Arial"/>
-              <a:buNone/>
-            </a:pPr>
-            <a:r>
-              <a:rPr b="0" i="0" lang="en-US" sz="1050" u="none" cap="none" strike="noStrike">
-                <a:solidFill>
-                  <a:srgbClr val="6B7280"/>
-                </a:solidFill>
-                <a:latin typeface="Arial"/>
-                <a:ea typeface="Arial"/>
-                <a:cs typeface="Arial"/>
-                <a:sym typeface="Arial"/>
-              </a:rPr>
-              <a:t>電話・ルート検索・問い合わせへのアクションが起きやすい受け皿を整える</a:t>
-            </a:r>
-            <a:endParaRPr b="0" i="0" sz="1050" u="none" cap="none" strike="noStrike">
-              <a:solidFill>
-                <a:schemeClr val="dk1"/>
-              </a:solidFill>
-              <a:latin typeface="Calibri"/>
-              <a:ea typeface="Calibri"/>
-              <a:cs typeface="Calibri"/>
-              <a:sym typeface="Calibri"/>
-            </a:endParaRPr>
-          </a:p>
-        </p:txBody>
-      </p:sp>
-      <p:sp>
-        <p:nvSpPr>
-          <p:cNvPr id="278" name="Google Shape;278;p11"/>
-          <p:cNvSpPr/>
-          <p:nvPr/>
-        </p:nvSpPr>
-        <p:spPr>
-          <a:xfrm>
-            <a:off x="8077200" y="3447288"/>
-            <a:ext cx="3535680" cy="1783080"/>
-          </a:xfrm>
-          <a:prstGeom prst="roundRect">
-            <a:avLst>
-              <a:gd fmla="val 5128" name="adj"/>
-            </a:avLst>
-          </a:prstGeom>
-          <a:solidFill>
-            <a:srgbClr val="FFFFFF"/>
-          </a:solidFill>
-          <a:ln cap="flat" cmpd="sng" w="12700">
-            <a:solidFill>
-              <a:srgbClr val="E2E4F0"/>
-            </a:solidFill>
-            <a:prstDash val="solid"/>
-            <a:round/>
-            <a:headEnd len="sm" w="sm" type="none"/>
-            <a:tailEnd len="sm" w="sm" type="none"/>
-          </a:ln>
-          <a:effectLst>
-            <a:outerShdw blurRad="114300" rotWithShape="0" algn="bl" dir="5400000" dist="38100">
-              <a:srgbClr val="232A55">
-                <a:alpha val="12156"/>
-              </a:srgbClr>
-            </a:outerShdw>
-          </a:effectLst>
-        </p:spPr>
-        <p:txBody>
-          <a:bodyPr anchorCtr="0" anchor="ctr" bIns="91425" lIns="91425" spcFirstLastPara="1" rIns="91425" wrap="square" tIns="91425">
-            <a:noAutofit/>
-          </a:bodyPr>
-          <a:lstStyle/>
-          <a:p>
-            <a:pPr indent="0" lvl="0" marL="0" rtl="0" algn="l">
-              <a:spcBef>
-                <a:spcPts val="0"/>
-              </a:spcBef>
-              <a:spcAft>
-                <a:spcPts val="0"/>
-              </a:spcAft>
-              <a:buNone/>
-            </a:pPr>
-            <a:r>
-              <a:t/>
-            </a:r>
-            <a:endParaRPr/>
-          </a:p>
-        </p:txBody>
-      </p:sp>
-      <p:sp>
-        <p:nvSpPr>
-          <p:cNvPr id="279" name="Google Shape;279;p11"/>
-          <p:cNvSpPr/>
-          <p:nvPr/>
-        </p:nvSpPr>
-        <p:spPr>
-          <a:xfrm>
-            <a:off x="8333232" y="3685032"/>
-            <a:ext cx="512064" cy="512064"/>
-          </a:xfrm>
-          <a:prstGeom prst="roundRect">
-            <a:avLst>
-              <a:gd fmla="val 28000" name="adj"/>
-            </a:avLst>
-          </a:prstGeom>
-          <a:solidFill>
-            <a:srgbClr val="3E4BA0"/>
-          </a:solidFill>
-          <a:ln>
-            <a:noFill/>
-          </a:ln>
-        </p:spPr>
-        <p:txBody>
-          <a:bodyPr anchorCtr="0" anchor="ctr" bIns="91425" lIns="91425" spcFirstLastPara="1" rIns="91425" wrap="square" tIns="91425">
-            <a:noAutofit/>
-          </a:bodyPr>
-          <a:lstStyle/>
-          <a:p>
-            <a:pPr indent="0" lvl="0" marL="0" rtl="0" algn="l">
-              <a:spcBef>
-                <a:spcPts val="0"/>
-              </a:spcBef>
-              <a:spcAft>
-                <a:spcPts val="0"/>
-              </a:spcAft>
-              <a:buNone/>
-            </a:pPr>
-            <a:r>
-              <a:t/>
-            </a:r>
-            <a:endParaRPr/>
-          </a:p>
-        </p:txBody>
-      </p:sp>
-      <p:pic>
-        <p:nvPicPr>
-          <p:cNvPr descr="preencoded.png" id="280" name="Google Shape;280;p11"/>
-          <p:cNvPicPr preferRelativeResize="0"/>
-          <p:nvPr/>
-        </p:nvPicPr>
-        <p:blipFill rotWithShape="1">
-          <a:blip r:embed="rId8">
-            <a:alphaModFix/>
-          </a:blip>
-          <a:srcRect b="0" l="0" r="0" t="0"/>
-          <a:stretch/>
-        </p:blipFill>
-        <p:spPr>
-          <a:xfrm>
-            <a:off x="8448446" y="3800246"/>
-            <a:ext cx="281635" cy="281635"/>
-          </a:xfrm>
-          <a:prstGeom prst="rect">
-            <a:avLst/>
-          </a:prstGeom>
-          <a:noFill/>
-          <a:ln>
-            <a:noFill/>
-          </a:ln>
-        </p:spPr>
-      </p:pic>
-      <p:sp>
-        <p:nvSpPr>
-          <p:cNvPr id="281" name="Google Shape;281;p11"/>
-          <p:cNvSpPr/>
-          <p:nvPr/>
-        </p:nvSpPr>
-        <p:spPr>
-          <a:xfrm>
-            <a:off x="8333232" y="4288536"/>
-            <a:ext cx="3078480" cy="457200"/>
-          </a:xfrm>
-          <a:prstGeom prst="rect">
-            <a:avLst/>
-          </a:prstGeom>
-          <a:noFill/>
-          <a:ln>
-            <a:noFill/>
-          </a:ln>
-        </p:spPr>
-        <p:txBody>
-          <a:bodyPr anchorCtr="0" anchor="ctr" bIns="0" lIns="0" spcFirstLastPara="1" rIns="0" wrap="square" tIns="0">
-            <a:noAutofit/>
-          </a:bodyPr>
-          <a:lstStyle/>
-          <a:p>
-            <a:pPr indent="0" lvl="0" marL="0" marR="0" rtl="0" algn="l">
-              <a:lnSpc>
-                <a:spcPct val="105000"/>
-              </a:lnSpc>
-              <a:spcBef>
-                <a:spcPts val="0"/>
-              </a:spcBef>
-              <a:spcAft>
-                <a:spcPts val="0"/>
-              </a:spcAft>
-              <a:buClr>
-                <a:srgbClr val="20223F"/>
-              </a:buClr>
-              <a:buSzPts val="1350"/>
-              <a:buFont typeface="Arial"/>
-              <a:buNone/>
-            </a:pPr>
-            <a:r>
-              <a:rPr b="1" i="0" lang="en-US" sz="1350" u="none" cap="none" strike="noStrike">
-                <a:solidFill>
-                  <a:srgbClr val="20223F"/>
-                </a:solidFill>
-                <a:latin typeface="Arial"/>
-                <a:ea typeface="Arial"/>
-                <a:cs typeface="Arial"/>
-                <a:sym typeface="Arial"/>
-              </a:rPr>
-              <a:t>地域で選ばれる受け皿に</a:t>
-            </a:r>
-            <a:endParaRPr b="0" i="0" sz="1350" u="none" cap="none" strike="noStrike">
-              <a:solidFill>
-                <a:schemeClr val="dk1"/>
-              </a:solidFill>
-              <a:latin typeface="Calibri"/>
-              <a:ea typeface="Calibri"/>
-              <a:cs typeface="Calibri"/>
-              <a:sym typeface="Calibri"/>
-            </a:endParaRPr>
-          </a:p>
-        </p:txBody>
-      </p:sp>
-      <p:sp>
-        <p:nvSpPr>
-          <p:cNvPr id="282" name="Google Shape;282;p11"/>
-          <p:cNvSpPr/>
-          <p:nvPr/>
-        </p:nvSpPr>
-        <p:spPr>
-          <a:xfrm>
-            <a:off x="8333232" y="4654296"/>
-            <a:ext cx="3078480" cy="548640"/>
-          </a:xfrm>
-          <a:prstGeom prst="rect">
-            <a:avLst/>
-          </a:prstGeom>
-          <a:noFill/>
-          <a:ln>
-            <a:noFill/>
-          </a:ln>
-        </p:spPr>
-        <p:txBody>
-          <a:bodyPr anchorCtr="0" anchor="ctr" bIns="0" lIns="0" spcFirstLastPara="1" rIns="0" wrap="square" tIns="0">
-            <a:noAutofit/>
-          </a:bodyPr>
-          <a:lstStyle/>
-          <a:p>
-            <a:pPr indent="0" lvl="0" marL="0" marR="0" rtl="0" algn="l">
-              <a:lnSpc>
-                <a:spcPct val="112000"/>
-              </a:lnSpc>
-              <a:spcBef>
-                <a:spcPts val="0"/>
-              </a:spcBef>
-              <a:spcAft>
-                <a:spcPts val="0"/>
-              </a:spcAft>
-              <a:buClr>
-                <a:srgbClr val="6B7280"/>
-              </a:buClr>
-              <a:buSzPts val="1050"/>
-              <a:buFont typeface="Arial"/>
-              <a:buNone/>
-            </a:pPr>
-            <a:r>
-              <a:rPr b="0" i="0" lang="en-US" sz="1050" u="none" cap="none" strike="noStrike">
-                <a:solidFill>
-                  <a:srgbClr val="6B7280"/>
-                </a:solidFill>
-                <a:latin typeface="Arial"/>
-                <a:ea typeface="Arial"/>
-                <a:cs typeface="Arial"/>
-                <a:sym typeface="Arial"/>
-              </a:rPr>
-              <a:t>鶴見・横浜・川崎エリアで複数社と比較されたとき、選ばれる状態を目指す</a:t>
-            </a:r>
-            <a:endParaRPr b="0" i="0" sz="1050" u="none" cap="none" strike="noStrike">
-              <a:solidFill>
-                <a:schemeClr val="dk1"/>
-              </a:solidFill>
-              <a:latin typeface="Calibri"/>
-              <a:ea typeface="Calibri"/>
-              <a:cs typeface="Calibri"/>
-              <a:sym typeface="Calibri"/>
-            </a:endParaRPr>
-          </a:p>
-        </p:txBody>
-      </p:sp>
-      <p:sp>
-        <p:nvSpPr>
-          <p:cNvPr id="283" name="Google Shape;283;p11"/>
-          <p:cNvSpPr/>
-          <p:nvPr/>
-        </p:nvSpPr>
-        <p:spPr>
-          <a:xfrm>
-            <a:off x="548640" y="5440680"/>
-            <a:ext cx="11064240" cy="365760"/>
-          </a:xfrm>
-          <a:prstGeom prst="rect">
-            <a:avLst/>
-          </a:prstGeom>
-          <a:noFill/>
-          <a:ln>
-            <a:noFill/>
-          </a:ln>
-        </p:spPr>
-        <p:txBody>
-          <a:bodyPr anchorCtr="0" anchor="ctr" bIns="0" lIns="0" spcFirstLastPara="1" rIns="0" wrap="square" tIns="0">
-            <a:noAutofit/>
-          </a:bodyPr>
-          <a:lstStyle/>
-          <a:p>
-            <a:pPr indent="0" lvl="0" marL="0" marR="0" rtl="0" algn="l">
-              <a:spcBef>
-                <a:spcPts val="0"/>
-              </a:spcBef>
-              <a:spcAft>
-                <a:spcPts val="0"/>
-              </a:spcAft>
-              <a:buClr>
-                <a:srgbClr val="6B7280"/>
-              </a:buClr>
-              <a:buSzPts val="1000"/>
-              <a:buFont typeface="Arial"/>
-              <a:buNone/>
-            </a:pPr>
-            <a:r>
-              <a:rPr b="0" i="1" lang="en-US" sz="1000" u="none" cap="none" strike="noStrike">
-                <a:solidFill>
-                  <a:srgbClr val="6B7280"/>
-                </a:solidFill>
-                <a:latin typeface="Arial"/>
-                <a:ea typeface="Arial"/>
-                <a:cs typeface="Arial"/>
-                <a:sym typeface="Arial"/>
-              </a:rPr>
-              <a:t>※ 順位・問い合わせ数・売上等の成果を保証するものではありません。数値レポートで透明性を担保し、改善を継続します。Googleポリシー・薬機法を守る運用で、口コミ資産を守りながら育てます。</a:t>
-            </a:r>
-            <a:endParaRPr b="0" i="0" sz="1000" u="none" cap="none" strike="noStrike">
-              <a:solidFill>
-                <a:schemeClr val="dk1"/>
-              </a:solidFill>
-              <a:latin typeface="Calibri"/>
-              <a:ea typeface="Calibri"/>
-              <a:cs typeface="Calibri"/>
-              <a:sym typeface="Calibri"/>
-            </a:endParaRPr>
-          </a:p>
-        </p:txBody>
-      </p:sp>
-      <p:sp>
-        <p:nvSpPr>
-          <p:cNvPr id="284" name="Google Shape;284;p11"/>
+          <p:cNvPr id="59" name="Google Shape;59;p4"/>
           <p:cNvSpPr/>
           <p:nvPr/>
         </p:nvSpPr>

--- a/proposal-generator/template/proposal_template.pptx
+++ b/proposal-generator/template/proposal_template.pptx
@@ -3942,7 +3942,7 @@
             <a:r>
               <a:rPr b="1" i="0" lang="en-US" sz="1500" u="none" cap="none" strike="noStrike">
                 <a:solidFill>
-                  <a:srgbClr val="C7CBFF"/>
+                  <a:srgbClr val="3E4BA0"/>
                 </a:solidFill>
                 <a:latin typeface="Arial"/>
                 <a:ea typeface="Arial"/>
@@ -4005,7 +4005,7 @@
             <a:r>
               <a:rPr b="1" i="0" lang="en-US" sz="3300" u="none" cap="none" strike="noStrike">
                 <a:solidFill>
-                  <a:srgbClr val="FFFFFF"/>
+                  <a:srgbClr val="20223F"/>
                 </a:solidFill>
                 <a:latin typeface="Arial"/>
                 <a:ea typeface="Arial"/>
@@ -4068,7 +4068,7 @@
             <a:r>
               <a:rPr b="1" i="0" lang="en-US" sz="4000" u="none" cap="none" strike="noStrike">
                 <a:solidFill>
-                  <a:srgbClr val="FFC7CF"/>
+                  <a:srgbClr val="F4748A"/>
                 </a:solidFill>
                 <a:latin typeface="Arial"/>
                 <a:ea typeface="Arial"/>
@@ -4080,7 +4080,7 @@
             <a:r>
               <a:rPr b="1" i="0" lang="en-US" sz="4000" u="none" cap="none" strike="noStrike">
                 <a:solidFill>
-                  <a:srgbClr val="FFFFFF"/>
+                  <a:srgbClr val="20223F"/>
                 </a:solidFill>
                 <a:latin typeface="Arial"/>
                 <a:ea typeface="Arial"/>
@@ -4146,7 +4146,7 @@
             <a:r>
               <a:rPr b="0" i="0" lang="en-US" sz="1400" u="none" cap="none" strike="noStrike">
                 <a:solidFill>
-                  <a:srgbClr val="D8DBFF"/>
+                  <a:srgbClr val="3E4BA0"/>
                 </a:solidFill>
                 <a:latin typeface="Arial"/>
                 <a:ea typeface="Arial"/>
@@ -4214,6 +4214,9 @@
               <a:buNone/>
             </a:pPr>
             <a:r>
+              <a:rPr>
+                <a:solidFill/>
+              </a:rPr>
               <a:t/>
             </a:r>
             <a:endParaRPr/>
@@ -4262,7 +4265,7 @@
             <a:r>
               <a:rPr b="1" i="0" lang="en-US" sz="1200" u="none" cap="none" strike="noStrike">
                 <a:solidFill>
-                  <a:srgbClr val="FFFFFF"/>
+                  <a:srgbClr val="20223F"/>
                 </a:solidFill>
                 <a:latin typeface="Arial"/>
                 <a:ea typeface="Arial"/>
@@ -4330,6 +4333,9 @@
               <a:buNone/>
             </a:pPr>
             <a:r>
+              <a:rPr>
+                <a:solidFill/>
+              </a:rPr>
               <a:t/>
             </a:r>
             <a:endParaRPr/>
@@ -4378,7 +4384,7 @@
             <a:r>
               <a:rPr b="1" i="0" lang="en-US" sz="1200" u="none" cap="none" strike="noStrike">
                 <a:solidFill>
-                  <a:srgbClr val="FFFFFF"/>
+                  <a:srgbClr val="20223F"/>
                 </a:solidFill>
                 <a:latin typeface="Arial"/>
                 <a:ea typeface="Arial"/>
@@ -4446,6 +4452,9 @@
               <a:buNone/>
             </a:pPr>
             <a:r>
+              <a:rPr>
+                <a:solidFill/>
+              </a:rPr>
               <a:t/>
             </a:r>
             <a:endParaRPr/>
@@ -4494,7 +4503,7 @@
             <a:r>
               <a:rPr b="1" i="0" lang="en-US" sz="1200" u="none" cap="none" strike="noStrike">
                 <a:solidFill>
-                  <a:srgbClr val="FFFFFF"/>
+                  <a:srgbClr val="20223F"/>
                 </a:solidFill>
                 <a:latin typeface="Arial"/>
                 <a:ea typeface="Arial"/>
@@ -4562,6 +4571,9 @@
               <a:buNone/>
             </a:pPr>
             <a:r>
+              <a:rPr>
+                <a:solidFill/>
+              </a:rPr>
               <a:t/>
             </a:r>
             <a:endParaRPr/>
@@ -4610,7 +4622,7 @@
             <a:r>
               <a:rPr b="1" i="0" lang="en-US" sz="1200" u="none" cap="none" strike="noStrike">
                 <a:solidFill>
-                  <a:srgbClr val="FFFFFF"/>
+                  <a:srgbClr val="20223F"/>
                 </a:solidFill>
                 <a:latin typeface="Arial"/>
                 <a:ea typeface="Arial"/>
@@ -4673,7 +4685,7 @@
             <a:r>
               <a:rPr b="0" i="0" lang="en-US" sz="1000" u="none" cap="none" strike="noStrike">
                 <a:solidFill>
-                  <a:srgbClr val="A7A9F0"/>
+                  <a:srgbClr val="3E4BA0"/>
                 </a:solidFill>
                 <a:latin typeface="Arial"/>
                 <a:ea typeface="Arial"/>
@@ -4994,6 +5006,9 @@
               <a:buNone/>
             </a:pPr>
             <a:r>
+              <a:rPr>
+                <a:solidFill/>
+              </a:rPr>
               <a:t/>
             </a:r>
             <a:endParaRPr/>
@@ -5256,6 +5271,9 @@
               <a:buNone/>
             </a:pPr>
             <a:r>
+              <a:rPr>
+                <a:solidFill/>
+              </a:rPr>
               <a:t/>
             </a:r>
             <a:endParaRPr/>
@@ -5518,6 +5536,9 @@
               <a:buNone/>
             </a:pPr>
             <a:r>
+              <a:rPr>
+                <a:solidFill/>
+              </a:rPr>
               <a:t/>
             </a:r>
             <a:endParaRPr/>
@@ -5780,6 +5801,9 @@
               <a:buNone/>
             </a:pPr>
             <a:r>
+              <a:rPr>
+                <a:solidFill/>
+              </a:rPr>
               <a:t/>
             </a:r>
             <a:endParaRPr/>
@@ -6042,6 +6066,9 @@
               <a:buNone/>
             </a:pPr>
             <a:r>
+              <a:rPr>
+                <a:solidFill/>
+              </a:rPr>
               <a:t/>
             </a:r>
             <a:endParaRPr/>
@@ -6304,6 +6331,9 @@
               <a:buNone/>
             </a:pPr>
             <a:r>
+              <a:rPr>
+                <a:solidFill/>
+              </a:rPr>
               <a:t/>
             </a:r>
             <a:endParaRPr/>
@@ -7008,6 +7038,9 @@
               <a:buNone/>
             </a:pPr>
             <a:r>
+              <a:rPr>
+                <a:solidFill/>
+              </a:rPr>
               <a:t/>
             </a:r>
             <a:endParaRPr/>
@@ -7267,6 +7300,9 @@
               <a:buNone/>
             </a:pPr>
             <a:r>
+              <a:rPr>
+                <a:solidFill/>
+              </a:rPr>
               <a:t/>
             </a:r>
             <a:endParaRPr/>
@@ -7526,6 +7562,9 @@
               <a:buNone/>
             </a:pPr>
             <a:r>
+              <a:rPr>
+                <a:solidFill/>
+              </a:rPr>
               <a:t/>
             </a:r>
             <a:endParaRPr/>
@@ -7772,6 +7811,9 @@
               <a:buNone/>
             </a:pPr>
             <a:r>
+              <a:rPr>
+                <a:solidFill/>
+              </a:rPr>
               <a:t/>
             </a:r>
             <a:endParaRPr/>
@@ -8128,7 +8170,7 @@
             <a:r>
               <a:rPr b="1" i="0" lang="en-US" sz="1200" u="none" cap="none" strike="noStrike">
                 <a:solidFill>
-                  <a:srgbClr val="FFC7CF"/>
+                  <a:srgbClr val="F4748A"/>
                 </a:solidFill>
                 <a:latin typeface="Arial"/>
                 <a:ea typeface="Arial"/>
@@ -8191,7 +8233,7 @@
             <a:r>
               <a:rPr b="1" i="0" lang="en-US" sz="2700" u="none" cap="none" strike="noStrike">
                 <a:solidFill>
-                  <a:srgbClr val="FFFFFF"/>
+                  <a:srgbClr val="20223F"/>
                 </a:solidFill>
                 <a:latin typeface="Arial"/>
                 <a:ea typeface="Arial"/>
@@ -8254,7 +8296,7 @@
             <a:r>
               <a:rPr b="0" i="0" lang="en-US" sz="1400" u="none" cap="none" strike="noStrike">
                 <a:solidFill>
-                  <a:srgbClr val="D8DBFF"/>
+                  <a:srgbClr val="3E4BA0"/>
                 </a:solidFill>
                 <a:latin typeface="Arial"/>
                 <a:ea typeface="Arial"/>
@@ -8322,6 +8364,9 @@
               <a:buNone/>
             </a:pPr>
             <a:r>
+              <a:rPr>
+                <a:solidFill/>
+              </a:rPr>
               <a:t/>
             </a:r>
             <a:endParaRPr/>
@@ -8415,7 +8460,7 @@
             <a:r>
               <a:rPr b="1" i="0" lang="en-US" sz="1500" u="none" cap="none" strike="noStrike">
                 <a:solidFill>
-                  <a:srgbClr val="FFFFFF"/>
+                  <a:srgbClr val="20223F"/>
                 </a:solidFill>
                 <a:latin typeface="Arial"/>
                 <a:ea typeface="Arial"/>
@@ -8481,7 +8526,7 @@
             <a:r>
               <a:rPr b="1" i="0" lang="en-US" sz="1350" u="none" cap="none" strike="noStrike">
                 <a:solidFill>
-                  <a:srgbClr val="FFFFFF"/>
+                  <a:srgbClr val="20223F"/>
                 </a:solidFill>
                 <a:latin typeface="Arial"/>
                 <a:ea typeface="Arial"/>
@@ -8549,6 +8594,9 @@
               <a:buNone/>
             </a:pPr>
             <a:r>
+              <a:rPr>
+                <a:solidFill/>
+              </a:rPr>
               <a:t/>
             </a:r>
             <a:endParaRPr/>
@@ -8642,7 +8690,7 @@
             <a:r>
               <a:rPr b="1" i="0" lang="en-US" sz="1500" u="none" cap="none" strike="noStrike">
                 <a:solidFill>
-                  <a:srgbClr val="FFFFFF"/>
+                  <a:srgbClr val="20223F"/>
                 </a:solidFill>
                 <a:latin typeface="Arial"/>
                 <a:ea typeface="Arial"/>
@@ -8708,7 +8756,7 @@
             <a:r>
               <a:rPr b="1" i="0" lang="en-US" sz="1350" u="none" cap="none" strike="noStrike">
                 <a:solidFill>
-                  <a:srgbClr val="FFFFFF"/>
+                  <a:srgbClr val="20223F"/>
                 </a:solidFill>
                 <a:latin typeface="Arial"/>
                 <a:ea typeface="Arial"/>
@@ -8776,6 +8824,9 @@
               <a:buNone/>
             </a:pPr>
             <a:r>
+              <a:rPr>
+                <a:solidFill/>
+              </a:rPr>
               <a:t/>
             </a:r>
             <a:endParaRPr/>
@@ -8869,7 +8920,7 @@
             <a:r>
               <a:rPr b="1" i="0" lang="en-US" sz="1500" u="none" cap="none" strike="noStrike">
                 <a:solidFill>
-                  <a:srgbClr val="FFFFFF"/>
+                  <a:srgbClr val="20223F"/>
                 </a:solidFill>
                 <a:latin typeface="Arial"/>
                 <a:ea typeface="Arial"/>
@@ -8935,7 +8986,7 @@
             <a:r>
               <a:rPr b="1" i="0" lang="en-US" sz="1350" u="none" cap="none" strike="noStrike">
                 <a:solidFill>
-                  <a:srgbClr val="FFFFFF"/>
+                  <a:srgbClr val="20223F"/>
                 </a:solidFill>
                 <a:latin typeface="Arial"/>
                 <a:ea typeface="Arial"/>
@@ -9003,6 +9054,9 @@
               <a:buNone/>
             </a:pPr>
             <a:r>
+              <a:rPr>
+                <a:solidFill/>
+              </a:rPr>
               <a:t/>
             </a:r>
             <a:endParaRPr/>
@@ -9096,7 +9150,7 @@
             <a:r>
               <a:rPr b="1" i="0" lang="en-US" sz="1500" u="none" cap="none" strike="noStrike">
                 <a:solidFill>
-                  <a:srgbClr val="FFFFFF"/>
+                  <a:srgbClr val="20223F"/>
                 </a:solidFill>
                 <a:latin typeface="Arial"/>
                 <a:ea typeface="Arial"/>
@@ -9162,7 +9216,7 @@
             <a:r>
               <a:rPr b="1" i="0" lang="en-US" sz="1350" u="none" cap="none" strike="noStrike">
                 <a:solidFill>
-                  <a:srgbClr val="FFFFFF"/>
+                  <a:srgbClr val="20223F"/>
                 </a:solidFill>
                 <a:latin typeface="Arial"/>
                 <a:ea typeface="Arial"/>
@@ -9230,6 +9284,9 @@
               <a:buNone/>
             </a:pPr>
             <a:r>
+              <a:rPr>
+                <a:solidFill/>
+              </a:rPr>
               <a:t/>
             </a:r>
             <a:endParaRPr/>
@@ -9323,7 +9380,7 @@
             <a:r>
               <a:rPr b="1" i="0" lang="en-US" sz="1500" u="none" cap="none" strike="noStrike">
                 <a:solidFill>
-                  <a:srgbClr val="FFFFFF"/>
+                  <a:srgbClr val="20223F"/>
                 </a:solidFill>
                 <a:latin typeface="Arial"/>
                 <a:ea typeface="Arial"/>
@@ -9389,7 +9446,7 @@
             <a:r>
               <a:rPr b="1" i="0" lang="en-US" sz="1350" u="none" cap="none" strike="noStrike">
                 <a:solidFill>
-                  <a:srgbClr val="FFFFFF"/>
+                  <a:srgbClr val="20223F"/>
                 </a:solidFill>
                 <a:latin typeface="Arial"/>
                 <a:ea typeface="Arial"/>
@@ -9457,6 +9514,9 @@
               <a:buNone/>
             </a:pPr>
             <a:r>
+              <a:rPr>
+                <a:solidFill/>
+              </a:rPr>
               <a:t/>
             </a:r>
             <a:endParaRPr/>
@@ -9550,7 +9610,7 @@
             <a:r>
               <a:rPr b="1" i="0" lang="en-US" sz="1500" u="none" cap="none" strike="noStrike">
                 <a:solidFill>
-                  <a:srgbClr val="FFFFFF"/>
+                  <a:srgbClr val="20223F"/>
                 </a:solidFill>
                 <a:latin typeface="Arial"/>
                 <a:ea typeface="Arial"/>
@@ -9616,7 +9676,7 @@
             <a:r>
               <a:rPr b="1" i="0" lang="en-US" sz="1350" u="none" cap="none" strike="noStrike">
                 <a:solidFill>
-                  <a:srgbClr val="FFFFFF"/>
+                  <a:srgbClr val="20223F"/>
                 </a:solidFill>
                 <a:latin typeface="Arial"/>
                 <a:ea typeface="Arial"/>
@@ -9683,6 +9743,9 @@
               <a:buNone/>
             </a:pPr>
             <a:r>
+              <a:rPr>
+                <a:solidFill/>
+              </a:rPr>
               <a:t/>
             </a:r>
             <a:endParaRPr/>
@@ -10118,6 +10181,9 @@
               <a:buNone/>
             </a:pPr>
             <a:r>
+              <a:rPr>
+                <a:solidFill/>
+              </a:rPr>
               <a:t/>
             </a:r>
             <a:endParaRPr/>
@@ -10377,6 +10443,9 @@
               <a:buNone/>
             </a:pPr>
             <a:r>
+              <a:rPr>
+                <a:solidFill/>
+              </a:rPr>
               <a:t/>
             </a:r>
             <a:endParaRPr/>
@@ -10636,6 +10705,9 @@
               <a:buNone/>
             </a:pPr>
             <a:r>
+              <a:rPr>
+                <a:solidFill/>
+              </a:rPr>
               <a:t/>
             </a:r>
             <a:endParaRPr/>
@@ -10882,6 +10954,9 @@
               <a:buNone/>
             </a:pPr>
             <a:r>
+              <a:rPr>
+                <a:solidFill/>
+              </a:rPr>
               <a:t/>
             </a:r>
             <a:endParaRPr/>
@@ -11353,6 +11428,9 @@
               <a:buNone/>
             </a:pPr>
             <a:r>
+              <a:rPr>
+                <a:solidFill/>
+              </a:rPr>
               <a:t/>
             </a:r>
             <a:endParaRPr/>
@@ -11715,6 +11793,9 @@
               <a:buNone/>
             </a:pPr>
             <a:r>
+              <a:rPr>
+                <a:solidFill/>
+              </a:rPr>
               <a:t/>
             </a:r>
             <a:endParaRPr/>
@@ -12077,6 +12158,9 @@
               <a:buNone/>
             </a:pPr>
             <a:r>
+              <a:rPr>
+                <a:solidFill/>
+              </a:rPr>
               <a:t/>
             </a:r>
             <a:endParaRPr/>
@@ -12439,6 +12523,9 @@
               <a:buNone/>
             </a:pPr>
             <a:r>
+              <a:rPr>
+                <a:solidFill/>
+              </a:rPr>
               <a:t/>
             </a:r>
             <a:endParaRPr/>
@@ -12851,6 +12938,9 @@
               <a:buNone/>
             </a:pPr>
             <a:r>
+              <a:rPr>
+                <a:solidFill/>
+              </a:rPr>
               <a:t/>
             </a:r>
             <a:endParaRPr/>
@@ -12959,6 +13049,9 @@
               <a:buNone/>
             </a:pPr>
             <a:r>
+              <a:rPr>
+                <a:solidFill/>
+              </a:rPr>
               <a:t/>
             </a:r>
             <a:endParaRPr/>
@@ -13067,6 +13160,9 @@
               <a:buNone/>
             </a:pPr>
             <a:r>
+              <a:rPr>
+                <a:solidFill/>
+              </a:rPr>
               <a:t/>
             </a:r>
             <a:endParaRPr/>
@@ -13175,6 +13271,9 @@
               <a:buNone/>
             </a:pPr>
             <a:r>
+              <a:rPr>
+                <a:solidFill/>
+              </a:rPr>
               <a:t/>
             </a:r>
             <a:endParaRPr/>
@@ -13283,6 +13382,9 @@
               <a:buNone/>
             </a:pPr>
             <a:r>
+              <a:rPr>
+                <a:solidFill/>
+              </a:rPr>
               <a:t/>
             </a:r>
             <a:endParaRPr/>
@@ -13391,6 +13493,9 @@
               <a:buNone/>
             </a:pPr>
             <a:r>
+              <a:rPr>
+                <a:solidFill/>
+              </a:rPr>
               <a:t/>
             </a:r>
             <a:endParaRPr/>
@@ -17182,6 +17287,9 @@
               <a:buNone/>
             </a:pPr>
             <a:r>
+              <a:rPr>
+                <a:solidFill/>
+              </a:rPr>
               <a:t/>
             </a:r>
             <a:endParaRPr/>
@@ -17302,7 +17410,7 @@
             <a:r>
               <a:rPr b="1" i="0" lang="en-US" sz="2200" u="none" cap="none" strike="noStrike">
                 <a:solidFill>
-                  <a:srgbClr val="D7D9F5"/>
+                  <a:srgbClr val="3E4BA0"/>
                 </a:solidFill>
                 <a:latin typeface="Arial"/>
                 <a:ea typeface="Arial"/>
@@ -17504,6 +17612,9 @@
               <a:buNone/>
             </a:pPr>
             <a:r>
+              <a:rPr>
+                <a:solidFill/>
+              </a:rPr>
               <a:t/>
             </a:r>
             <a:endParaRPr/>
@@ -17624,7 +17735,7 @@
             <a:r>
               <a:rPr b="1" i="0" lang="en-US" sz="2200" u="none" cap="none" strike="noStrike">
                 <a:solidFill>
-                  <a:srgbClr val="D7D9F5"/>
+                  <a:srgbClr val="3E4BA0"/>
                 </a:solidFill>
                 <a:latin typeface="Arial"/>
                 <a:ea typeface="Arial"/>
@@ -17826,6 +17937,9 @@
               <a:buNone/>
             </a:pPr>
             <a:r>
+              <a:rPr>
+                <a:solidFill/>
+              </a:rPr>
               <a:t/>
             </a:r>
             <a:endParaRPr/>
@@ -17946,7 +18060,7 @@
             <a:r>
               <a:rPr b="1" i="0" lang="en-US" sz="2200" u="none" cap="none" strike="noStrike">
                 <a:solidFill>
-                  <a:srgbClr val="D7D9F5"/>
+                  <a:srgbClr val="3E4BA0"/>
                 </a:solidFill>
                 <a:latin typeface="Arial"/>
                 <a:ea typeface="Arial"/>
@@ -18148,6 +18262,9 @@
               <a:buNone/>
             </a:pPr>
             <a:r>
+              <a:rPr>
+                <a:solidFill/>
+              </a:rPr>
               <a:t/>
             </a:r>
             <a:endParaRPr/>
@@ -18268,7 +18385,7 @@
             <a:r>
               <a:rPr b="1" i="0" lang="en-US" sz="2200" u="none" cap="none" strike="noStrike">
                 <a:solidFill>
-                  <a:srgbClr val="D7D9F5"/>
+                  <a:srgbClr val="3E4BA0"/>
                 </a:solidFill>
                 <a:latin typeface="Arial"/>
                 <a:ea typeface="Arial"/>
@@ -18470,6 +18587,9 @@
               <a:buNone/>
             </a:pPr>
             <a:r>
+              <a:rPr>
+                <a:solidFill/>
+              </a:rPr>
               <a:t/>
             </a:r>
             <a:endParaRPr/>
@@ -18590,7 +18710,7 @@
             <a:r>
               <a:rPr b="1" i="0" lang="en-US" sz="2200" u="none" cap="none" strike="noStrike">
                 <a:solidFill>
-                  <a:srgbClr val="D7D9F5"/>
+                  <a:srgbClr val="3E4BA0"/>
                 </a:solidFill>
                 <a:latin typeface="Arial"/>
                 <a:ea typeface="Arial"/>
@@ -18792,6 +18912,9 @@
               <a:buNone/>
             </a:pPr>
             <a:r>
+              <a:rPr>
+                <a:solidFill/>
+              </a:rPr>
               <a:t/>
             </a:r>
             <a:endParaRPr/>
@@ -18912,7 +19035,7 @@
             <a:r>
               <a:rPr b="1" i="0" lang="en-US" sz="2200" u="none" cap="none" strike="noStrike">
                 <a:solidFill>
-                  <a:srgbClr val="D7D9F5"/>
+                  <a:srgbClr val="3E4BA0"/>
                 </a:solidFill>
                 <a:latin typeface="Arial"/>
                 <a:ea typeface="Arial"/>
@@ -19500,6 +19623,9 @@
               <a:buNone/>
             </a:pPr>
             <a:r>
+              <a:rPr>
+                <a:solidFill/>
+              </a:rPr>
               <a:t/>
             </a:r>
             <a:endParaRPr/>
@@ -19545,6 +19671,9 @@
               <a:buNone/>
             </a:pPr>
             <a:r>
+              <a:rPr>
+                <a:solidFill/>
+              </a:rPr>
               <a:t/>
             </a:r>
             <a:endParaRPr/>
@@ -20267,7 +20396,7 @@
             <a:r>
               <a:rPr b="1" i="0" lang="en-US" sz="1200" u="none" cap="none" strike="noStrike">
                 <a:solidFill>
-                  <a:srgbClr val="FFFFFF"/>
+                  <a:srgbClr val="20223F"/>
                 </a:solidFill>
                 <a:latin typeface="Arial"/>
                 <a:ea typeface="Arial"/>
@@ -20340,6 +20469,9 @@
               <a:buNone/>
             </a:pPr>
             <a:r>
+              <a:rPr>
+                <a:solidFill/>
+              </a:rPr>
               <a:t/>
             </a:r>
             <a:endParaRPr/>
@@ -20385,6 +20517,9 @@
               <a:buNone/>
             </a:pPr>
             <a:r>
+              <a:rPr>
+                <a:solidFill/>
+              </a:rPr>
               <a:t/>
             </a:r>
             <a:endParaRPr/>
@@ -20942,6 +21077,9 @@
               <a:buNone/>
             </a:pPr>
             <a:r>
+              <a:rPr>
+                <a:solidFill/>
+              </a:rPr>
               <a:t/>
             </a:r>
             <a:endParaRPr/>
@@ -20987,6 +21125,9 @@
               <a:buNone/>
             </a:pPr>
             <a:r>
+              <a:rPr>
+                <a:solidFill/>
+              </a:rPr>
               <a:t/>
             </a:r>
             <a:endParaRPr/>
@@ -21591,6 +21732,9 @@
               <a:buNone/>
             </a:pPr>
             <a:r>
+              <a:rPr>
+                <a:solidFill/>
+              </a:rPr>
               <a:t/>
             </a:r>
             <a:endParaRPr/>
@@ -26396,6 +26540,9 @@
               <a:buNone/>
             </a:pPr>
             <a:r>
+              <a:rPr>
+                <a:solidFill/>
+              </a:rPr>
               <a:t/>
             </a:r>
             <a:endParaRPr/>
@@ -26489,7 +26636,7 @@
             <a:r>
               <a:rPr b="1" i="0" lang="en-US" sz="1700" u="none" cap="none" strike="noStrike">
                 <a:solidFill>
-                  <a:srgbClr val="FFFFFF"/>
+                  <a:srgbClr val="20223F"/>
                 </a:solidFill>
                 <a:latin typeface="Arial"/>
                 <a:ea typeface="Arial"/>
@@ -26694,6 +26841,9 @@
               <a:buNone/>
             </a:pPr>
             <a:r>
+              <a:rPr>
+                <a:solidFill/>
+              </a:rPr>
               <a:t/>
             </a:r>
             <a:endParaRPr/>
@@ -26787,7 +26937,7 @@
             <a:r>
               <a:rPr b="1" i="0" lang="en-US" sz="1700" u="none" cap="none" strike="noStrike">
                 <a:solidFill>
-                  <a:srgbClr val="FFFFFF"/>
+                  <a:srgbClr val="20223F"/>
                 </a:solidFill>
                 <a:latin typeface="Arial"/>
                 <a:ea typeface="Arial"/>
@@ -26992,6 +27142,9 @@
               <a:buNone/>
             </a:pPr>
             <a:r>
+              <a:rPr>
+                <a:solidFill/>
+              </a:rPr>
               <a:t/>
             </a:r>
             <a:endParaRPr/>
@@ -27085,7 +27238,7 @@
             <a:r>
               <a:rPr b="1" i="0" lang="en-US" sz="1700" u="none" cap="none" strike="noStrike">
                 <a:solidFill>
-                  <a:srgbClr val="FFFFFF"/>
+                  <a:srgbClr val="20223F"/>
                 </a:solidFill>
                 <a:latin typeface="Arial"/>
                 <a:ea typeface="Arial"/>
@@ -27290,6 +27443,9 @@
               <a:buNone/>
             </a:pPr>
             <a:r>
+              <a:rPr>
+                <a:solidFill/>
+              </a:rPr>
               <a:t/>
             </a:r>
             <a:endParaRPr/>
@@ -27383,7 +27539,7 @@
             <a:r>
               <a:rPr b="1" i="0" lang="en-US" sz="1700" u="none" cap="none" strike="noStrike">
                 <a:solidFill>
-                  <a:srgbClr val="FFFFFF"/>
+                  <a:srgbClr val="20223F"/>
                 </a:solidFill>
                 <a:latin typeface="Arial"/>
                 <a:ea typeface="Arial"/>
@@ -27967,6 +28123,9 @@
               <a:buNone/>
             </a:pPr>
             <a:r>
+              <a:rPr>
+                <a:solidFill/>
+              </a:rPr>
               <a:t/>
             </a:r>
             <a:endParaRPr/>
@@ -28226,6 +28385,9 @@
               <a:buNone/>
             </a:pPr>
             <a:r>
+              <a:rPr>
+                <a:solidFill/>
+              </a:rPr>
               <a:t/>
             </a:r>
             <a:endParaRPr/>
@@ -28485,6 +28647,9 @@
               <a:buNone/>
             </a:pPr>
             <a:r>
+              <a:rPr>
+                <a:solidFill/>
+              </a:rPr>
               <a:t/>
             </a:r>
             <a:endParaRPr/>
@@ -28731,6 +28896,9 @@
               <a:buNone/>
             </a:pPr>
             <a:r>
+              <a:rPr>
+                <a:solidFill/>
+              </a:rPr>
               <a:t/>
             </a:r>
             <a:endParaRPr/>

--- a/proposal-generator/template/proposal_template.pptx
+++ b/proposal-generator/template/proposal_template.pptx
@@ -26636,7 +26636,7 @@
             <a:r>
               <a:rPr b="1" i="0" lang="en-US" sz="1700" u="none" cap="none" strike="noStrike">
                 <a:solidFill>
-                  <a:srgbClr val="20223F"/>
+                  <a:srgbClr val="FFFFFF"/>
                 </a:solidFill>
                 <a:latin typeface="Arial"/>
                 <a:ea typeface="Arial"/>
@@ -26937,7 +26937,7 @@
             <a:r>
               <a:rPr b="1" i="0" lang="en-US" sz="1700" u="none" cap="none" strike="noStrike">
                 <a:solidFill>
-                  <a:srgbClr val="20223F"/>
+                  <a:srgbClr val="FFFFFF"/>
                 </a:solidFill>
                 <a:latin typeface="Arial"/>
                 <a:ea typeface="Arial"/>
@@ -27238,7 +27238,7 @@
             <a:r>
               <a:rPr b="1" i="0" lang="en-US" sz="1700" u="none" cap="none" strike="noStrike">
                 <a:solidFill>
-                  <a:srgbClr val="20223F"/>
+                  <a:srgbClr val="FFFFFF"/>
                 </a:solidFill>
                 <a:latin typeface="Arial"/>
                 <a:ea typeface="Arial"/>
@@ -27539,7 +27539,7 @@
             <a:r>
               <a:rPr b="1" i="0" lang="en-US" sz="1700" u="none" cap="none" strike="noStrike">
                 <a:solidFill>
-                  <a:srgbClr val="20223F"/>
+                  <a:srgbClr val="FFFFFF"/>
                 </a:solidFill>
                 <a:latin typeface="Arial"/>
                 <a:ea typeface="Arial"/>

--- a/proposal-generator/template/proposal_template.pptx
+++ b/proposal-generator/template/proposal_template.pptx
@@ -8459,9 +8459,6 @@
             </a:pPr>
             <a:r>
               <a:rPr b="1" i="0" lang="en-US" sz="1500" u="none" cap="none" strike="noStrike">
-                <a:solidFill>
-                  <a:srgbClr val="20223F"/>
-                </a:solidFill>
                 <a:latin typeface="Arial"/>
                 <a:ea typeface="Arial"/>
                 <a:cs typeface="Arial"/>
@@ -8689,9 +8686,6 @@
             </a:pPr>
             <a:r>
               <a:rPr b="1" i="0" lang="en-US" sz="1500" u="none" cap="none" strike="noStrike">
-                <a:solidFill>
-                  <a:srgbClr val="20223F"/>
-                </a:solidFill>
                 <a:latin typeface="Arial"/>
                 <a:ea typeface="Arial"/>
                 <a:cs typeface="Arial"/>
@@ -8919,9 +8913,6 @@
             </a:pPr>
             <a:r>
               <a:rPr b="1" i="0" lang="en-US" sz="1500" u="none" cap="none" strike="noStrike">
-                <a:solidFill>
-                  <a:srgbClr val="20223F"/>
-                </a:solidFill>
                 <a:latin typeface="Arial"/>
                 <a:ea typeface="Arial"/>
                 <a:cs typeface="Arial"/>
@@ -9149,9 +9140,6 @@
             </a:pPr>
             <a:r>
               <a:rPr b="1" i="0" lang="en-US" sz="1500" u="none" cap="none" strike="noStrike">
-                <a:solidFill>
-                  <a:srgbClr val="20223F"/>
-                </a:solidFill>
                 <a:latin typeface="Arial"/>
                 <a:ea typeface="Arial"/>
                 <a:cs typeface="Arial"/>
@@ -9379,9 +9367,6 @@
             </a:pPr>
             <a:r>
               <a:rPr b="1" i="0" lang="en-US" sz="1500" u="none" cap="none" strike="noStrike">
-                <a:solidFill>
-                  <a:srgbClr val="20223F"/>
-                </a:solidFill>
                 <a:latin typeface="Arial"/>
                 <a:ea typeface="Arial"/>
                 <a:cs typeface="Arial"/>
@@ -9609,9 +9594,6 @@
             </a:pPr>
             <a:r>
               <a:rPr b="1" i="0" lang="en-US" sz="1500" u="none" cap="none" strike="noStrike">
-                <a:solidFill>
-                  <a:srgbClr val="20223F"/>
-                </a:solidFill>
                 <a:latin typeface="Arial"/>
                 <a:ea typeface="Arial"/>
                 <a:cs typeface="Arial"/>
